--- a/slides/doc-ref-07-editable-slides.pptx
+++ b/slides/doc-ref-07-editable-slides.pptx
@@ -2068,7 +2068,7 @@
                 <a:ea typeface="Arial" pitchFamily="34" charset="-122"/>
                 <a:cs typeface="Arial" pitchFamily="34" charset="-120"/>
               </a:rPr>
-              <a:t>Figure 1. Figure 1: Hub-and-Spoke topology orchestrating Multimodal Upload, Extraction, and Spanner Graph Hybrid RRF Search Agents.</a:t>
+              <a:t>Figure 1. Hub-and-Spoke topology orchestrating Multimodal Upload, Extraction, and Spanner Graph Hybrid RRF Search Agents.</a:t>
             </a:r>
             <a:endParaRPr lang="en-US" sz="820" dirty="0"/>
           </a:p>
@@ -2136,8 +2136,8 @@
         </p:nvSpPr>
         <p:spPr>
           <a:xfrm>
-            <a:off x="4027932" y="1869948"/>
-            <a:ext cx="1858975" cy="146304"/>
+            <a:off x="4027932" y="1858975"/>
+            <a:ext cx="1773936" cy="105156"/>
           </a:xfrm>
           <a:prstGeom prst="rect">
             <a:avLst/>
@@ -2146,7 +2146,7 @@
           <a:ln/>
         </p:spPr>
         <p:txBody>
-          <a:bodyPr wrap="square" lIns="0" tIns="0" rIns="0" bIns="0" rtlCol="0" anchor="t">
+          <a:bodyPr wrap="none" lIns="0" tIns="0" rIns="0" bIns="0" rtlCol="0" anchor="t">
             <a:normAutofit/>
           </a:bodyPr>
           <a:lstStyle/>
@@ -2158,17 +2158,17 @@
               <a:buNone/>
             </a:pPr>
             <a:r>
-              <a:rPr lang="en-US" sz="460" b="1" dirty="0">
-                <a:solidFill>
-                  <a:srgbClr val="202124"/>
-                </a:solidFill>
-                <a:latin typeface="Arial" pitchFamily="34" charset="0"/>
-                <a:ea typeface="Arial" pitchFamily="34" charset="-122"/>
-                <a:cs typeface="Arial" pitchFamily="34" charset="-120"/>
-              </a:rPr>
-              <a:t>Shared Control Plane &amp; Multi-Tenant Governance Perimeter (80% Reusable Core + 20% Topology Delta)</a:t>
-            </a:r>
-            <a:endParaRPr lang="en-US" sz="460" dirty="0"/>
+              <a:rPr lang="en-US" sz="420" b="1" dirty="0">
+                <a:solidFill>
+                  <a:srgbClr val="202124"/>
+                </a:solidFill>
+                <a:latin typeface="Arial" pitchFamily="34" charset="0"/>
+                <a:ea typeface="Arial" pitchFamily="34" charset="-122"/>
+                <a:cs typeface="Arial" pitchFamily="34" charset="-120"/>
+              </a:rPr>
+              <a:t>Shared Control Plane &amp; Multi-Tenant Governance Perimeter</a:t>
+            </a:r>
+            <a:endParaRPr lang="en-US" sz="420" dirty="0"/>
           </a:p>
         </p:txBody>
       </p:sp>
@@ -2207,8 +2207,8 @@
         </p:nvSpPr>
         <p:spPr>
           <a:xfrm>
-            <a:off x="4088282" y="2004365"/>
-            <a:ext cx="1805940" cy="146304"/>
+            <a:off x="4088282" y="1993392"/>
+            <a:ext cx="1723644" cy="105156"/>
           </a:xfrm>
           <a:prstGeom prst="rect">
             <a:avLst/>
@@ -2217,7 +2217,7 @@
           <a:ln/>
         </p:spPr>
         <p:txBody>
-          <a:bodyPr wrap="square" lIns="0" tIns="0" rIns="0" bIns="0" rtlCol="0" anchor="t">
+          <a:bodyPr wrap="none" lIns="0" tIns="0" rIns="0" bIns="0" rtlCol="0" anchor="t">
             <a:normAutofit/>
           </a:bodyPr>
           <a:lstStyle/>
@@ -2229,7 +2229,7 @@
               <a:buNone/>
             </a:pPr>
             <a:r>
-              <a:rPr lang="en-US" sz="460" b="1" dirty="0">
+              <a:rPr lang="en-US" sz="420" b="1" dirty="0">
                 <a:solidFill>
                   <a:srgbClr val="202124"/>
                 </a:solidFill>
@@ -2239,7 +2239,7 @@
               </a:rPr>
               <a:t>VPC &amp; 5-Hop Cryptographic Context Chain</a:t>
             </a:r>
-            <a:endParaRPr lang="en-US" sz="460" dirty="0"/>
+            <a:endParaRPr lang="en-US" sz="420" dirty="0"/>
           </a:p>
         </p:txBody>
       </p:sp>
@@ -2278,8 +2278,8 @@
         </p:nvSpPr>
         <p:spPr>
           <a:xfrm>
-            <a:off x="4155034" y="3757270"/>
-            <a:ext cx="1255471" cy="146304"/>
+            <a:off x="4155034" y="3746297"/>
+            <a:ext cx="1255471" cy="105156"/>
           </a:xfrm>
           <a:prstGeom prst="rect">
             <a:avLst/>
@@ -2288,7 +2288,7 @@
           <a:ln/>
         </p:spPr>
         <p:txBody>
-          <a:bodyPr wrap="square" lIns="0" tIns="0" rIns="0" bIns="0" rtlCol="0" anchor="t">
+          <a:bodyPr wrap="none" lIns="0" tIns="0" rIns="0" bIns="0" rtlCol="0" anchor="t">
             <a:normAutofit/>
           </a:bodyPr>
           <a:lstStyle/>
@@ -2308,7 +2308,7 @@
                 <a:ea typeface="Arial" pitchFamily="34" charset="-122"/>
                 <a:cs typeface="Arial" pitchFamily="34" charset="-120"/>
               </a:rPr>
-              <a:t>Pattern A: Pooled Shared Runtime (Standard &amp; High-Density SaaS)</a:t>
+              <a:t>Pattern A: Pooled Shared Runtime</a:t>
             </a:r>
             <a:endParaRPr lang="en-US" sz="385" dirty="0"/>
           </a:p>
@@ -2349,8 +2349,8 @@
         </p:nvSpPr>
         <p:spPr>
           <a:xfrm>
-            <a:off x="6192317" y="3757270"/>
-            <a:ext cx="1255471" cy="146304"/>
+            <a:off x="6192317" y="3746297"/>
+            <a:ext cx="1255471" cy="105156"/>
           </a:xfrm>
           <a:prstGeom prst="rect">
             <a:avLst/>
@@ -2359,7 +2359,7 @@
           <a:ln/>
         </p:spPr>
         <p:txBody>
-          <a:bodyPr wrap="square" lIns="0" tIns="0" rIns="0" bIns="0" rtlCol="0" anchor="t">
+          <a:bodyPr wrap="none" lIns="0" tIns="0" rIns="0" bIns="0" rtlCol="0" anchor="t">
             <a:normAutofit/>
           </a:bodyPr>
           <a:lstStyle/>
@@ -2379,7 +2379,7 @@
                 <a:ea typeface="Arial" pitchFamily="34" charset="-122"/>
                 <a:cs typeface="Arial" pitchFamily="34" charset="-120"/>
               </a:rPr>
-              <a:t>Pattern B (Sovereign Silos) &amp; Pattern C (Hybrid PSC Spokes)</a:t>
+              <a:t>Pattern B (Sovereign Silos) &amp; Pattern C</a:t>
             </a:r>
             <a:endParaRPr lang="en-US" sz="385" dirty="0"/>
           </a:p>
@@ -2694,7 +2694,7 @@
         <p:spPr>
           <a:xfrm>
             <a:off x="6881774" y="2161642"/>
-            <a:ext cx="1145743" cy="146304"/>
+            <a:ext cx="1145743" cy="137160"/>
           </a:xfrm>
           <a:prstGeom prst="rect">
             <a:avLst/>
@@ -3918,8 +3918,8 @@
         </p:blipFill>
         <p:spPr>
           <a:xfrm>
-            <a:off x="5576926" y="2516429"/>
-            <a:ext cx="181966" cy="181966"/>
+            <a:off x="5563210" y="2536546"/>
+            <a:ext cx="141732" cy="141732"/>
           </a:xfrm>
           <a:prstGeom prst="rect">
             <a:avLst/>
@@ -3934,8 +3934,8 @@
         </p:nvSpPr>
         <p:spPr>
           <a:xfrm>
-            <a:off x="5795467" y="2474366"/>
-            <a:ext cx="689458" cy="266090"/>
+            <a:off x="5727802" y="2470709"/>
+            <a:ext cx="779069" cy="273406"/>
           </a:xfrm>
           <a:prstGeom prst="rect">
             <a:avLst/>
@@ -3951,12 +3951,12 @@
           <a:p>
             <a:pPr algn="l" indent="0" marL="0">
               <a:lnSpc>
-                <a:spcPct val="86000"/>
-              </a:lnSpc>
-              <a:buNone/>
-            </a:pPr>
-            <a:r>
-              <a:rPr lang="en-US" sz="500" b="1" dirty="0">
+                <a:spcPct val="88000"/>
+              </a:lnSpc>
+              <a:buNone/>
+            </a:pPr>
+            <a:r>
+              <a:rPr lang="en-US" sz="435" b="1" dirty="0">
                 <a:solidFill>
                   <a:srgbClr val="202124"/>
                 </a:solidFill>
@@ -3966,17 +3966,17 @@
               </a:rPr>
               <a:t>External Application Load Balancer</a:t>
             </a:r>
-            <a:endParaRPr lang="en-US" sz="500" dirty="0"/>
+            <a:endParaRPr lang="en-US" sz="435" dirty="0"/>
           </a:p>
           <a:p>
             <a:pPr algn="l" indent="0" marL="0">
               <a:lnSpc>
-                <a:spcPct val="86000"/>
-              </a:lnSpc>
-              <a:buNone/>
-            </a:pPr>
-            <a:r>
-              <a:rPr lang="en-US" sz="430" dirty="0">
+                <a:spcPct val="88000"/>
+              </a:lnSpc>
+              <a:buNone/>
+            </a:pPr>
+            <a:r>
+              <a:rPr lang="en-US" sz="375" dirty="0">
                 <a:solidFill>
                   <a:srgbClr val="3C4043"/>
                 </a:solidFill>
@@ -3986,7 +3986,7 @@
               </a:rPr>
               <a:t>Cloud Load Balancing</a:t>
             </a:r>
-            <a:endParaRPr lang="en-US" sz="500" dirty="0"/>
+            <a:endParaRPr lang="en-US" sz="435" dirty="0"/>
           </a:p>
         </p:txBody>
       </p:sp>
@@ -4033,8 +4033,8 @@
         </p:blipFill>
         <p:spPr>
           <a:xfrm>
-            <a:off x="6969557" y="2416759"/>
-            <a:ext cx="172822" cy="172822"/>
+            <a:off x="6955841" y="2435962"/>
+            <a:ext cx="134417" cy="134417"/>
           </a:xfrm>
           <a:prstGeom prst="rect">
             <a:avLst/>
@@ -4049,8 +4049,8 @@
         </p:nvSpPr>
         <p:spPr>
           <a:xfrm>
-            <a:off x="7178954" y="2377440"/>
-            <a:ext cx="750722" cy="251460"/>
+            <a:off x="7113118" y="2373782"/>
+            <a:ext cx="838505" cy="258775"/>
           </a:xfrm>
           <a:prstGeom prst="rect">
             <a:avLst/>
@@ -4066,12 +4066,12 @@
           <a:p>
             <a:pPr algn="l" indent="0" marL="0">
               <a:lnSpc>
-                <a:spcPct val="86000"/>
-              </a:lnSpc>
-              <a:buNone/>
-            </a:pPr>
-            <a:r>
-              <a:rPr lang="en-US" sz="500" b="1" dirty="0">
+                <a:spcPct val="88000"/>
+              </a:lnSpc>
+              <a:buNone/>
+            </a:pPr>
+            <a:r>
+              <a:rPr lang="en-US" sz="435" b="1" dirty="0">
                 <a:solidFill>
                   <a:srgbClr val="202124"/>
                 </a:solidFill>
@@ -4081,17 +4081,17 @@
               </a:rPr>
               <a:t>Security Command Center</a:t>
             </a:r>
-            <a:endParaRPr lang="en-US" sz="500" dirty="0"/>
+            <a:endParaRPr lang="en-US" sz="435" dirty="0"/>
           </a:p>
           <a:p>
             <a:pPr algn="l" indent="0" marL="0">
               <a:lnSpc>
-                <a:spcPct val="86000"/>
-              </a:lnSpc>
-              <a:buNone/>
-            </a:pPr>
-            <a:r>
-              <a:rPr lang="en-US" sz="430" dirty="0">
+                <a:spcPct val="88000"/>
+              </a:lnSpc>
+              <a:buNone/>
+            </a:pPr>
+            <a:r>
+              <a:rPr lang="en-US" sz="375" dirty="0">
                 <a:solidFill>
                   <a:srgbClr val="3C4043"/>
                 </a:solidFill>
@@ -4101,7 +4101,7 @@
               </a:rPr>
               <a:t>Cross-Pattern Breach Alerts</a:t>
             </a:r>
-            <a:endParaRPr lang="en-US" sz="500" dirty="0"/>
+            <a:endParaRPr lang="en-US" sz="435" dirty="0"/>
           </a:p>
         </p:txBody>
       </p:sp>
@@ -4148,8 +4148,8 @@
         </p:blipFill>
         <p:spPr>
           <a:xfrm>
-            <a:off x="6985102" y="3043123"/>
-            <a:ext cx="163678" cy="163678"/>
+            <a:off x="6971386" y="3061411"/>
+            <a:ext cx="128016" cy="128016"/>
           </a:xfrm>
           <a:prstGeom prst="rect">
             <a:avLst/>
@@ -4164,8 +4164,8 @@
         </p:nvSpPr>
         <p:spPr>
           <a:xfrm>
-            <a:off x="7185355" y="3006547"/>
-            <a:ext cx="730606" cy="236830"/>
+            <a:off x="7121347" y="3002890"/>
+            <a:ext cx="817474" cy="244145"/>
           </a:xfrm>
           <a:prstGeom prst="rect">
             <a:avLst/>
@@ -4181,12 +4181,12 @@
           <a:p>
             <a:pPr algn="l" indent="0" marL="0">
               <a:lnSpc>
-                <a:spcPct val="86000"/>
-              </a:lnSpc>
-              <a:buNone/>
-            </a:pPr>
-            <a:r>
-              <a:rPr lang="en-US" sz="500" b="1" dirty="0">
+                <a:spcPct val="88000"/>
+              </a:lnSpc>
+              <a:buNone/>
+            </a:pPr>
+            <a:r>
+              <a:rPr lang="en-US" sz="435" b="1" dirty="0">
                 <a:solidFill>
                   <a:srgbClr val="202124"/>
                 </a:solidFill>
@@ -4196,17 +4196,17 @@
               </a:rPr>
               <a:t>Cloud Logging &amp; BQ</a:t>
             </a:r>
-            <a:endParaRPr lang="en-US" sz="500" dirty="0"/>
+            <a:endParaRPr lang="en-US" sz="435" dirty="0"/>
           </a:p>
           <a:p>
             <a:pPr algn="l" indent="0" marL="0">
               <a:lnSpc>
-                <a:spcPct val="86000"/>
-              </a:lnSpc>
-              <a:buNone/>
-            </a:pPr>
-            <a:r>
-              <a:rPr lang="en-US" sz="430" dirty="0">
+                <a:spcPct val="88000"/>
+              </a:lnSpc>
+              <a:buNone/>
+            </a:pPr>
+            <a:r>
+              <a:rPr lang="en-US" sz="375" dirty="0">
                 <a:solidFill>
                   <a:srgbClr val="3C4043"/>
                 </a:solidFill>
@@ -4216,7 +4216,7 @@
               </a:rPr>
               <a:t>Zero-PII OTel &amp; Chargeback</a:t>
             </a:r>
-            <a:endParaRPr lang="en-US" sz="500" dirty="0"/>
+            <a:endParaRPr lang="en-US" sz="435" dirty="0"/>
           </a:p>
         </p:txBody>
       </p:sp>
@@ -4263,8 +4263,8 @@
         </p:blipFill>
         <p:spPr>
           <a:xfrm>
-            <a:off x="6992417" y="2735885"/>
-            <a:ext cx="163678" cy="163678"/>
+            <a:off x="6978701" y="2754173"/>
+            <a:ext cx="128016" cy="128016"/>
           </a:xfrm>
           <a:prstGeom prst="rect">
             <a:avLst/>
@@ -4279,8 +4279,8 @@
         </p:nvSpPr>
         <p:spPr>
           <a:xfrm>
-            <a:off x="7192670" y="2699309"/>
-            <a:ext cx="715061" cy="236830"/>
+            <a:off x="7128662" y="2695651"/>
+            <a:ext cx="801014" cy="244145"/>
           </a:xfrm>
           <a:prstGeom prst="rect">
             <a:avLst/>
@@ -4296,12 +4296,12 @@
           <a:p>
             <a:pPr algn="l" indent="0" marL="0">
               <a:lnSpc>
-                <a:spcPct val="86000"/>
-              </a:lnSpc>
-              <a:buNone/>
-            </a:pPr>
-            <a:r>
-              <a:rPr lang="en-US" sz="500" b="1" dirty="0">
+                <a:spcPct val="88000"/>
+              </a:lnSpc>
+              <a:buNone/>
+            </a:pPr>
+            <a:r>
+              <a:rPr lang="en-US" sz="435" b="1" dirty="0">
                 <a:solidFill>
                   <a:srgbClr val="202124"/>
                 </a:solidFill>
@@ -4311,17 +4311,17 @@
               </a:rPr>
               <a:t>Central IAM &amp; PAB</a:t>
             </a:r>
-            <a:endParaRPr lang="en-US" sz="500" dirty="0"/>
+            <a:endParaRPr lang="en-US" sz="435" dirty="0"/>
           </a:p>
           <a:p>
             <a:pPr algn="l" indent="0" marL="0">
               <a:lnSpc>
-                <a:spcPct val="86000"/>
-              </a:lnSpc>
-              <a:buNone/>
-            </a:pPr>
-            <a:r>
-              <a:rPr lang="en-US" sz="430" dirty="0">
+                <a:spcPct val="88000"/>
+              </a:lnSpc>
+              <a:buNone/>
+            </a:pPr>
+            <a:r>
+              <a:rPr lang="en-US" sz="375" dirty="0">
                 <a:solidFill>
                   <a:srgbClr val="3C4043"/>
                 </a:solidFill>
@@ -4331,7 +4331,7 @@
               </a:rPr>
               <a:t>Agent Identity (2LO/3LO)</a:t>
             </a:r>
-            <a:endParaRPr lang="en-US" sz="500" dirty="0"/>
+            <a:endParaRPr lang="en-US" sz="435" dirty="0"/>
           </a:p>
         </p:txBody>
       </p:sp>
@@ -4378,8 +4378,8 @@
         </p:blipFill>
         <p:spPr>
           <a:xfrm>
-            <a:off x="5164531" y="4358030"/>
-            <a:ext cx="177394" cy="177394"/>
+            <a:off x="5150815" y="4377233"/>
+            <a:ext cx="138074" cy="138074"/>
           </a:xfrm>
           <a:prstGeom prst="rect">
             <a:avLst/>
@@ -4394,8 +4394,8 @@
         </p:nvSpPr>
         <p:spPr>
           <a:xfrm>
-            <a:off x="5378501" y="4316882"/>
-            <a:ext cx="513893" cy="258775"/>
+            <a:off x="5311750" y="4313225"/>
+            <a:ext cx="602590" cy="266090"/>
           </a:xfrm>
           <a:prstGeom prst="rect">
             <a:avLst/>
@@ -4411,12 +4411,12 @@
           <a:p>
             <a:pPr algn="l" indent="0" marL="0">
               <a:lnSpc>
-                <a:spcPct val="86000"/>
-              </a:lnSpc>
-              <a:buNone/>
-            </a:pPr>
-            <a:r>
-              <a:rPr lang="en-US" sz="500" b="1" dirty="0">
+                <a:spcPct val="88000"/>
+              </a:lnSpc>
+              <a:buNone/>
+            </a:pPr>
+            <a:r>
+              <a:rPr lang="en-US" sz="435" b="1" dirty="0">
                 <a:solidFill>
                   <a:srgbClr val="202124"/>
                 </a:solidFill>
@@ -4426,17 +4426,17 @@
               </a:rPr>
               <a:t>Vertex AI Agent Engine</a:t>
             </a:r>
-            <a:endParaRPr lang="en-US" sz="500" dirty="0"/>
+            <a:endParaRPr lang="en-US" sz="435" dirty="0"/>
           </a:p>
           <a:p>
             <a:pPr algn="l" indent="0" marL="0">
               <a:lnSpc>
-                <a:spcPct val="86000"/>
-              </a:lnSpc>
-              <a:buNone/>
-            </a:pPr>
-            <a:r>
-              <a:rPr lang="en-US" sz="430" dirty="0">
+                <a:spcPct val="88000"/>
+              </a:lnSpc>
+              <a:buNone/>
+            </a:pPr>
+            <a:r>
+              <a:rPr lang="en-US" sz="375" dirty="0">
                 <a:solidFill>
                   <a:srgbClr val="3C4043"/>
                 </a:solidFill>
@@ -4446,7 +4446,7 @@
               </a:rPr>
               <a:t>gVisor + temp:tenant_id</a:t>
             </a:r>
-            <a:endParaRPr lang="en-US" sz="500" dirty="0"/>
+            <a:endParaRPr lang="en-US" sz="435" dirty="0"/>
           </a:p>
         </p:txBody>
       </p:sp>
@@ -4493,8 +4493,8 @@
         </p:blipFill>
         <p:spPr>
           <a:xfrm>
-            <a:off x="5164531" y="4897526"/>
-            <a:ext cx="177394" cy="177394"/>
+            <a:off x="5150815" y="4916729"/>
+            <a:ext cx="138074" cy="138074"/>
           </a:xfrm>
           <a:prstGeom prst="rect">
             <a:avLst/>
@@ -4509,8 +4509,8 @@
         </p:nvSpPr>
         <p:spPr>
           <a:xfrm>
-            <a:off x="5378501" y="4856378"/>
-            <a:ext cx="513893" cy="258775"/>
+            <a:off x="5311750" y="4852721"/>
+            <a:ext cx="602590" cy="266090"/>
           </a:xfrm>
           <a:prstGeom prst="rect">
             <a:avLst/>
@@ -4526,12 +4526,12 @@
           <a:p>
             <a:pPr algn="l" indent="0" marL="0">
               <a:lnSpc>
-                <a:spcPct val="86000"/>
-              </a:lnSpc>
-              <a:buNone/>
-            </a:pPr>
-            <a:r>
-              <a:rPr lang="en-US" sz="500" b="1" dirty="0">
+                <a:spcPct val="88000"/>
+              </a:lnSpc>
+              <a:buNone/>
+            </a:pPr>
+            <a:r>
+              <a:rPr lang="en-US" sz="435" b="1" dirty="0">
                 <a:solidFill>
                   <a:srgbClr val="202124"/>
                 </a:solidFill>
@@ -4541,17 +4541,17 @@
               </a:rPr>
               <a:t>MCP servers</a:t>
             </a:r>
-            <a:endParaRPr lang="en-US" sz="500" dirty="0"/>
+            <a:endParaRPr lang="en-US" sz="435" dirty="0"/>
           </a:p>
           <a:p>
             <a:pPr algn="l" indent="0" marL="0">
               <a:lnSpc>
-                <a:spcPct val="86000"/>
-              </a:lnSpc>
-              <a:buNone/>
-            </a:pPr>
-            <a:r>
-              <a:rPr lang="en-US" sz="430" dirty="0">
+                <a:spcPct val="88000"/>
+              </a:lnSpc>
+              <a:buNone/>
+            </a:pPr>
+            <a:r>
+              <a:rPr lang="en-US" sz="375" dirty="0">
                 <a:solidFill>
                   <a:srgbClr val="3C4043"/>
                 </a:solidFill>
@@ -4561,7 +4561,7 @@
               </a:rPr>
               <a:t>2LO + 3LO OIDC/Entra</a:t>
             </a:r>
-            <a:endParaRPr lang="en-US" sz="500" dirty="0"/>
+            <a:endParaRPr lang="en-US" sz="435" dirty="0"/>
           </a:p>
         </p:txBody>
       </p:sp>
@@ -4608,8 +4608,8 @@
         </p:blipFill>
         <p:spPr>
           <a:xfrm>
-            <a:off x="5164531" y="5459882"/>
-            <a:ext cx="177394" cy="177394"/>
+            <a:off x="5150815" y="5479085"/>
+            <a:ext cx="138074" cy="138074"/>
           </a:xfrm>
           <a:prstGeom prst="rect">
             <a:avLst/>
@@ -4624,8 +4624,8 @@
         </p:nvSpPr>
         <p:spPr>
           <a:xfrm>
-            <a:off x="5378501" y="5418734"/>
-            <a:ext cx="513893" cy="258775"/>
+            <a:off x="5311750" y="5415077"/>
+            <a:ext cx="602590" cy="266090"/>
           </a:xfrm>
           <a:prstGeom prst="rect">
             <a:avLst/>
@@ -4641,12 +4641,12 @@
           <a:p>
             <a:pPr algn="l" indent="0" marL="0">
               <a:lnSpc>
-                <a:spcPct val="86000"/>
-              </a:lnSpc>
-              <a:buNone/>
-            </a:pPr>
-            <a:r>
-              <a:rPr lang="en-US" sz="500" b="1" dirty="0">
+                <a:spcPct val="88000"/>
+              </a:lnSpc>
+              <a:buNone/>
+            </a:pPr>
+            <a:r>
+              <a:rPr lang="en-US" sz="435" b="1" dirty="0">
                 <a:solidFill>
                   <a:srgbClr val="202124"/>
                 </a:solidFill>
@@ -4656,17 +4656,17 @@
               </a:rPr>
               <a:t>Shared AlloyDB</a:t>
             </a:r>
-            <a:endParaRPr lang="en-US" sz="500" dirty="0"/>
+            <a:endParaRPr lang="en-US" sz="435" dirty="0"/>
           </a:p>
           <a:p>
             <a:pPr algn="l" indent="0" marL="0">
               <a:lnSpc>
-                <a:spcPct val="86000"/>
-              </a:lnSpc>
-              <a:buNone/>
-            </a:pPr>
-            <a:r>
-              <a:rPr lang="en-US" sz="430" dirty="0">
+                <a:spcPct val="88000"/>
+              </a:lnSpc>
+              <a:buNone/>
+            </a:pPr>
+            <a:r>
+              <a:rPr lang="en-US" sz="375" dirty="0">
                 <a:solidFill>
                   <a:srgbClr val="3C4043"/>
                 </a:solidFill>
@@ -4676,7 +4676,7 @@
               </a:rPr>
               <a:t>FORCE Row-Level Security</a:t>
             </a:r>
-            <a:endParaRPr lang="en-US" sz="500" dirty="0"/>
+            <a:endParaRPr lang="en-US" sz="435" dirty="0"/>
           </a:p>
         </p:txBody>
       </p:sp>
@@ -4723,8 +4723,8 @@
         </p:blipFill>
         <p:spPr>
           <a:xfrm>
-            <a:off x="7201814" y="4358030"/>
-            <a:ext cx="177394" cy="177394"/>
+            <a:off x="7188098" y="4377233"/>
+            <a:ext cx="138074" cy="138074"/>
           </a:xfrm>
           <a:prstGeom prst="rect">
             <a:avLst/>
@@ -4739,8 +4739,8 @@
         </p:nvSpPr>
         <p:spPr>
           <a:xfrm>
-            <a:off x="7415784" y="4316882"/>
-            <a:ext cx="513893" cy="258775"/>
+            <a:off x="7349033" y="4313225"/>
+            <a:ext cx="602590" cy="266090"/>
           </a:xfrm>
           <a:prstGeom prst="rect">
             <a:avLst/>
@@ -4756,12 +4756,12 @@
           <a:p>
             <a:pPr algn="l" indent="0" marL="0">
               <a:lnSpc>
-                <a:spcPct val="86000"/>
-              </a:lnSpc>
-              <a:buNone/>
-            </a:pPr>
-            <a:r>
-              <a:rPr lang="en-US" sz="500" b="1" dirty="0">
+                <a:spcPct val="88000"/>
+              </a:lnSpc>
+              <a:buNone/>
+            </a:pPr>
+            <a:r>
+              <a:rPr lang="en-US" sz="435" b="1" dirty="0">
                 <a:solidFill>
                   <a:srgbClr val="202124"/>
                 </a:solidFill>
@@ -4771,17 +4771,17 @@
               </a:rPr>
               <a:t>Vertex AI Agent Engine</a:t>
             </a:r>
-            <a:endParaRPr lang="en-US" sz="500" dirty="0"/>
+            <a:endParaRPr lang="en-US" sz="435" dirty="0"/>
           </a:p>
           <a:p>
             <a:pPr algn="l" indent="0" marL="0">
               <a:lnSpc>
-                <a:spcPct val="86000"/>
-              </a:lnSpc>
-              <a:buNone/>
-            </a:pPr>
-            <a:r>
-              <a:rPr lang="en-US" sz="430" dirty="0">
+                <a:spcPct val="88000"/>
+              </a:lnSpc>
+              <a:buNone/>
+            </a:pPr>
+            <a:r>
+              <a:rPr lang="en-US" sz="375" dirty="0">
                 <a:solidFill>
                   <a:srgbClr val="3C4043"/>
                 </a:solidFill>
@@ -4791,7 +4791,7 @@
               </a:rPr>
               <a:t>Dedicated Silo + Agent Alpha</a:t>
             </a:r>
-            <a:endParaRPr lang="en-US" sz="500" dirty="0"/>
+            <a:endParaRPr lang="en-US" sz="435" dirty="0"/>
           </a:p>
         </p:txBody>
       </p:sp>
@@ -4838,8 +4838,8 @@
         </p:blipFill>
         <p:spPr>
           <a:xfrm>
-            <a:off x="7201814" y="4897526"/>
-            <a:ext cx="177394" cy="177394"/>
+            <a:off x="7188098" y="4916729"/>
+            <a:ext cx="138074" cy="138074"/>
           </a:xfrm>
           <a:prstGeom prst="rect">
             <a:avLst/>
@@ -4854,8 +4854,8 @@
         </p:nvSpPr>
         <p:spPr>
           <a:xfrm>
-            <a:off x="7415784" y="4856378"/>
-            <a:ext cx="513893" cy="258775"/>
+            <a:off x="7349033" y="4852721"/>
+            <a:ext cx="602590" cy="266090"/>
           </a:xfrm>
           <a:prstGeom prst="rect">
             <a:avLst/>
@@ -4871,12 +4871,12 @@
           <a:p>
             <a:pPr algn="l" indent="0" marL="0">
               <a:lnSpc>
-                <a:spcPct val="86000"/>
-              </a:lnSpc>
-              <a:buNone/>
-            </a:pPr>
-            <a:r>
-              <a:rPr lang="en-US" sz="500" b="1" dirty="0">
+                <a:spcPct val="88000"/>
+              </a:lnSpc>
+              <a:buNone/>
+            </a:pPr>
+            <a:r>
+              <a:rPr lang="en-US" sz="435" b="1" dirty="0">
                 <a:solidFill>
                   <a:srgbClr val="202124"/>
                 </a:solidFill>
@@ -4886,17 +4886,17 @@
               </a:rPr>
               <a:t>MCP servers</a:t>
             </a:r>
-            <a:endParaRPr lang="en-US" sz="500" dirty="0"/>
+            <a:endParaRPr lang="en-US" sz="435" dirty="0"/>
           </a:p>
           <a:p>
             <a:pPr algn="l" indent="0" marL="0">
               <a:lnSpc>
-                <a:spcPct val="86000"/>
-              </a:lnSpc>
-              <a:buNone/>
-            </a:pPr>
-            <a:r>
-              <a:rPr lang="en-US" sz="430" dirty="0">
+                <a:spcPct val="88000"/>
+              </a:lnSpc>
+              <a:buNone/>
+            </a:pPr>
+            <a:r>
+              <a:rPr lang="en-US" sz="375" dirty="0">
                 <a:solidFill>
                   <a:srgbClr val="3C4043"/>
                 </a:solidFill>
@@ -4906,7 +4906,7 @@
               </a:rPr>
               <a:t>Local Silo 3LO Connectors</a:t>
             </a:r>
-            <a:endParaRPr lang="en-US" sz="500" dirty="0"/>
+            <a:endParaRPr lang="en-US" sz="435" dirty="0"/>
           </a:p>
         </p:txBody>
       </p:sp>
@@ -4953,8 +4953,8 @@
         </p:blipFill>
         <p:spPr>
           <a:xfrm>
-            <a:off x="7201814" y="5459882"/>
-            <a:ext cx="177394" cy="177394"/>
+            <a:off x="7188098" y="5479085"/>
+            <a:ext cx="138074" cy="138074"/>
           </a:xfrm>
           <a:prstGeom prst="rect">
             <a:avLst/>
@@ -4969,8 +4969,8 @@
         </p:nvSpPr>
         <p:spPr>
           <a:xfrm>
-            <a:off x="7415784" y="5418734"/>
-            <a:ext cx="513893" cy="258775"/>
+            <a:off x="7349033" y="5415077"/>
+            <a:ext cx="602590" cy="266090"/>
           </a:xfrm>
           <a:prstGeom prst="rect">
             <a:avLst/>
@@ -4986,12 +4986,12 @@
           <a:p>
             <a:pPr algn="l" indent="0" marL="0">
               <a:lnSpc>
-                <a:spcPct val="86000"/>
-              </a:lnSpc>
-              <a:buNone/>
-            </a:pPr>
-            <a:r>
-              <a:rPr lang="en-US" sz="500" b="1" dirty="0">
+                <a:spcPct val="88000"/>
+              </a:lnSpc>
+              <a:buNone/>
+            </a:pPr>
+            <a:r>
+              <a:rPr lang="en-US" sz="435" b="1" dirty="0">
                 <a:solidFill>
                   <a:srgbClr val="202124"/>
                 </a:solidFill>
@@ -5001,17 +5001,17 @@
               </a:rPr>
               <a:t>CMEK Datastore</a:t>
             </a:r>
-            <a:endParaRPr lang="en-US" sz="500" dirty="0"/>
+            <a:endParaRPr lang="en-US" sz="435" dirty="0"/>
           </a:p>
           <a:p>
             <a:pPr algn="l" indent="0" marL="0">
               <a:lnSpc>
-                <a:spcPct val="86000"/>
-              </a:lnSpc>
-              <a:buNone/>
-            </a:pPr>
-            <a:r>
-              <a:rPr lang="en-US" sz="430" dirty="0">
+                <a:spcPct val="88000"/>
+              </a:lnSpc>
+              <a:buNone/>
+            </a:pPr>
+            <a:r>
+              <a:rPr lang="en-US" sz="375" dirty="0">
                 <a:solidFill>
                   <a:srgbClr val="3C4043"/>
                 </a:solidFill>
@@ -5021,7 +5021,7 @@
               </a:rPr>
               <a:t>AlloyDB, BQ &amp; KMS 423 Lock</a:t>
             </a:r>
-            <a:endParaRPr lang="en-US" sz="500" dirty="0"/>
+            <a:endParaRPr lang="en-US" sz="435" dirty="0"/>
           </a:p>
         </p:txBody>
       </p:sp>
@@ -5068,8 +5068,8 @@
         </p:blipFill>
         <p:spPr>
           <a:xfrm>
-            <a:off x="5666537" y="3065069"/>
-            <a:ext cx="158191" cy="158191"/>
+            <a:off x="5652821" y="3081528"/>
+            <a:ext cx="123444" cy="123444"/>
           </a:xfrm>
           <a:prstGeom prst="rect">
             <a:avLst/>
@@ -5084,8 +5084,8 @@
         </p:nvSpPr>
         <p:spPr>
           <a:xfrm>
-            <a:off x="5861304" y="3029407"/>
-            <a:ext cx="570586" cy="228600"/>
+            <a:off x="5799125" y="3025750"/>
+            <a:ext cx="655625" cy="235915"/>
           </a:xfrm>
           <a:prstGeom prst="rect">
             <a:avLst/>
@@ -5101,12 +5101,12 @@
           <a:p>
             <a:pPr algn="l" indent="0" marL="0">
               <a:lnSpc>
-                <a:spcPct val="86000"/>
-              </a:lnSpc>
-              <a:buNone/>
-            </a:pPr>
-            <a:r>
-              <a:rPr lang="en-US" sz="500" b="1" dirty="0">
+                <a:spcPct val="88000"/>
+              </a:lnSpc>
+              <a:buNone/>
+            </a:pPr>
+            <a:r>
+              <a:rPr lang="en-US" sz="435" b="1" dirty="0">
                 <a:solidFill>
                   <a:srgbClr val="202124"/>
                 </a:solidFill>
@@ -5116,17 +5116,17 @@
               </a:rPr>
               <a:t>Cloud Run</a:t>
             </a:r>
-            <a:endParaRPr lang="en-US" sz="500" dirty="0"/>
+            <a:endParaRPr lang="en-US" sz="435" dirty="0"/>
           </a:p>
           <a:p>
             <a:pPr algn="l" indent="0" marL="0">
               <a:lnSpc>
-                <a:spcPct val="86000"/>
-              </a:lnSpc>
-              <a:buNone/>
-            </a:pPr>
-            <a:r>
-              <a:rPr lang="en-US" sz="430" dirty="0">
+                <a:spcPct val="88000"/>
+              </a:lnSpc>
+              <a:buNone/>
+            </a:pPr>
+            <a:r>
+              <a:rPr lang="en-US" sz="375" dirty="0">
                 <a:solidFill>
                   <a:srgbClr val="3C4043"/>
                 </a:solidFill>
@@ -5136,7 +5136,7 @@
               </a:rPr>
               <a:t>Topology Router &amp; Agent Catalog PDP</a:t>
             </a:r>
-            <a:endParaRPr lang="en-US" sz="500" dirty="0"/>
+            <a:endParaRPr lang="en-US" sz="435" dirty="0"/>
           </a:p>
         </p:txBody>
       </p:sp>
@@ -5183,8 +5183,8 @@
         </p:blipFill>
         <p:spPr>
           <a:xfrm>
-            <a:off x="4243730" y="4169664"/>
-            <a:ext cx="172822" cy="172822"/>
+            <a:off x="4230014" y="4190695"/>
+            <a:ext cx="130759" cy="130759"/>
           </a:xfrm>
           <a:prstGeom prst="rect">
             <a:avLst/>
@@ -5199,8 +5199,8 @@
         </p:nvSpPr>
         <p:spPr>
           <a:xfrm>
-            <a:off x="4453128" y="4130345"/>
-            <a:ext cx="444398" cy="251460"/>
+            <a:off x="4383634" y="4126687"/>
+            <a:ext cx="536753" cy="258775"/>
           </a:xfrm>
           <a:prstGeom prst="rect">
             <a:avLst/>
@@ -5216,12 +5216,12 @@
           <a:p>
             <a:pPr algn="l" indent="0" marL="0">
               <a:lnSpc>
-                <a:spcPct val="86000"/>
-              </a:lnSpc>
-              <a:buNone/>
-            </a:pPr>
-            <a:r>
-              <a:rPr lang="en-US" sz="500" b="1" dirty="0">
+                <a:spcPct val="88000"/>
+              </a:lnSpc>
+              <a:buNone/>
+            </a:pPr>
+            <a:r>
+              <a:rPr lang="en-US" sz="435" b="1" dirty="0">
                 <a:solidFill>
                   <a:srgbClr val="202124"/>
                 </a:solidFill>
@@ -5231,17 +5231,17 @@
               </a:rPr>
               <a:t>Model Armor</a:t>
             </a:r>
-            <a:endParaRPr lang="en-US" sz="500" dirty="0"/>
+            <a:endParaRPr lang="en-US" sz="435" dirty="0"/>
           </a:p>
           <a:p>
             <a:pPr algn="l" indent="0" marL="0">
               <a:lnSpc>
-                <a:spcPct val="86000"/>
-              </a:lnSpc>
-              <a:buNone/>
-            </a:pPr>
-            <a:r>
-              <a:rPr lang="en-US" sz="430" dirty="0">
+                <a:spcPct val="88000"/>
+              </a:lnSpc>
+              <a:buNone/>
+            </a:pPr>
+            <a:r>
+              <a:rPr lang="en-US" sz="375" dirty="0">
                 <a:solidFill>
                   <a:srgbClr val="3C4043"/>
                 </a:solidFill>
@@ -5251,7 +5251,7 @@
               </a:rPr>
               <a:t>Tenant Rai Filters &amp; SDP PII</a:t>
             </a:r>
-            <a:endParaRPr lang="en-US" sz="500" dirty="0"/>
+            <a:endParaRPr lang="en-US" sz="435" dirty="0"/>
           </a:p>
         </p:txBody>
       </p:sp>
@@ -5298,8 +5298,8 @@
         </p:blipFill>
         <p:spPr>
           <a:xfrm>
-            <a:off x="4243730" y="5052974"/>
-            <a:ext cx="172822" cy="172822"/>
+            <a:off x="4230014" y="5074006"/>
+            <a:ext cx="130759" cy="130759"/>
           </a:xfrm>
           <a:prstGeom prst="rect">
             <a:avLst/>
@@ -5314,8 +5314,8 @@
         </p:nvSpPr>
         <p:spPr>
           <a:xfrm>
-            <a:off x="4453128" y="5013655"/>
-            <a:ext cx="444398" cy="251460"/>
+            <a:off x="4383634" y="5009998"/>
+            <a:ext cx="536753" cy="258775"/>
           </a:xfrm>
           <a:prstGeom prst="rect">
             <a:avLst/>
@@ -5331,12 +5331,12 @@
           <a:p>
             <a:pPr algn="l" indent="0" marL="0">
               <a:lnSpc>
-                <a:spcPct val="86000"/>
-              </a:lnSpc>
-              <a:buNone/>
-            </a:pPr>
-            <a:r>
-              <a:rPr lang="en-US" sz="500" b="1" dirty="0">
+                <a:spcPct val="88000"/>
+              </a:lnSpc>
+              <a:buNone/>
+            </a:pPr>
+            <a:r>
+              <a:rPr lang="en-US" sz="435" b="1" dirty="0">
                 <a:solidFill>
                   <a:srgbClr val="202124"/>
                 </a:solidFill>
@@ -5346,17 +5346,17 @@
               </a:rPr>
               <a:t>Gemini 2.5 Pro</a:t>
             </a:r>
-            <a:endParaRPr lang="en-US" sz="500" dirty="0"/>
+            <a:endParaRPr lang="en-US" sz="435" dirty="0"/>
           </a:p>
           <a:p>
             <a:pPr algn="l" indent="0" marL="0">
               <a:lnSpc>
-                <a:spcPct val="86000"/>
-              </a:lnSpc>
-              <a:buNone/>
-            </a:pPr>
-            <a:r>
-              <a:rPr lang="en-US" sz="430" dirty="0">
+                <a:spcPct val="88000"/>
+              </a:lnSpc>
+              <a:buNone/>
+            </a:pPr>
+            <a:r>
+              <a:rPr lang="en-US" sz="375" dirty="0">
                 <a:solidFill>
                   <a:srgbClr val="3C4043"/>
                 </a:solidFill>
@@ -5366,7 +5366,7 @@
               </a:rPr>
               <a:t>90% Prefix Cache Savings</a:t>
             </a:r>
-            <a:endParaRPr lang="en-US" sz="500" dirty="0"/>
+            <a:endParaRPr lang="en-US" sz="435" dirty="0"/>
           </a:p>
         </p:txBody>
       </p:sp>
@@ -5413,8 +5413,8 @@
         </p:blipFill>
         <p:spPr>
           <a:xfrm>
-            <a:off x="6281014" y="4169664"/>
-            <a:ext cx="172822" cy="172822"/>
+            <a:off x="6267298" y="4190695"/>
+            <a:ext cx="130759" cy="130759"/>
           </a:xfrm>
           <a:prstGeom prst="rect">
             <a:avLst/>
@@ -5429,8 +5429,8 @@
         </p:nvSpPr>
         <p:spPr>
           <a:xfrm>
-            <a:off x="6490411" y="4130345"/>
-            <a:ext cx="444398" cy="251460"/>
+            <a:off x="6420917" y="4126687"/>
+            <a:ext cx="536753" cy="258775"/>
           </a:xfrm>
           <a:prstGeom prst="rect">
             <a:avLst/>
@@ -5446,12 +5446,12 @@
           <a:p>
             <a:pPr algn="l" indent="0" marL="0">
               <a:lnSpc>
-                <a:spcPct val="86000"/>
-              </a:lnSpc>
-              <a:buNone/>
-            </a:pPr>
-            <a:r>
-              <a:rPr lang="en-US" sz="500" b="1" dirty="0">
+                <a:spcPct val="88000"/>
+              </a:lnSpc>
+              <a:buNone/>
+            </a:pPr>
+            <a:r>
+              <a:rPr lang="en-US" sz="435" b="1" dirty="0">
                 <a:solidFill>
                   <a:srgbClr val="202124"/>
                 </a:solidFill>
@@ -5461,17 +5461,17 @@
               </a:rPr>
               <a:t>VPC-SC &amp; Model Armor</a:t>
             </a:r>
-            <a:endParaRPr lang="en-US" sz="500" dirty="0"/>
+            <a:endParaRPr lang="en-US" sz="435" dirty="0"/>
           </a:p>
           <a:p>
             <a:pPr algn="l" indent="0" marL="0">
               <a:lnSpc>
-                <a:spcPct val="86000"/>
-              </a:lnSpc>
-              <a:buNone/>
-            </a:pPr>
-            <a:r>
-              <a:rPr lang="en-US" sz="430" dirty="0">
+                <a:spcPct val="88000"/>
+              </a:lnSpc>
+              <a:buNone/>
+            </a:pPr>
+            <a:r>
+              <a:rPr lang="en-US" sz="375" dirty="0">
                 <a:solidFill>
                   <a:srgbClr val="3C4043"/>
                 </a:solidFill>
@@ -5481,7 +5481,7 @@
               </a:rPr>
               <a:t>Sovereign Silo Guardrails</a:t>
             </a:r>
-            <a:endParaRPr lang="en-US" sz="500" dirty="0"/>
+            <a:endParaRPr lang="en-US" sz="435" dirty="0"/>
           </a:p>
         </p:txBody>
       </p:sp>
@@ -5528,8 +5528,8 @@
         </p:blipFill>
         <p:spPr>
           <a:xfrm>
-            <a:off x="6281014" y="4550969"/>
-            <a:ext cx="172822" cy="172822"/>
+            <a:off x="6267298" y="4572000"/>
+            <a:ext cx="130759" cy="130759"/>
           </a:xfrm>
           <a:prstGeom prst="rect">
             <a:avLst/>
@@ -5544,8 +5544,8 @@
         </p:nvSpPr>
         <p:spPr>
           <a:xfrm>
-            <a:off x="6490411" y="4511650"/>
-            <a:ext cx="444398" cy="251460"/>
+            <a:off x="6420917" y="4507992"/>
+            <a:ext cx="536753" cy="258775"/>
           </a:xfrm>
           <a:prstGeom prst="rect">
             <a:avLst/>
@@ -5561,12 +5561,12 @@
           <a:p>
             <a:pPr algn="l" indent="0" marL="0">
               <a:lnSpc>
-                <a:spcPct val="86000"/>
-              </a:lnSpc>
-              <a:buNone/>
-            </a:pPr>
-            <a:r>
-              <a:rPr lang="en-US" sz="500" b="1" dirty="0">
+                <a:spcPct val="88000"/>
+              </a:lnSpc>
+              <a:buNone/>
+            </a:pPr>
+            <a:r>
+              <a:rPr lang="en-US" sz="435" b="1" dirty="0">
                 <a:solidFill>
                   <a:srgbClr val="202124"/>
                 </a:solidFill>
@@ -5576,17 +5576,17 @@
               </a:rPr>
               <a:t>Gemini / Gemma 3</a:t>
             </a:r>
-            <a:endParaRPr lang="en-US" sz="500" dirty="0"/>
+            <a:endParaRPr lang="en-US" sz="435" dirty="0"/>
           </a:p>
           <a:p>
             <a:pPr algn="l" indent="0" marL="0">
               <a:lnSpc>
-                <a:spcPct val="86000"/>
-              </a:lnSpc>
-              <a:buNone/>
-            </a:pPr>
-            <a:r>
-              <a:rPr lang="en-US" sz="430" dirty="0">
+                <a:spcPct val="88000"/>
+              </a:lnSpc>
+              <a:buNone/>
+            </a:pPr>
+            <a:r>
+              <a:rPr lang="en-US" sz="375" dirty="0">
                 <a:solidFill>
                   <a:srgbClr val="3C4043"/>
                 </a:solidFill>
@@ -5596,7 +5596,7 @@
               </a:rPr>
               <a:t>Claude 3.7 or Private GKE</a:t>
             </a:r>
-            <a:endParaRPr lang="en-US" sz="500" dirty="0"/>
+            <a:endParaRPr lang="en-US" sz="435" dirty="0"/>
           </a:p>
         </p:txBody>
       </p:sp>
@@ -5643,8 +5643,8 @@
         </p:blipFill>
         <p:spPr>
           <a:xfrm>
-            <a:off x="4213555" y="2382926"/>
-            <a:ext cx="158191" cy="158191"/>
+            <a:off x="4199839" y="2399386"/>
+            <a:ext cx="123444" cy="123444"/>
           </a:xfrm>
           <a:prstGeom prst="rect">
             <a:avLst/>
@@ -5659,8 +5659,8 @@
         </p:nvSpPr>
         <p:spPr>
           <a:xfrm>
-            <a:off x="4408322" y="2347265"/>
-            <a:ext cx="496519" cy="228600"/>
+            <a:off x="4346143" y="2343607"/>
+            <a:ext cx="581558" cy="235915"/>
           </a:xfrm>
           <a:prstGeom prst="rect">
             <a:avLst/>
@@ -5676,32 +5676,32 @@
           <a:p>
             <a:pPr algn="l" indent="0" marL="0">
               <a:lnSpc>
-                <a:spcPct val="86000"/>
-              </a:lnSpc>
-              <a:buNone/>
-            </a:pPr>
-            <a:r>
-              <a:rPr lang="en-US" sz="500" b="1" dirty="0">
-                <a:solidFill>
-                  <a:srgbClr val="202124"/>
-                </a:solidFill>
-                <a:latin typeface="Arial" pitchFamily="34" charset="0"/>
-                <a:ea typeface="Arial" pitchFamily="34" charset="-122"/>
-                <a:cs typeface="Arial" pitchFamily="34" charset="-120"/>
-              </a:rPr>
-              <a:t>Cloud Armor &amp; IAP</a:t>
-            </a:r>
-            <a:endParaRPr lang="en-US" sz="500" dirty="0"/>
+                <a:spcPct val="88000"/>
+              </a:lnSpc>
+              <a:buNone/>
+            </a:pPr>
+            <a:r>
+              <a:rPr lang="en-US" sz="435" b="1" dirty="0">
+                <a:solidFill>
+                  <a:srgbClr val="202124"/>
+                </a:solidFill>
+                <a:latin typeface="Arial" pitchFamily="34" charset="0"/>
+                <a:ea typeface="Arial" pitchFamily="34" charset="-122"/>
+                <a:cs typeface="Arial" pitchFamily="34" charset="-120"/>
+              </a:rPr>
+              <a:t>Google Cloud Armor</a:t>
+            </a:r>
+            <a:endParaRPr lang="en-US" sz="435" dirty="0"/>
           </a:p>
           <a:p>
             <a:pPr algn="l" indent="0" marL="0">
               <a:lnSpc>
-                <a:spcPct val="86000"/>
-              </a:lnSpc>
-              <a:buNone/>
-            </a:pPr>
-            <a:r>
-              <a:rPr lang="en-US" sz="430" dirty="0">
+                <a:spcPct val="88000"/>
+              </a:lnSpc>
+              <a:buNone/>
+            </a:pPr>
+            <a:r>
+              <a:rPr lang="en-US" sz="375" dirty="0">
                 <a:solidFill>
                   <a:srgbClr val="3C4043"/>
                 </a:solidFill>
@@ -5709,9 +5709,9 @@
                 <a:ea typeface="Arial" pitchFamily="34" charset="-122"/>
                 <a:cs typeface="Arial" pitchFamily="34" charset="-120"/>
               </a:rPr>
-              <a:t>Strip Forged X-Tenant-ID</a:t>
-            </a:r>
-            <a:endParaRPr lang="en-US" sz="500" dirty="0"/>
+              <a:t>WAF &amp; IAP Header Strip</a:t>
+            </a:r>
+            <a:endParaRPr lang="en-US" sz="435" dirty="0"/>
           </a:p>
         </p:txBody>
       </p:sp>
@@ -5758,8 +5758,8 @@
         </p:blipFill>
         <p:spPr>
           <a:xfrm>
-            <a:off x="4213555" y="2697480"/>
-            <a:ext cx="158191" cy="158191"/>
+            <a:off x="4199839" y="2713939"/>
+            <a:ext cx="123444" cy="123444"/>
           </a:xfrm>
           <a:prstGeom prst="rect">
             <a:avLst/>
@@ -5774,8 +5774,8 @@
         </p:nvSpPr>
         <p:spPr>
           <a:xfrm>
-            <a:off x="4408322" y="2661818"/>
-            <a:ext cx="496519" cy="228600"/>
+            <a:off x="4346143" y="2658161"/>
+            <a:ext cx="581558" cy="235915"/>
           </a:xfrm>
           <a:prstGeom prst="rect">
             <a:avLst/>
@@ -5791,12 +5791,12 @@
           <a:p>
             <a:pPr algn="l" indent="0" marL="0">
               <a:lnSpc>
-                <a:spcPct val="86000"/>
-              </a:lnSpc>
-              <a:buNone/>
-            </a:pPr>
-            <a:r>
-              <a:rPr lang="en-US" sz="500" b="1" dirty="0">
+                <a:spcPct val="88000"/>
+              </a:lnSpc>
+              <a:buNone/>
+            </a:pPr>
+            <a:r>
+              <a:rPr lang="en-US" sz="435" b="1" dirty="0">
                 <a:solidFill>
                   <a:srgbClr val="202124"/>
                 </a:solidFill>
@@ -5806,17 +5806,17 @@
               </a:rPr>
               <a:t>Model Armor</a:t>
             </a:r>
-            <a:endParaRPr lang="en-US" sz="500" dirty="0"/>
+            <a:endParaRPr lang="en-US" sz="435" dirty="0"/>
           </a:p>
           <a:p>
             <a:pPr algn="l" indent="0" marL="0">
               <a:lnSpc>
-                <a:spcPct val="86000"/>
-              </a:lnSpc>
-              <a:buNone/>
-            </a:pPr>
-            <a:r>
-              <a:rPr lang="en-US" sz="430" dirty="0">
+                <a:spcPct val="88000"/>
+              </a:lnSpc>
+              <a:buNone/>
+            </a:pPr>
+            <a:r>
+              <a:rPr lang="en-US" sz="375" dirty="0">
                 <a:solidFill>
                   <a:srgbClr val="3C4043"/>
                 </a:solidFill>
@@ -5826,7 +5826,7 @@
               </a:rPr>
               <a:t>Ingress Prompt Screen</a:t>
             </a:r>
-            <a:endParaRPr lang="en-US" sz="500" dirty="0"/>
+            <a:endParaRPr lang="en-US" sz="435" dirty="0"/>
           </a:p>
         </p:txBody>
       </p:sp>
@@ -5873,8 +5873,8 @@
         </p:blipFill>
         <p:spPr>
           <a:xfrm>
-            <a:off x="4243730" y="3065069"/>
-            <a:ext cx="158191" cy="158191"/>
+            <a:off x="4230014" y="3081528"/>
+            <a:ext cx="123444" cy="123444"/>
           </a:xfrm>
           <a:prstGeom prst="rect">
             <a:avLst/>
@@ -5889,8 +5889,8 @@
         </p:nvSpPr>
         <p:spPr>
           <a:xfrm>
-            <a:off x="4438498" y="3029407"/>
-            <a:ext cx="466344" cy="228600"/>
+            <a:off x="4376318" y="3025750"/>
+            <a:ext cx="551383" cy="235915"/>
           </a:xfrm>
           <a:prstGeom prst="rect">
             <a:avLst/>
@@ -5906,12 +5906,12 @@
           <a:p>
             <a:pPr algn="l" indent="0" marL="0">
               <a:lnSpc>
-                <a:spcPct val="86000"/>
-              </a:lnSpc>
-              <a:buNone/>
-            </a:pPr>
-            <a:r>
-              <a:rPr lang="en-US" sz="500" b="1" dirty="0">
+                <a:spcPct val="88000"/>
+              </a:lnSpc>
+              <a:buNone/>
+            </a:pPr>
+            <a:r>
+              <a:rPr lang="en-US" sz="435" b="1" dirty="0">
                 <a:solidFill>
                   <a:srgbClr val="202124"/>
                 </a:solidFill>
@@ -5921,17 +5921,17 @@
               </a:rPr>
               <a:t>RFC 8693 OBO + DPoP</a:t>
             </a:r>
-            <a:endParaRPr lang="en-US" sz="500" dirty="0"/>
+            <a:endParaRPr lang="en-US" sz="435" dirty="0"/>
           </a:p>
           <a:p>
             <a:pPr algn="l" indent="0" marL="0">
               <a:lnSpc>
-                <a:spcPct val="86000"/>
-              </a:lnSpc>
-              <a:buNone/>
-            </a:pPr>
-            <a:r>
-              <a:rPr lang="en-US" sz="430" dirty="0">
+                <a:spcPct val="88000"/>
+              </a:lnSpc>
+              <a:buNone/>
+            </a:pPr>
+            <a:r>
+              <a:rPr lang="en-US" sz="375" dirty="0">
                 <a:solidFill>
                   <a:srgbClr val="3C4043"/>
                 </a:solidFill>
@@ -5941,981 +5941,13 @@
               </a:rPr>
               <a:t>Sender-Constrained JWT</a:t>
             </a:r>
-            <a:endParaRPr lang="en-US" sz="500" dirty="0"/>
-          </a:p>
-        </p:txBody>
-      </p:sp>
-      <p:sp>
-        <p:nvSpPr>
-          <p:cNvPr id="129" name="Text 107"/>
-          <p:cNvSpPr/>
-          <p:nvPr/>
-        </p:nvSpPr>
-        <p:spPr>
-          <a:xfrm>
-            <a:off x="7541057" y="3373222"/>
-            <a:ext cx="546811" cy="161849"/>
-          </a:xfrm>
-          <a:prstGeom prst="rect">
-            <a:avLst/>
-          </a:prstGeom>
-          <a:noFill/>
-          <a:ln/>
-        </p:spPr>
-        <p:txBody>
-          <a:bodyPr wrap="square" lIns="0" tIns="0" rIns="0" bIns="0" rtlCol="0" anchor="ctr">
-            <a:normAutofit/>
-          </a:bodyPr>
-          <a:lstStyle/>
-          <a:p>
-            <a:pPr algn="l" indent="0" marL="0">
-              <a:lnSpc>
-                <a:spcPct val="88000"/>
-              </a:lnSpc>
-              <a:buNone/>
-            </a:pPr>
-            <a:r>
-              <a:rPr lang="en-US" sz="500" b="1" dirty="0">
-                <a:solidFill>
-                  <a:srgbClr val="202124"/>
-                </a:solidFill>
-                <a:latin typeface="Arial" pitchFamily="34" charset="0"/>
-                <a:ea typeface="Arial" pitchFamily="34" charset="-122"/>
-                <a:cs typeface="Arial" pitchFamily="34" charset="-120"/>
-              </a:rPr>
-              <a:t>Security, OTel &amp; FinOps</a:t>
-            </a:r>
-            <a:endParaRPr lang="en-US" sz="500" dirty="0"/>
-          </a:p>
-          <a:p>
-            <a:pPr algn="l" indent="0" marL="0">
-              <a:lnSpc>
-                <a:spcPct val="88000"/>
-              </a:lnSpc>
-              <a:buNone/>
-            </a:pPr>
-            <a:r>
-              <a:rPr lang="en-US" sz="440" dirty="0">
-                <a:solidFill>
-                  <a:srgbClr val="202124"/>
-                </a:solidFill>
-                <a:latin typeface="Arial" pitchFamily="34" charset="0"/>
-                <a:ea typeface="Arial" pitchFamily="34" charset="-122"/>
-                <a:cs typeface="Arial" pitchFamily="34" charset="-120"/>
-              </a:rPr>
-              <a:t>chargeback telemetry</a:t>
-            </a:r>
-            <a:endParaRPr lang="en-US" sz="500" dirty="0"/>
-          </a:p>
-        </p:txBody>
-      </p:sp>
-      <p:sp>
-        <p:nvSpPr>
-          <p:cNvPr id="130" name="Text 108"/>
-          <p:cNvSpPr/>
-          <p:nvPr/>
-        </p:nvSpPr>
-        <p:spPr>
-          <a:xfrm>
-            <a:off x="5237683" y="4654296"/>
-            <a:ext cx="591617" cy="124358"/>
-          </a:xfrm>
-          <a:prstGeom prst="rect">
-            <a:avLst/>
-          </a:prstGeom>
-          <a:noFill/>
-          <a:ln/>
-        </p:spPr>
-        <p:txBody>
-          <a:bodyPr wrap="square" lIns="0" tIns="0" rIns="0" bIns="0" rtlCol="0" anchor="ctr">
-            <a:normAutofit/>
-          </a:bodyPr>
-          <a:lstStyle/>
-          <a:p>
-            <a:pPr algn="ctr" indent="0" marL="0">
-              <a:lnSpc>
-                <a:spcPct val="88000"/>
-              </a:lnSpc>
-              <a:buNone/>
-            </a:pPr>
-            <a:r>
-              <a:rPr lang="en-US" sz="500" b="1" dirty="0">
-                <a:solidFill>
-                  <a:srgbClr val="202124"/>
-                </a:solidFill>
-                <a:latin typeface="Arial" pitchFamily="34" charset="0"/>
-                <a:ea typeface="Arial" pitchFamily="34" charset="-122"/>
-                <a:cs typeface="Arial" pitchFamily="34" charset="-120"/>
-              </a:rPr>
-              <a:t>Scoped</a:t>
-            </a:r>
-            <a:endParaRPr lang="en-US" sz="500" dirty="0"/>
-          </a:p>
-          <a:p>
-            <a:pPr algn="ctr" indent="0" marL="0">
-              <a:lnSpc>
-                <a:spcPct val="88000"/>
-              </a:lnSpc>
-              <a:buNone/>
-            </a:pPr>
-            <a:r>
-              <a:rPr lang="en-US" sz="440" dirty="0">
-                <a:solidFill>
-                  <a:srgbClr val="202124"/>
-                </a:solidFill>
-                <a:latin typeface="Arial" pitchFamily="34" charset="0"/>
-                <a:ea typeface="Arial" pitchFamily="34" charset="-122"/>
-                <a:cs typeface="Arial" pitchFamily="34" charset="-120"/>
-              </a:rPr>
-              <a:t>MCP &amp; RAG</a:t>
-            </a:r>
-            <a:endParaRPr lang="en-US" sz="500" dirty="0"/>
-          </a:p>
-        </p:txBody>
-      </p:sp>
-      <p:sp>
-        <p:nvSpPr>
-          <p:cNvPr id="131" name="Text 109"/>
-          <p:cNvSpPr/>
-          <p:nvPr/>
-        </p:nvSpPr>
-        <p:spPr>
-          <a:xfrm>
-            <a:off x="5237683" y="5201107"/>
-            <a:ext cx="591617" cy="124358"/>
-          </a:xfrm>
-          <a:prstGeom prst="rect">
-            <a:avLst/>
-          </a:prstGeom>
-          <a:noFill/>
-          <a:ln/>
-        </p:spPr>
-        <p:txBody>
-          <a:bodyPr wrap="square" lIns="0" tIns="0" rIns="0" bIns="0" rtlCol="0" anchor="ctr">
-            <a:normAutofit/>
-          </a:bodyPr>
-          <a:lstStyle/>
-          <a:p>
-            <a:pPr algn="ctr" indent="0" marL="0">
-              <a:lnSpc>
-                <a:spcPct val="88000"/>
-              </a:lnSpc>
-              <a:buNone/>
-            </a:pPr>
-            <a:r>
-              <a:rPr lang="en-US" sz="500" b="1" dirty="0">
-                <a:solidFill>
-                  <a:srgbClr val="202124"/>
-                </a:solidFill>
-                <a:latin typeface="Arial" pitchFamily="34" charset="0"/>
-                <a:ea typeface="Arial" pitchFamily="34" charset="-122"/>
-                <a:cs typeface="Arial" pitchFamily="34" charset="-120"/>
-              </a:rPr>
-              <a:t>SET LOCAL</a:t>
-            </a:r>
-            <a:endParaRPr lang="en-US" sz="500" dirty="0"/>
-          </a:p>
-          <a:p>
-            <a:pPr algn="ctr" indent="0" marL="0">
-              <a:lnSpc>
-                <a:spcPct val="88000"/>
-              </a:lnSpc>
-              <a:buNone/>
-            </a:pPr>
-            <a:r>
-              <a:rPr lang="en-US" sz="440" dirty="0">
-                <a:solidFill>
-                  <a:srgbClr val="202124"/>
-                </a:solidFill>
-                <a:latin typeface="Arial" pitchFamily="34" charset="0"/>
-                <a:ea typeface="Arial" pitchFamily="34" charset="-122"/>
-                <a:cs typeface="Arial" pitchFamily="34" charset="-120"/>
-              </a:rPr>
-              <a:t>current_tenant</a:t>
-            </a:r>
-            <a:endParaRPr lang="en-US" sz="500" dirty="0"/>
-          </a:p>
-        </p:txBody>
-      </p:sp>
-      <p:sp>
-        <p:nvSpPr>
-          <p:cNvPr id="132" name="Text 110"/>
-          <p:cNvSpPr/>
-          <p:nvPr/>
-        </p:nvSpPr>
-        <p:spPr>
-          <a:xfrm>
-            <a:off x="7274966" y="4654296"/>
-            <a:ext cx="591617" cy="124358"/>
-          </a:xfrm>
-          <a:prstGeom prst="rect">
-            <a:avLst/>
-          </a:prstGeom>
-          <a:noFill/>
-          <a:ln/>
-        </p:spPr>
-        <p:txBody>
-          <a:bodyPr wrap="square" lIns="0" tIns="0" rIns="0" bIns="0" rtlCol="0" anchor="ctr">
-            <a:normAutofit/>
-          </a:bodyPr>
-          <a:lstStyle/>
-          <a:p>
-            <a:pPr algn="ctr" indent="0" marL="0">
-              <a:lnSpc>
-                <a:spcPct val="88000"/>
-              </a:lnSpc>
-              <a:buNone/>
-            </a:pPr>
-            <a:r>
-              <a:rPr lang="en-US" sz="500" b="1" dirty="0">
-                <a:solidFill>
-                  <a:srgbClr val="202124"/>
-                </a:solidFill>
-                <a:latin typeface="Arial" pitchFamily="34" charset="0"/>
-                <a:ea typeface="Arial" pitchFamily="34" charset="-122"/>
-                <a:cs typeface="Arial" pitchFamily="34" charset="-120"/>
-              </a:rPr>
-              <a:t>Air-Gapped</a:t>
-            </a:r>
-            <a:endParaRPr lang="en-US" sz="500" dirty="0"/>
-          </a:p>
-          <a:p>
-            <a:pPr algn="ctr" indent="0" marL="0">
-              <a:lnSpc>
-                <a:spcPct val="88000"/>
-              </a:lnSpc>
-              <a:buNone/>
-            </a:pPr>
-            <a:r>
-              <a:rPr lang="en-US" sz="440" dirty="0">
-                <a:solidFill>
-                  <a:srgbClr val="202124"/>
-                </a:solidFill>
-                <a:latin typeface="Arial" pitchFamily="34" charset="0"/>
-                <a:ea typeface="Arial" pitchFamily="34" charset="-122"/>
-                <a:cs typeface="Arial" pitchFamily="34" charset="-120"/>
-              </a:rPr>
-              <a:t>Silo RAG</a:t>
-            </a:r>
-            <a:endParaRPr lang="en-US" sz="500" dirty="0"/>
-          </a:p>
-        </p:txBody>
-      </p:sp>
-      <p:sp>
-        <p:nvSpPr>
-          <p:cNvPr id="133" name="Text 111"/>
-          <p:cNvSpPr/>
-          <p:nvPr/>
-        </p:nvSpPr>
-        <p:spPr>
-          <a:xfrm>
-            <a:off x="7274966" y="5201107"/>
-            <a:ext cx="591617" cy="124358"/>
-          </a:xfrm>
-          <a:prstGeom prst="rect">
-            <a:avLst/>
-          </a:prstGeom>
-          <a:noFill/>
-          <a:ln/>
-        </p:spPr>
-        <p:txBody>
-          <a:bodyPr wrap="square" lIns="0" tIns="0" rIns="0" bIns="0" rtlCol="0" anchor="ctr">
-            <a:normAutofit/>
-          </a:bodyPr>
-          <a:lstStyle/>
-          <a:p>
-            <a:pPr algn="ctr" indent="0" marL="0">
-              <a:lnSpc>
-                <a:spcPct val="88000"/>
-              </a:lnSpc>
-              <a:buNone/>
-            </a:pPr>
-            <a:r>
-              <a:rPr lang="en-US" sz="500" b="1" dirty="0">
-                <a:solidFill>
-                  <a:srgbClr val="202124"/>
-                </a:solidFill>
-                <a:latin typeface="Arial" pitchFamily="34" charset="0"/>
-                <a:ea typeface="Arial" pitchFamily="34" charset="-122"/>
-                <a:cs typeface="Arial" pitchFamily="34" charset="-120"/>
-              </a:rPr>
-              <a:t>CMEK-Encrypted</a:t>
-            </a:r>
-            <a:endParaRPr lang="en-US" sz="500" dirty="0"/>
-          </a:p>
-          <a:p>
-            <a:pPr algn="ctr" indent="0" marL="0">
-              <a:lnSpc>
-                <a:spcPct val="88000"/>
-              </a:lnSpc>
-              <a:buNone/>
-            </a:pPr>
-            <a:r>
-              <a:rPr lang="en-US" sz="440" dirty="0">
-                <a:solidFill>
-                  <a:srgbClr val="202124"/>
-                </a:solidFill>
-                <a:latin typeface="Arial" pitchFamily="34" charset="0"/>
-                <a:ea typeface="Arial" pitchFamily="34" charset="-122"/>
-                <a:cs typeface="Arial" pitchFamily="34" charset="-120"/>
-              </a:rPr>
-              <a:t>State &amp; Tools</a:t>
-            </a:r>
-            <a:endParaRPr lang="en-US" sz="500" dirty="0"/>
-          </a:p>
-        </p:txBody>
-      </p:sp>
-      <p:sp>
-        <p:nvSpPr>
-          <p:cNvPr id="134" name="Text 112"/>
-          <p:cNvSpPr/>
-          <p:nvPr/>
-        </p:nvSpPr>
-        <p:spPr>
-          <a:xfrm>
-            <a:off x="4432097" y="5328209"/>
-            <a:ext cx="509321" cy="131674"/>
-          </a:xfrm>
-          <a:prstGeom prst="rect">
-            <a:avLst/>
-          </a:prstGeom>
-          <a:noFill/>
-          <a:ln/>
-        </p:spPr>
-        <p:txBody>
-          <a:bodyPr wrap="square" lIns="0" tIns="0" rIns="0" bIns="0" rtlCol="0" anchor="ctr">
-            <a:normAutofit/>
-          </a:bodyPr>
-          <a:lstStyle/>
-          <a:p>
-            <a:pPr algn="l" indent="0" marL="0">
-              <a:lnSpc>
-                <a:spcPct val="88000"/>
-              </a:lnSpc>
-              <a:buNone/>
-            </a:pPr>
-            <a:r>
-              <a:rPr lang="en-US" sz="500" b="1" dirty="0">
-                <a:solidFill>
-                  <a:srgbClr val="202124"/>
-                </a:solidFill>
-                <a:latin typeface="Arial" pitchFamily="34" charset="0"/>
-                <a:ea typeface="Arial" pitchFamily="34" charset="-122"/>
-                <a:cs typeface="Arial" pitchFamily="34" charset="-120"/>
-              </a:rPr>
-              <a:t>Generates</a:t>
-            </a:r>
-            <a:endParaRPr lang="en-US" sz="500" dirty="0"/>
-          </a:p>
-          <a:p>
-            <a:pPr algn="l" indent="0" marL="0">
-              <a:lnSpc>
-                <a:spcPct val="88000"/>
-              </a:lnSpc>
-              <a:buNone/>
-            </a:pPr>
-            <a:r>
-              <a:rPr lang="en-US" sz="440" dirty="0">
-                <a:solidFill>
-                  <a:srgbClr val="202124"/>
-                </a:solidFill>
-                <a:latin typeface="Arial" pitchFamily="34" charset="0"/>
-                <a:ea typeface="Arial" pitchFamily="34" charset="-122"/>
-                <a:cs typeface="Arial" pitchFamily="34" charset="-120"/>
-              </a:rPr>
-              <a:t>response</a:t>
-            </a:r>
-            <a:endParaRPr lang="en-US" sz="500" dirty="0"/>
-          </a:p>
-        </p:txBody>
-      </p:sp>
-      <p:sp>
-        <p:nvSpPr>
-          <p:cNvPr id="135" name="Text 113"/>
-          <p:cNvSpPr/>
-          <p:nvPr/>
-        </p:nvSpPr>
-        <p:spPr>
-          <a:xfrm>
-            <a:off x="6282842" y="3396082"/>
-            <a:ext cx="554126" cy="116129"/>
-          </a:xfrm>
-          <a:prstGeom prst="rect">
-            <a:avLst/>
-          </a:prstGeom>
-          <a:noFill/>
-          <a:ln/>
-        </p:spPr>
-        <p:txBody>
-          <a:bodyPr wrap="square" lIns="0" tIns="0" rIns="0" bIns="0" rtlCol="0" anchor="ctr">
-            <a:normAutofit/>
-          </a:bodyPr>
-          <a:lstStyle/>
-          <a:p>
-            <a:pPr algn="l" indent="0" marL="0">
-              <a:lnSpc>
-                <a:spcPct val="88000"/>
-              </a:lnSpc>
-              <a:buNone/>
-            </a:pPr>
-            <a:r>
-              <a:rPr lang="en-US" sz="500" b="1" dirty="0">
-                <a:solidFill>
-                  <a:srgbClr val="202124"/>
-                </a:solidFill>
-                <a:latin typeface="Arial" pitchFamily="34" charset="0"/>
-                <a:ea typeface="Arial" pitchFamily="34" charset="-122"/>
-                <a:cs typeface="Arial" pitchFamily="34" charset="-120"/>
-              </a:rPr>
-              <a:t>Sanitized response</a:t>
-            </a:r>
-            <a:endParaRPr lang="en-US" sz="500" dirty="0"/>
-          </a:p>
-          <a:p>
-            <a:pPr algn="l" indent="0" marL="0">
-              <a:lnSpc>
-                <a:spcPct val="88000"/>
-              </a:lnSpc>
-              <a:buNone/>
-            </a:pPr>
-            <a:r>
-              <a:rPr lang="en-US" sz="440" dirty="0">
-                <a:solidFill>
-                  <a:srgbClr val="202124"/>
-                </a:solidFill>
-                <a:latin typeface="Arial" pitchFamily="34" charset="0"/>
-                <a:ea typeface="Arial" pitchFamily="34" charset="-122"/>
-                <a:cs typeface="Arial" pitchFamily="34" charset="-120"/>
-              </a:rPr>
-              <a:t>with SDP redaction</a:t>
-            </a:r>
-            <a:endParaRPr lang="en-US" sz="500" dirty="0"/>
-          </a:p>
-        </p:txBody>
-      </p:sp>
-      <p:sp>
-        <p:nvSpPr>
-          <p:cNvPr id="136" name="Text 114"/>
-          <p:cNvSpPr/>
-          <p:nvPr/>
-        </p:nvSpPr>
-        <p:spPr>
-          <a:xfrm>
-            <a:off x="5488229" y="3396082"/>
-            <a:ext cx="494690" cy="116129"/>
-          </a:xfrm>
-          <a:prstGeom prst="rect">
-            <a:avLst/>
-          </a:prstGeom>
-          <a:noFill/>
-          <a:ln/>
-        </p:spPr>
-        <p:txBody>
-          <a:bodyPr wrap="square" lIns="0" tIns="0" rIns="0" bIns="0" rtlCol="0" anchor="ctr">
-            <a:normAutofit/>
-          </a:bodyPr>
-          <a:lstStyle/>
-          <a:p>
-            <a:pPr algn="l" indent="0" marL="0">
-              <a:lnSpc>
-                <a:spcPct val="88000"/>
-              </a:lnSpc>
-              <a:buNone/>
-            </a:pPr>
-            <a:r>
-              <a:rPr lang="en-US" sz="500" b="1" dirty="0">
-                <a:solidFill>
-                  <a:srgbClr val="202124"/>
-                </a:solidFill>
-                <a:latin typeface="Arial" pitchFamily="34" charset="0"/>
-                <a:ea typeface="Arial" pitchFamily="34" charset="-122"/>
-                <a:cs typeface="Arial" pitchFamily="34" charset="-120"/>
-              </a:rPr>
-              <a:t>Route by tenant tier</a:t>
-            </a:r>
-            <a:endParaRPr lang="en-US" sz="500" dirty="0"/>
-          </a:p>
-          <a:p>
-            <a:pPr algn="l" indent="0" marL="0">
-              <a:lnSpc>
-                <a:spcPct val="88000"/>
-              </a:lnSpc>
-              <a:buNone/>
-            </a:pPr>
-            <a:r>
-              <a:rPr lang="en-US" sz="440" dirty="0">
-                <a:solidFill>
-                  <a:srgbClr val="202124"/>
-                </a:solidFill>
-                <a:latin typeface="Arial" pitchFamily="34" charset="0"/>
-                <a:ea typeface="Arial" pitchFamily="34" charset="-122"/>
-                <a:cs typeface="Arial" pitchFamily="34" charset="-120"/>
-              </a:rPr>
-              <a:t>(Pool, Silo or PSC)</a:t>
-            </a:r>
-            <a:endParaRPr lang="en-US" sz="500" dirty="0"/>
-          </a:p>
-        </p:txBody>
-      </p:sp>
-      <p:sp>
-        <p:nvSpPr>
-          <p:cNvPr id="137" name="Text 115"/>
-          <p:cNvSpPr/>
-          <p:nvPr/>
-        </p:nvSpPr>
-        <p:spPr>
-          <a:xfrm>
-            <a:off x="5039258" y="2983687"/>
-            <a:ext cx="502006" cy="109728"/>
-          </a:xfrm>
-          <a:prstGeom prst="rect">
-            <a:avLst/>
-          </a:prstGeom>
-          <a:noFill/>
-          <a:ln/>
-        </p:spPr>
-        <p:txBody>
-          <a:bodyPr wrap="square" lIns="0" tIns="0" rIns="0" bIns="0" rtlCol="0" anchor="ctr">
-            <a:normAutofit/>
-          </a:bodyPr>
-          <a:lstStyle/>
-          <a:p>
-            <a:pPr algn="ctr" indent="0" marL="0">
-              <a:lnSpc>
-                <a:spcPct val="88000"/>
-              </a:lnSpc>
-              <a:buNone/>
-            </a:pPr>
-            <a:r>
-              <a:rPr lang="en-US" sz="500" b="1" dirty="0">
-                <a:solidFill>
-                  <a:srgbClr val="202124"/>
-                </a:solidFill>
-                <a:latin typeface="Arial" pitchFamily="34" charset="0"/>
-                <a:ea typeface="Arial" pitchFamily="34" charset="-122"/>
-                <a:cs typeface="Arial" pitchFamily="34" charset="-120"/>
-              </a:rPr>
-              <a:t>OBO + DPoP</a:t>
-            </a:r>
-            <a:endParaRPr lang="en-US" sz="500" dirty="0"/>
-          </a:p>
-          <a:p>
-            <a:pPr algn="ctr" indent="0" marL="0">
-              <a:lnSpc>
-                <a:spcPct val="88000"/>
-              </a:lnSpc>
-              <a:buNone/>
-            </a:pPr>
-            <a:r>
-              <a:rPr lang="en-US" sz="440" dirty="0">
-                <a:solidFill>
-                  <a:srgbClr val="202124"/>
-                </a:solidFill>
-                <a:latin typeface="Arial" pitchFamily="34" charset="0"/>
-                <a:ea typeface="Arial" pitchFamily="34" charset="-122"/>
-                <a:cs typeface="Arial" pitchFamily="34" charset="-120"/>
-              </a:rPr>
-              <a:t>verification</a:t>
-            </a:r>
-            <a:endParaRPr lang="en-US" sz="500" dirty="0"/>
-          </a:p>
-        </p:txBody>
-      </p:sp>
-      <p:sp>
-        <p:nvSpPr>
-          <p:cNvPr id="138" name="Text 116"/>
-          <p:cNvSpPr/>
-          <p:nvPr/>
-        </p:nvSpPr>
-        <p:spPr>
-          <a:xfrm>
-            <a:off x="4432097" y="4459529"/>
-            <a:ext cx="509321" cy="109728"/>
-          </a:xfrm>
-          <a:prstGeom prst="rect">
-            <a:avLst/>
-          </a:prstGeom>
-          <a:noFill/>
-          <a:ln/>
-        </p:spPr>
-        <p:txBody>
-          <a:bodyPr wrap="square" lIns="0" tIns="0" rIns="0" bIns="0" rtlCol="0" anchor="ctr">
-            <a:normAutofit/>
-          </a:bodyPr>
-          <a:lstStyle/>
-          <a:p>
-            <a:pPr algn="l" indent="0" marL="0">
-              <a:lnSpc>
-                <a:spcPct val="88000"/>
-              </a:lnSpc>
-              <a:buNone/>
-            </a:pPr>
-            <a:r>
-              <a:rPr lang="en-US" sz="500" b="1" dirty="0">
-                <a:solidFill>
-                  <a:srgbClr val="202124"/>
-                </a:solidFill>
-                <a:latin typeface="Arial" pitchFamily="34" charset="0"/>
-                <a:ea typeface="Arial" pitchFamily="34" charset="-122"/>
-                <a:cs typeface="Arial" pitchFamily="34" charset="-120"/>
-              </a:rPr>
-              <a:t>Sanitize request</a:t>
-            </a:r>
-            <a:endParaRPr lang="en-US" sz="500" dirty="0"/>
-          </a:p>
-        </p:txBody>
-      </p:sp>
-      <p:sp>
-        <p:nvSpPr>
-          <p:cNvPr id="139" name="Text 117"/>
-          <p:cNvSpPr/>
-          <p:nvPr/>
-        </p:nvSpPr>
-        <p:spPr>
-          <a:xfrm>
-            <a:off x="4432097" y="4639666"/>
-            <a:ext cx="509321" cy="109728"/>
-          </a:xfrm>
-          <a:prstGeom prst="rect">
-            <a:avLst/>
-          </a:prstGeom>
-          <a:noFill/>
-          <a:ln/>
-        </p:spPr>
-        <p:txBody>
-          <a:bodyPr wrap="square" lIns="0" tIns="0" rIns="0" bIns="0" rtlCol="0" anchor="ctr">
-            <a:normAutofit/>
-          </a:bodyPr>
-          <a:lstStyle/>
-          <a:p>
-            <a:pPr algn="l" indent="0" marL="0">
-              <a:lnSpc>
-                <a:spcPct val="88000"/>
-              </a:lnSpc>
-              <a:buNone/>
-            </a:pPr>
-            <a:r>
-              <a:rPr lang="en-US" sz="500" b="1" dirty="0">
-                <a:solidFill>
-                  <a:srgbClr val="202124"/>
-                </a:solidFill>
-                <a:latin typeface="Arial" pitchFamily="34" charset="0"/>
-                <a:ea typeface="Arial" pitchFamily="34" charset="-122"/>
-                <a:cs typeface="Arial" pitchFamily="34" charset="-120"/>
-              </a:rPr>
-              <a:t>Sanitize response</a:t>
-            </a:r>
-            <a:endParaRPr lang="en-US" sz="500" dirty="0"/>
-          </a:p>
-        </p:txBody>
-      </p:sp>
-      <p:sp>
-        <p:nvSpPr>
-          <p:cNvPr id="140" name="Text 118"/>
-          <p:cNvSpPr/>
-          <p:nvPr/>
-        </p:nvSpPr>
-        <p:spPr>
-          <a:xfrm>
-            <a:off x="5016398" y="2302459"/>
-            <a:ext cx="344729" cy="109728"/>
-          </a:xfrm>
-          <a:prstGeom prst="rect">
-            <a:avLst/>
-          </a:prstGeom>
-          <a:noFill/>
-          <a:ln/>
-        </p:spPr>
-        <p:txBody>
-          <a:bodyPr wrap="square" lIns="0" tIns="0" rIns="0" bIns="0" rtlCol="0" anchor="ctr">
-            <a:normAutofit/>
-          </a:bodyPr>
-          <a:lstStyle/>
-          <a:p>
-            <a:pPr algn="ctr" indent="0" marL="0">
-              <a:lnSpc>
-                <a:spcPct val="88000"/>
-              </a:lnSpc>
-              <a:buNone/>
-            </a:pPr>
-            <a:r>
-              <a:rPr lang="en-US" sz="500" b="1" dirty="0">
-                <a:solidFill>
-                  <a:srgbClr val="202124"/>
-                </a:solidFill>
-                <a:latin typeface="Arial" pitchFamily="34" charset="0"/>
-                <a:ea typeface="Arial" pitchFamily="34" charset="-122"/>
-                <a:cs typeface="Arial" pitchFamily="34" charset="-120"/>
-              </a:rPr>
-              <a:t>Header &amp; WAF</a:t>
-            </a:r>
-            <a:endParaRPr lang="en-US" sz="500" dirty="0"/>
-          </a:p>
-          <a:p>
-            <a:pPr algn="ctr" indent="0" marL="0">
-              <a:lnSpc>
-                <a:spcPct val="88000"/>
-              </a:lnSpc>
-              <a:buNone/>
-            </a:pPr>
-            <a:r>
-              <a:rPr lang="en-US" sz="440" dirty="0">
-                <a:solidFill>
-                  <a:srgbClr val="202124"/>
-                </a:solidFill>
-                <a:latin typeface="Arial" pitchFamily="34" charset="0"/>
-                <a:ea typeface="Arial" pitchFamily="34" charset="-122"/>
-                <a:cs typeface="Arial" pitchFamily="34" charset="-120"/>
-              </a:rPr>
-              <a:t>policies</a:t>
-            </a:r>
-            <a:endParaRPr lang="en-US" sz="500" dirty="0"/>
-          </a:p>
-        </p:txBody>
-      </p:sp>
-      <p:sp>
-        <p:nvSpPr>
-          <p:cNvPr id="141" name="Text 119"/>
-          <p:cNvSpPr/>
-          <p:nvPr/>
-        </p:nvSpPr>
-        <p:spPr>
-          <a:xfrm>
-            <a:off x="5016398" y="2819095"/>
-            <a:ext cx="344729" cy="109728"/>
-          </a:xfrm>
-          <a:prstGeom prst="rect">
-            <a:avLst/>
-          </a:prstGeom>
-          <a:noFill/>
-          <a:ln/>
-        </p:spPr>
-        <p:txBody>
-          <a:bodyPr wrap="square" lIns="0" tIns="0" rIns="0" bIns="0" rtlCol="0" anchor="ctr">
-            <a:normAutofit/>
-          </a:bodyPr>
-          <a:lstStyle/>
-          <a:p>
-            <a:pPr algn="ctr" indent="0" marL="0">
-              <a:lnSpc>
-                <a:spcPct val="88000"/>
-              </a:lnSpc>
-              <a:buNone/>
-            </a:pPr>
-            <a:r>
-              <a:rPr lang="en-US" sz="500" b="1" dirty="0">
-                <a:solidFill>
-                  <a:srgbClr val="202124"/>
-                </a:solidFill>
-                <a:latin typeface="Arial" pitchFamily="34" charset="0"/>
-                <a:ea typeface="Arial" pitchFamily="34" charset="-122"/>
-                <a:cs typeface="Arial" pitchFamily="34" charset="-120"/>
-              </a:rPr>
-              <a:t>Sanitize</a:t>
-            </a:r>
-            <a:endParaRPr lang="en-US" sz="500" dirty="0"/>
-          </a:p>
-          <a:p>
-            <a:pPr algn="ctr" indent="0" marL="0">
-              <a:lnSpc>
-                <a:spcPct val="88000"/>
-              </a:lnSpc>
-              <a:buNone/>
-            </a:pPr>
-            <a:r>
-              <a:rPr lang="en-US" sz="440" dirty="0">
-                <a:solidFill>
-                  <a:srgbClr val="202124"/>
-                </a:solidFill>
-                <a:latin typeface="Arial" pitchFamily="34" charset="0"/>
-                <a:ea typeface="Arial" pitchFamily="34" charset="-122"/>
-                <a:cs typeface="Arial" pitchFamily="34" charset="-120"/>
-              </a:rPr>
-              <a:t>prompt</a:t>
-            </a:r>
-            <a:endParaRPr lang="en-US" sz="500" dirty="0"/>
-          </a:p>
-        </p:txBody>
-      </p:sp>
-      <p:sp>
-        <p:nvSpPr>
-          <p:cNvPr id="142" name="Text 120"/>
-          <p:cNvSpPr/>
-          <p:nvPr/>
-        </p:nvSpPr>
-        <p:spPr>
-          <a:xfrm>
-            <a:off x="6267298" y="1478585"/>
-            <a:ext cx="299923" cy="109728"/>
-          </a:xfrm>
-          <a:prstGeom prst="rect">
-            <a:avLst/>
-          </a:prstGeom>
-          <a:noFill/>
-          <a:ln/>
-        </p:spPr>
-        <p:txBody>
-          <a:bodyPr wrap="square" lIns="0" tIns="0" rIns="0" bIns="0" rtlCol="0" anchor="ctr">
-            <a:normAutofit/>
-          </a:bodyPr>
-          <a:lstStyle/>
-          <a:p>
-            <a:pPr algn="l" indent="0" marL="0">
-              <a:lnSpc>
-                <a:spcPct val="88000"/>
-              </a:lnSpc>
-              <a:buNone/>
-            </a:pPr>
-            <a:r>
-              <a:rPr lang="en-US" sz="500" b="1" dirty="0">
-                <a:solidFill>
-                  <a:srgbClr val="202124"/>
-                </a:solidFill>
-                <a:latin typeface="Arial" pitchFamily="34" charset="0"/>
-                <a:ea typeface="Arial" pitchFamily="34" charset="-122"/>
-                <a:cs typeface="Arial" pitchFamily="34" charset="-120"/>
-              </a:rPr>
-              <a:t>Response</a:t>
-            </a:r>
-            <a:endParaRPr lang="en-US" sz="500" dirty="0"/>
-          </a:p>
-        </p:txBody>
-      </p:sp>
-      <p:sp>
-        <p:nvSpPr>
-          <p:cNvPr id="143" name="Text 121"/>
-          <p:cNvSpPr/>
-          <p:nvPr/>
-        </p:nvSpPr>
-        <p:spPr>
-          <a:xfrm>
-            <a:off x="6267298" y="2838298"/>
-            <a:ext cx="299923" cy="109728"/>
-          </a:xfrm>
-          <a:prstGeom prst="rect">
-            <a:avLst/>
-          </a:prstGeom>
-          <a:noFill/>
-          <a:ln/>
-        </p:spPr>
-        <p:txBody>
-          <a:bodyPr wrap="square" lIns="0" tIns="0" rIns="0" bIns="0" rtlCol="0" anchor="ctr">
-            <a:normAutofit/>
-          </a:bodyPr>
-          <a:lstStyle/>
-          <a:p>
-            <a:pPr algn="l" indent="0" marL="0">
-              <a:lnSpc>
-                <a:spcPct val="88000"/>
-              </a:lnSpc>
-              <a:buNone/>
-            </a:pPr>
-            <a:r>
-              <a:rPr lang="en-US" sz="500" b="1" dirty="0">
-                <a:solidFill>
-                  <a:srgbClr val="202124"/>
-                </a:solidFill>
-                <a:latin typeface="Arial" pitchFamily="34" charset="0"/>
-                <a:ea typeface="Arial" pitchFamily="34" charset="-122"/>
-                <a:cs typeface="Arial" pitchFamily="34" charset="-120"/>
-              </a:rPr>
-              <a:t>Response</a:t>
-            </a:r>
-            <a:endParaRPr lang="en-US" sz="500" dirty="0"/>
-          </a:p>
-        </p:txBody>
-      </p:sp>
-      <p:sp>
-        <p:nvSpPr>
-          <p:cNvPr id="144" name="Text 122"/>
-          <p:cNvSpPr/>
-          <p:nvPr/>
-        </p:nvSpPr>
-        <p:spPr>
-          <a:xfrm>
-            <a:off x="5578754" y="1478585"/>
-            <a:ext cx="262433" cy="109728"/>
-          </a:xfrm>
-          <a:prstGeom prst="rect">
-            <a:avLst/>
-          </a:prstGeom>
-          <a:noFill/>
-          <a:ln/>
-        </p:spPr>
-        <p:txBody>
-          <a:bodyPr wrap="square" lIns="0" tIns="0" rIns="0" bIns="0" rtlCol="0" anchor="ctr">
-            <a:normAutofit/>
-          </a:bodyPr>
-          <a:lstStyle/>
-          <a:p>
-            <a:pPr algn="r" indent="0" marL="0">
-              <a:lnSpc>
-                <a:spcPct val="88000"/>
-              </a:lnSpc>
-              <a:buNone/>
-            </a:pPr>
-            <a:r>
-              <a:rPr lang="en-US" sz="500" b="1" dirty="0">
-                <a:solidFill>
-                  <a:srgbClr val="202124"/>
-                </a:solidFill>
-                <a:latin typeface="Arial" pitchFamily="34" charset="0"/>
-                <a:ea typeface="Arial" pitchFamily="34" charset="-122"/>
-                <a:cs typeface="Arial" pitchFamily="34" charset="-120"/>
-              </a:rPr>
-              <a:t>Request</a:t>
-            </a:r>
-            <a:endParaRPr lang="en-US" sz="500" dirty="0"/>
-          </a:p>
-        </p:txBody>
-      </p:sp>
-      <p:sp>
-        <p:nvSpPr>
-          <p:cNvPr id="145" name="Text 123"/>
-          <p:cNvSpPr/>
-          <p:nvPr/>
-        </p:nvSpPr>
-        <p:spPr>
-          <a:xfrm>
-            <a:off x="5578754" y="2838298"/>
-            <a:ext cx="262433" cy="109728"/>
-          </a:xfrm>
-          <a:prstGeom prst="rect">
-            <a:avLst/>
-          </a:prstGeom>
-          <a:noFill/>
-          <a:ln/>
-        </p:spPr>
-        <p:txBody>
-          <a:bodyPr wrap="square" lIns="0" tIns="0" rIns="0" bIns="0" rtlCol="0" anchor="ctr">
-            <a:normAutofit/>
-          </a:bodyPr>
-          <a:lstStyle/>
-          <a:p>
-            <a:pPr algn="r" indent="0" marL="0">
-              <a:lnSpc>
-                <a:spcPct val="88000"/>
-              </a:lnSpc>
-              <a:buNone/>
-            </a:pPr>
-            <a:r>
-              <a:rPr lang="en-US" sz="500" b="1" dirty="0">
-                <a:solidFill>
-                  <a:srgbClr val="202124"/>
-                </a:solidFill>
-                <a:latin typeface="Arial" pitchFamily="34" charset="0"/>
-                <a:ea typeface="Arial" pitchFamily="34" charset="-122"/>
-                <a:cs typeface="Arial" pitchFamily="34" charset="-120"/>
-              </a:rPr>
-              <a:t>Request</a:t>
-            </a:r>
-            <a:endParaRPr lang="en-US" sz="500" dirty="0"/>
-          </a:p>
-        </p:txBody>
-      </p:sp>
-      <p:sp>
-        <p:nvSpPr>
-          <p:cNvPr id="146" name="Shape 124"/>
+            <a:endParaRPr lang="en-US" sz="435" dirty="0"/>
+          </a:p>
+        </p:txBody>
+      </p:sp>
+      <p:sp>
+        <p:nvSpPr>
+          <p:cNvPr id="129" name="Shape 107"/>
           <p:cNvSpPr/>
           <p:nvPr/>
         </p:nvSpPr>
@@ -6940,7 +5972,7 @@
       </p:sp>
       <p:sp>
         <p:nvSpPr>
-          <p:cNvPr id="147" name="Text 125"/>
+          <p:cNvPr id="130" name="Text 108"/>
           <p:cNvSpPr/>
           <p:nvPr/>
         </p:nvSpPr>
@@ -6979,7 +6011,7 @@
       </p:sp>
       <p:sp>
         <p:nvSpPr>
-          <p:cNvPr id="148" name="Shape 126"/>
+          <p:cNvPr id="131" name="Shape 109"/>
           <p:cNvSpPr/>
           <p:nvPr/>
         </p:nvSpPr>
@@ -7004,7 +6036,7 @@
       </p:sp>
       <p:sp>
         <p:nvSpPr>
-          <p:cNvPr id="149" name="Text 127"/>
+          <p:cNvPr id="132" name="Text 110"/>
           <p:cNvSpPr/>
           <p:nvPr/>
         </p:nvSpPr>
@@ -7043,7 +6075,7 @@
       </p:sp>
       <p:sp>
         <p:nvSpPr>
-          <p:cNvPr id="150" name="Shape 128"/>
+          <p:cNvPr id="133" name="Shape 111"/>
           <p:cNvSpPr/>
           <p:nvPr/>
         </p:nvSpPr>
@@ -7068,7 +6100,7 @@
       </p:sp>
       <p:sp>
         <p:nvSpPr>
-          <p:cNvPr id="151" name="Text 129"/>
+          <p:cNvPr id="134" name="Text 112"/>
           <p:cNvSpPr/>
           <p:nvPr/>
         </p:nvSpPr>
@@ -7107,7 +6139,7 @@
       </p:sp>
       <p:sp>
         <p:nvSpPr>
-          <p:cNvPr id="152" name="Shape 130"/>
+          <p:cNvPr id="135" name="Shape 113"/>
           <p:cNvSpPr/>
           <p:nvPr/>
         </p:nvSpPr>
@@ -7132,7 +6164,7 @@
       </p:sp>
       <p:sp>
         <p:nvSpPr>
-          <p:cNvPr id="153" name="Text 131"/>
+          <p:cNvPr id="136" name="Text 114"/>
           <p:cNvSpPr/>
           <p:nvPr/>
         </p:nvSpPr>
@@ -7171,7 +6203,7 @@
       </p:sp>
       <p:sp>
         <p:nvSpPr>
-          <p:cNvPr id="154" name="Shape 132"/>
+          <p:cNvPr id="137" name="Shape 115"/>
           <p:cNvSpPr/>
           <p:nvPr/>
         </p:nvSpPr>
@@ -7196,7 +6228,7 @@
       </p:sp>
       <p:sp>
         <p:nvSpPr>
-          <p:cNvPr id="155" name="Text 133"/>
+          <p:cNvPr id="138" name="Text 116"/>
           <p:cNvSpPr/>
           <p:nvPr/>
         </p:nvSpPr>
@@ -7235,7 +6267,7 @@
       </p:sp>
       <p:sp>
         <p:nvSpPr>
-          <p:cNvPr id="156" name="Shape 134"/>
+          <p:cNvPr id="139" name="Shape 117"/>
           <p:cNvSpPr/>
           <p:nvPr/>
         </p:nvSpPr>
@@ -7260,7 +6292,7 @@
       </p:sp>
       <p:sp>
         <p:nvSpPr>
-          <p:cNvPr id="157" name="Text 135"/>
+          <p:cNvPr id="140" name="Text 118"/>
           <p:cNvSpPr/>
           <p:nvPr/>
         </p:nvSpPr>
@@ -7299,7 +6331,7 @@
       </p:sp>
       <p:sp>
         <p:nvSpPr>
-          <p:cNvPr id="158" name="Shape 136"/>
+          <p:cNvPr id="141" name="Shape 119"/>
           <p:cNvSpPr/>
           <p:nvPr/>
         </p:nvSpPr>
@@ -7324,7 +6356,7 @@
       </p:sp>
       <p:sp>
         <p:nvSpPr>
-          <p:cNvPr id="159" name="Text 137"/>
+          <p:cNvPr id="142" name="Text 120"/>
           <p:cNvSpPr/>
           <p:nvPr/>
         </p:nvSpPr>
@@ -7363,7 +6395,7 @@
       </p:sp>
       <p:sp>
         <p:nvSpPr>
-          <p:cNvPr id="160" name="Shape 138"/>
+          <p:cNvPr id="143" name="Shape 121"/>
           <p:cNvSpPr/>
           <p:nvPr/>
         </p:nvSpPr>
@@ -7388,7 +6420,7 @@
       </p:sp>
       <p:sp>
         <p:nvSpPr>
-          <p:cNvPr id="161" name="Text 139"/>
+          <p:cNvPr id="144" name="Text 122"/>
           <p:cNvSpPr/>
           <p:nvPr/>
         </p:nvSpPr>
@@ -7427,7 +6459,7 @@
       </p:sp>
       <p:sp>
         <p:nvSpPr>
-          <p:cNvPr id="162" name="Shape 140"/>
+          <p:cNvPr id="145" name="Shape 123"/>
           <p:cNvSpPr/>
           <p:nvPr/>
         </p:nvSpPr>
@@ -7452,7 +6484,7 @@
       </p:sp>
       <p:sp>
         <p:nvSpPr>
-          <p:cNvPr id="163" name="Text 141"/>
+          <p:cNvPr id="146" name="Text 124"/>
           <p:cNvSpPr/>
           <p:nvPr/>
         </p:nvSpPr>
@@ -7486,6 +6518,805 @@
               <a:t>5</a:t>
             </a:r>
             <a:endParaRPr lang="en-US" sz="620" dirty="0"/>
+          </a:p>
+        </p:txBody>
+      </p:sp>
+      <p:sp>
+        <p:nvSpPr>
+          <p:cNvPr id="147" name="Text 125"/>
+          <p:cNvSpPr/>
+          <p:nvPr/>
+        </p:nvSpPr>
+        <p:spPr>
+          <a:xfrm>
+            <a:off x="7416698" y="3397910"/>
+            <a:ext cx="786384" cy="114300"/>
+          </a:xfrm>
+          <a:prstGeom prst="roundRect">
+            <a:avLst>
+              <a:gd name="adj" fmla="val 24000"/>
+            </a:avLst>
+          </a:prstGeom>
+          <a:solidFill>
+            <a:srgbClr val="FFFFFF"/>
+          </a:solidFill>
+          <a:ln w="5080">
+            <a:solidFill>
+              <a:srgbClr val="DADCE0"/>
+            </a:solidFill>
+          </a:ln>
+        </p:spPr>
+        <p:txBody>
+          <a:bodyPr wrap="square" lIns="0" tIns="0" rIns="0" bIns="0" rtlCol="0" anchor="ctr"/>
+          <a:lstStyle/>
+          <a:p>
+            <a:pPr algn="ctr" indent="0" marL="0">
+              <a:buNone/>
+            </a:pPr>
+            <a:r>
+              <a:rPr lang="en-US" sz="420" b="1" dirty="0">
+                <a:solidFill>
+                  <a:srgbClr val="202124"/>
+                </a:solidFill>
+                <a:latin typeface="Arial" pitchFamily="34" charset="0"/>
+                <a:ea typeface="Arial" pitchFamily="34" charset="-122"/>
+                <a:cs typeface="Arial" pitchFamily="34" charset="-120"/>
+              </a:rPr>
+              <a:t>Security, OTel &amp; FinOps chargeback telemetry</a:t>
+            </a:r>
+            <a:endParaRPr lang="en-US" sz="420" dirty="0"/>
+          </a:p>
+        </p:txBody>
+      </p:sp>
+      <p:sp>
+        <p:nvSpPr>
+          <p:cNvPr id="148" name="Text 126"/>
+          <p:cNvSpPr/>
+          <p:nvPr/>
+        </p:nvSpPr>
+        <p:spPr>
+          <a:xfrm>
+            <a:off x="5295290" y="4659782"/>
+            <a:ext cx="468173" cy="114300"/>
+          </a:xfrm>
+          <a:prstGeom prst="roundRect">
+            <a:avLst>
+              <a:gd name="adj" fmla="val 24000"/>
+            </a:avLst>
+          </a:prstGeom>
+          <a:solidFill>
+            <a:srgbClr val="FFFFFF"/>
+          </a:solidFill>
+          <a:ln w="5080">
+            <a:solidFill>
+              <a:srgbClr val="DADCE0"/>
+            </a:solidFill>
+          </a:ln>
+        </p:spPr>
+        <p:txBody>
+          <a:bodyPr wrap="square" lIns="0" tIns="0" rIns="0" bIns="0" rtlCol="0" anchor="ctr"/>
+          <a:lstStyle/>
+          <a:p>
+            <a:pPr algn="ctr" indent="0" marL="0">
+              <a:buNone/>
+            </a:pPr>
+            <a:r>
+              <a:rPr lang="en-US" sz="420" b="1" dirty="0">
+                <a:solidFill>
+                  <a:srgbClr val="202124"/>
+                </a:solidFill>
+                <a:latin typeface="Arial" pitchFamily="34" charset="0"/>
+                <a:ea typeface="Arial" pitchFamily="34" charset="-122"/>
+                <a:cs typeface="Arial" pitchFamily="34" charset="-120"/>
+              </a:rPr>
+              <a:t>Scoped MCP &amp; RAG</a:t>
+            </a:r>
+            <a:endParaRPr lang="en-US" sz="420" dirty="0"/>
+          </a:p>
+        </p:txBody>
+      </p:sp>
+      <p:sp>
+        <p:nvSpPr>
+          <p:cNvPr id="149" name="Text 127"/>
+          <p:cNvSpPr/>
+          <p:nvPr/>
+        </p:nvSpPr>
+        <p:spPr>
+          <a:xfrm>
+            <a:off x="5196535" y="5206594"/>
+            <a:ext cx="665683" cy="114300"/>
+          </a:xfrm>
+          <a:prstGeom prst="roundRect">
+            <a:avLst>
+              <a:gd name="adj" fmla="val 24000"/>
+            </a:avLst>
+          </a:prstGeom>
+          <a:solidFill>
+            <a:srgbClr val="FFFFFF"/>
+          </a:solidFill>
+          <a:ln w="5080">
+            <a:solidFill>
+              <a:srgbClr val="DADCE0"/>
+            </a:solidFill>
+          </a:ln>
+        </p:spPr>
+        <p:txBody>
+          <a:bodyPr wrap="square" lIns="0" tIns="0" rIns="0" bIns="0" rtlCol="0" anchor="ctr"/>
+          <a:lstStyle/>
+          <a:p>
+            <a:pPr algn="ctr" indent="0" marL="0">
+              <a:buNone/>
+            </a:pPr>
+            <a:r>
+              <a:rPr lang="en-US" sz="420" b="1" dirty="0">
+                <a:solidFill>
+                  <a:srgbClr val="202124"/>
+                </a:solidFill>
+                <a:latin typeface="Arial" pitchFamily="34" charset="0"/>
+                <a:ea typeface="Arial" pitchFamily="34" charset="-122"/>
+                <a:cs typeface="Arial" pitchFamily="34" charset="-120"/>
+              </a:rPr>
+              <a:t>SET LOCAL current_tenant</a:t>
+            </a:r>
+            <a:endParaRPr lang="en-US" sz="420" dirty="0"/>
+          </a:p>
+        </p:txBody>
+      </p:sp>
+      <p:sp>
+        <p:nvSpPr>
+          <p:cNvPr id="150" name="Text 128"/>
+          <p:cNvSpPr/>
+          <p:nvPr/>
+        </p:nvSpPr>
+        <p:spPr>
+          <a:xfrm>
+            <a:off x="7295998" y="4659782"/>
+            <a:ext cx="542239" cy="114300"/>
+          </a:xfrm>
+          <a:prstGeom prst="roundRect">
+            <a:avLst>
+              <a:gd name="adj" fmla="val 24000"/>
+            </a:avLst>
+          </a:prstGeom>
+          <a:solidFill>
+            <a:srgbClr val="FFFFFF"/>
+          </a:solidFill>
+          <a:ln w="5080">
+            <a:solidFill>
+              <a:srgbClr val="DADCE0"/>
+            </a:solidFill>
+          </a:ln>
+        </p:spPr>
+        <p:txBody>
+          <a:bodyPr wrap="square" lIns="0" tIns="0" rIns="0" bIns="0" rtlCol="0" anchor="ctr"/>
+          <a:lstStyle/>
+          <a:p>
+            <a:pPr algn="ctr" indent="0" marL="0">
+              <a:buNone/>
+            </a:pPr>
+            <a:r>
+              <a:rPr lang="en-US" sz="420" b="1" dirty="0">
+                <a:solidFill>
+                  <a:srgbClr val="202124"/>
+                </a:solidFill>
+                <a:latin typeface="Arial" pitchFamily="34" charset="0"/>
+                <a:ea typeface="Arial" pitchFamily="34" charset="-122"/>
+                <a:cs typeface="Arial" pitchFamily="34" charset="-120"/>
+              </a:rPr>
+              <a:t>Air-Gapped Silo RAG</a:t>
+            </a:r>
+            <a:endParaRPr lang="en-US" sz="420" dirty="0"/>
+          </a:p>
+        </p:txBody>
+      </p:sp>
+      <p:sp>
+        <p:nvSpPr>
+          <p:cNvPr id="151" name="Text 129"/>
+          <p:cNvSpPr/>
+          <p:nvPr/>
+        </p:nvSpPr>
+        <p:spPr>
+          <a:xfrm>
+            <a:off x="7184441" y="5206594"/>
+            <a:ext cx="764438" cy="114300"/>
+          </a:xfrm>
+          <a:prstGeom prst="roundRect">
+            <a:avLst>
+              <a:gd name="adj" fmla="val 24000"/>
+            </a:avLst>
+          </a:prstGeom>
+          <a:solidFill>
+            <a:srgbClr val="FFFFFF"/>
+          </a:solidFill>
+          <a:ln w="5080">
+            <a:solidFill>
+              <a:srgbClr val="DADCE0"/>
+            </a:solidFill>
+          </a:ln>
+        </p:spPr>
+        <p:txBody>
+          <a:bodyPr wrap="square" lIns="0" tIns="0" rIns="0" bIns="0" rtlCol="0" anchor="ctr"/>
+          <a:lstStyle/>
+          <a:p>
+            <a:pPr algn="ctr" indent="0" marL="0">
+              <a:buNone/>
+            </a:pPr>
+            <a:r>
+              <a:rPr lang="en-US" sz="420" b="1" dirty="0">
+                <a:solidFill>
+                  <a:srgbClr val="202124"/>
+                </a:solidFill>
+                <a:latin typeface="Arial" pitchFamily="34" charset="0"/>
+                <a:ea typeface="Arial" pitchFamily="34" charset="-122"/>
+                <a:cs typeface="Arial" pitchFamily="34" charset="-120"/>
+              </a:rPr>
+              <a:t>CMEK-Encrypted State &amp; Tools</a:t>
+            </a:r>
+            <a:endParaRPr lang="en-US" sz="420" dirty="0"/>
+          </a:p>
+        </p:txBody>
+      </p:sp>
+      <p:sp>
+        <p:nvSpPr>
+          <p:cNvPr id="152" name="Text 130"/>
+          <p:cNvSpPr/>
+          <p:nvPr/>
+        </p:nvSpPr>
+        <p:spPr>
+          <a:xfrm>
+            <a:off x="4423867" y="5337353"/>
+            <a:ext cx="517550" cy="114300"/>
+          </a:xfrm>
+          <a:prstGeom prst="roundRect">
+            <a:avLst>
+              <a:gd name="adj" fmla="val 24000"/>
+            </a:avLst>
+          </a:prstGeom>
+          <a:solidFill>
+            <a:srgbClr val="FFFFFF"/>
+          </a:solidFill>
+          <a:ln w="5080">
+            <a:solidFill>
+              <a:srgbClr val="DADCE0"/>
+            </a:solidFill>
+          </a:ln>
+        </p:spPr>
+        <p:txBody>
+          <a:bodyPr wrap="square" lIns="0" tIns="0" rIns="0" bIns="0" rtlCol="0" anchor="ctr"/>
+          <a:lstStyle/>
+          <a:p>
+            <a:pPr algn="ctr" indent="0" marL="0">
+              <a:buNone/>
+            </a:pPr>
+            <a:r>
+              <a:rPr lang="en-US" sz="420" b="1" dirty="0">
+                <a:solidFill>
+                  <a:srgbClr val="202124"/>
+                </a:solidFill>
+                <a:latin typeface="Arial" pitchFamily="34" charset="0"/>
+                <a:ea typeface="Arial" pitchFamily="34" charset="-122"/>
+                <a:cs typeface="Arial" pitchFamily="34" charset="-120"/>
+              </a:rPr>
+              <a:t>Generates response</a:t>
+            </a:r>
+            <a:endParaRPr lang="en-US" sz="420" dirty="0"/>
+          </a:p>
+        </p:txBody>
+      </p:sp>
+      <p:sp>
+        <p:nvSpPr>
+          <p:cNvPr id="153" name="Text 131"/>
+          <p:cNvSpPr/>
+          <p:nvPr/>
+        </p:nvSpPr>
+        <p:spPr>
+          <a:xfrm>
+            <a:off x="6326734" y="3397910"/>
+            <a:ext cx="786384" cy="114300"/>
+          </a:xfrm>
+          <a:prstGeom prst="roundRect">
+            <a:avLst>
+              <a:gd name="adj" fmla="val 24000"/>
+            </a:avLst>
+          </a:prstGeom>
+          <a:solidFill>
+            <a:srgbClr val="FFFFFF"/>
+          </a:solidFill>
+          <a:ln w="5080">
+            <a:solidFill>
+              <a:srgbClr val="DADCE0"/>
+            </a:solidFill>
+          </a:ln>
+        </p:spPr>
+        <p:txBody>
+          <a:bodyPr wrap="square" lIns="0" tIns="0" rIns="0" bIns="0" rtlCol="0" anchor="ctr"/>
+          <a:lstStyle/>
+          <a:p>
+            <a:pPr algn="ctr" indent="0" marL="0">
+              <a:buNone/>
+            </a:pPr>
+            <a:r>
+              <a:rPr lang="en-US" sz="420" b="1" dirty="0">
+                <a:solidFill>
+                  <a:srgbClr val="202124"/>
+                </a:solidFill>
+                <a:latin typeface="Arial" pitchFamily="34" charset="0"/>
+                <a:ea typeface="Arial" pitchFamily="34" charset="-122"/>
+                <a:cs typeface="Arial" pitchFamily="34" charset="-120"/>
+              </a:rPr>
+              <a:t>Sanitized response with SDP redaction</a:t>
+            </a:r>
+            <a:endParaRPr lang="en-US" sz="420" dirty="0"/>
+          </a:p>
+        </p:txBody>
+      </p:sp>
+      <p:sp>
+        <p:nvSpPr>
+          <p:cNvPr id="154" name="Text 132"/>
+          <p:cNvSpPr/>
+          <p:nvPr/>
+        </p:nvSpPr>
+        <p:spPr>
+          <a:xfrm>
+            <a:off x="5338267" y="3397910"/>
+            <a:ext cx="786384" cy="114300"/>
+          </a:xfrm>
+          <a:prstGeom prst="roundRect">
+            <a:avLst>
+              <a:gd name="adj" fmla="val 24000"/>
+            </a:avLst>
+          </a:prstGeom>
+          <a:solidFill>
+            <a:srgbClr val="FFFFFF"/>
+          </a:solidFill>
+          <a:ln w="5080">
+            <a:solidFill>
+              <a:srgbClr val="DADCE0"/>
+            </a:solidFill>
+          </a:ln>
+        </p:spPr>
+        <p:txBody>
+          <a:bodyPr wrap="square" lIns="0" tIns="0" rIns="0" bIns="0" rtlCol="0" anchor="ctr"/>
+          <a:lstStyle/>
+          <a:p>
+            <a:pPr algn="ctr" indent="0" marL="0">
+              <a:buNone/>
+            </a:pPr>
+            <a:r>
+              <a:rPr lang="en-US" sz="420" b="1" dirty="0">
+                <a:solidFill>
+                  <a:srgbClr val="202124"/>
+                </a:solidFill>
+                <a:latin typeface="Arial" pitchFamily="34" charset="0"/>
+                <a:ea typeface="Arial" pitchFamily="34" charset="-122"/>
+                <a:cs typeface="Arial" pitchFamily="34" charset="-120"/>
+              </a:rPr>
+              <a:t>Route by tenant tier (Pool, Silo or PSC)</a:t>
+            </a:r>
+            <a:endParaRPr lang="en-US" sz="420" dirty="0"/>
+          </a:p>
+        </p:txBody>
+      </p:sp>
+      <p:sp>
+        <p:nvSpPr>
+          <p:cNvPr id="155" name="Text 133"/>
+          <p:cNvSpPr/>
+          <p:nvPr/>
+        </p:nvSpPr>
+        <p:spPr>
+          <a:xfrm>
+            <a:off x="4964278" y="2980944"/>
+            <a:ext cx="640994" cy="114300"/>
+          </a:xfrm>
+          <a:prstGeom prst="roundRect">
+            <a:avLst>
+              <a:gd name="adj" fmla="val 24000"/>
+            </a:avLst>
+          </a:prstGeom>
+          <a:solidFill>
+            <a:srgbClr val="FFFFFF"/>
+          </a:solidFill>
+          <a:ln w="5080">
+            <a:solidFill>
+              <a:srgbClr val="DADCE0"/>
+            </a:solidFill>
+          </a:ln>
+        </p:spPr>
+        <p:txBody>
+          <a:bodyPr wrap="square" lIns="0" tIns="0" rIns="0" bIns="0" rtlCol="0" anchor="ctr"/>
+          <a:lstStyle/>
+          <a:p>
+            <a:pPr algn="ctr" indent="0" marL="0">
+              <a:buNone/>
+            </a:pPr>
+            <a:r>
+              <a:rPr lang="en-US" sz="420" b="1" dirty="0">
+                <a:solidFill>
+                  <a:srgbClr val="202124"/>
+                </a:solidFill>
+                <a:latin typeface="Arial" pitchFamily="34" charset="0"/>
+                <a:ea typeface="Arial" pitchFamily="34" charset="-122"/>
+                <a:cs typeface="Arial" pitchFamily="34" charset="-120"/>
+              </a:rPr>
+              <a:t>OBO + DPoP verification</a:t>
+            </a:r>
+            <a:endParaRPr lang="en-US" sz="420" dirty="0"/>
+          </a:p>
+        </p:txBody>
+      </p:sp>
+      <p:sp>
+        <p:nvSpPr>
+          <p:cNvPr id="156" name="Text 134"/>
+          <p:cNvSpPr/>
+          <p:nvPr/>
+        </p:nvSpPr>
+        <p:spPr>
+          <a:xfrm>
+            <a:off x="4448556" y="4445813"/>
+            <a:ext cx="468173" cy="114300"/>
+          </a:xfrm>
+          <a:prstGeom prst="roundRect">
+            <a:avLst>
+              <a:gd name="adj" fmla="val 24000"/>
+            </a:avLst>
+          </a:prstGeom>
+          <a:solidFill>
+            <a:srgbClr val="FFFFFF"/>
+          </a:solidFill>
+          <a:ln w="5080">
+            <a:solidFill>
+              <a:srgbClr val="DADCE0"/>
+            </a:solidFill>
+          </a:ln>
+        </p:spPr>
+        <p:txBody>
+          <a:bodyPr wrap="square" lIns="0" tIns="0" rIns="0" bIns="0" rtlCol="0" anchor="ctr"/>
+          <a:lstStyle/>
+          <a:p>
+            <a:pPr algn="ctr" indent="0" marL="0">
+              <a:buNone/>
+            </a:pPr>
+            <a:r>
+              <a:rPr lang="en-US" sz="420" b="1" dirty="0">
+                <a:solidFill>
+                  <a:srgbClr val="202124"/>
+                </a:solidFill>
+                <a:latin typeface="Arial" pitchFamily="34" charset="0"/>
+                <a:ea typeface="Arial" pitchFamily="34" charset="-122"/>
+                <a:cs typeface="Arial" pitchFamily="34" charset="-120"/>
+              </a:rPr>
+              <a:t>Sanitize request</a:t>
+            </a:r>
+            <a:endParaRPr lang="en-US" sz="420" dirty="0"/>
+          </a:p>
+        </p:txBody>
+      </p:sp>
+      <p:sp>
+        <p:nvSpPr>
+          <p:cNvPr id="157" name="Text 135"/>
+          <p:cNvSpPr/>
+          <p:nvPr/>
+        </p:nvSpPr>
+        <p:spPr>
+          <a:xfrm>
+            <a:off x="4436669" y="4625950"/>
+            <a:ext cx="492862" cy="114300"/>
+          </a:xfrm>
+          <a:prstGeom prst="roundRect">
+            <a:avLst>
+              <a:gd name="adj" fmla="val 24000"/>
+            </a:avLst>
+          </a:prstGeom>
+          <a:solidFill>
+            <a:srgbClr val="FFFFFF"/>
+          </a:solidFill>
+          <a:ln w="5080">
+            <a:solidFill>
+              <a:srgbClr val="DADCE0"/>
+            </a:solidFill>
+          </a:ln>
+        </p:spPr>
+        <p:txBody>
+          <a:bodyPr wrap="square" lIns="0" tIns="0" rIns="0" bIns="0" rtlCol="0" anchor="ctr"/>
+          <a:lstStyle/>
+          <a:p>
+            <a:pPr algn="ctr" indent="0" marL="0">
+              <a:buNone/>
+            </a:pPr>
+            <a:r>
+              <a:rPr lang="en-US" sz="420" b="1" dirty="0">
+                <a:solidFill>
+                  <a:srgbClr val="202124"/>
+                </a:solidFill>
+                <a:latin typeface="Arial" pitchFamily="34" charset="0"/>
+                <a:ea typeface="Arial" pitchFamily="34" charset="-122"/>
+                <a:cs typeface="Arial" pitchFamily="34" charset="-120"/>
+              </a:rPr>
+              <a:t>Sanitize response</a:t>
+            </a:r>
+            <a:endParaRPr lang="en-US" sz="420" dirty="0"/>
+          </a:p>
+        </p:txBody>
+      </p:sp>
+      <p:sp>
+        <p:nvSpPr>
+          <p:cNvPr id="158" name="Text 136"/>
+          <p:cNvSpPr/>
+          <p:nvPr/>
+        </p:nvSpPr>
+        <p:spPr>
+          <a:xfrm>
+            <a:off x="4888382" y="2299716"/>
+            <a:ext cx="591617" cy="114300"/>
+          </a:xfrm>
+          <a:prstGeom prst="roundRect">
+            <a:avLst>
+              <a:gd name="adj" fmla="val 24000"/>
+            </a:avLst>
+          </a:prstGeom>
+          <a:solidFill>
+            <a:srgbClr val="FFFFFF"/>
+          </a:solidFill>
+          <a:ln w="5080">
+            <a:solidFill>
+              <a:srgbClr val="DADCE0"/>
+            </a:solidFill>
+          </a:ln>
+        </p:spPr>
+        <p:txBody>
+          <a:bodyPr wrap="square" lIns="0" tIns="0" rIns="0" bIns="0" rtlCol="0" anchor="ctr"/>
+          <a:lstStyle/>
+          <a:p>
+            <a:pPr algn="ctr" indent="0" marL="0">
+              <a:buNone/>
+            </a:pPr>
+            <a:r>
+              <a:rPr lang="en-US" sz="420" b="1" dirty="0">
+                <a:solidFill>
+                  <a:srgbClr val="202124"/>
+                </a:solidFill>
+                <a:latin typeface="Arial" pitchFamily="34" charset="0"/>
+                <a:ea typeface="Arial" pitchFamily="34" charset="-122"/>
+                <a:cs typeface="Arial" pitchFamily="34" charset="-120"/>
+              </a:rPr>
+              <a:t>Header &amp; WAF policies</a:t>
+            </a:r>
+            <a:endParaRPr lang="en-US" sz="420" dirty="0"/>
+          </a:p>
+        </p:txBody>
+      </p:sp>
+      <p:sp>
+        <p:nvSpPr>
+          <p:cNvPr id="159" name="Text 137"/>
+          <p:cNvSpPr/>
+          <p:nvPr/>
+        </p:nvSpPr>
+        <p:spPr>
+          <a:xfrm>
+            <a:off x="4963363" y="2816352"/>
+            <a:ext cx="443484" cy="114300"/>
+          </a:xfrm>
+          <a:prstGeom prst="roundRect">
+            <a:avLst>
+              <a:gd name="adj" fmla="val 24000"/>
+            </a:avLst>
+          </a:prstGeom>
+          <a:solidFill>
+            <a:srgbClr val="FFFFFF"/>
+          </a:solidFill>
+          <a:ln w="5080">
+            <a:solidFill>
+              <a:srgbClr val="DADCE0"/>
+            </a:solidFill>
+          </a:ln>
+        </p:spPr>
+        <p:txBody>
+          <a:bodyPr wrap="square" lIns="0" tIns="0" rIns="0" bIns="0" rtlCol="0" anchor="ctr"/>
+          <a:lstStyle/>
+          <a:p>
+            <a:pPr algn="ctr" indent="0" marL="0">
+              <a:buNone/>
+            </a:pPr>
+            <a:r>
+              <a:rPr lang="en-US" sz="420" b="1" dirty="0">
+                <a:solidFill>
+                  <a:srgbClr val="202124"/>
+                </a:solidFill>
+                <a:latin typeface="Arial" pitchFamily="34" charset="0"/>
+                <a:ea typeface="Arial" pitchFamily="34" charset="-122"/>
+                <a:cs typeface="Arial" pitchFamily="34" charset="-120"/>
+              </a:rPr>
+              <a:t>Sanitize prompt</a:t>
+            </a:r>
+            <a:endParaRPr lang="en-US" sz="420" dirty="0"/>
+          </a:p>
+        </p:txBody>
+      </p:sp>
+      <p:sp>
+        <p:nvSpPr>
+          <p:cNvPr id="160" name="Text 138"/>
+          <p:cNvSpPr/>
+          <p:nvPr/>
+        </p:nvSpPr>
+        <p:spPr>
+          <a:xfrm>
+            <a:off x="6238951" y="1463954"/>
+            <a:ext cx="347472" cy="114300"/>
+          </a:xfrm>
+          <a:prstGeom prst="roundRect">
+            <a:avLst>
+              <a:gd name="adj" fmla="val 24000"/>
+            </a:avLst>
+          </a:prstGeom>
+          <a:solidFill>
+            <a:srgbClr val="FFFFFF"/>
+          </a:solidFill>
+          <a:ln w="5080">
+            <a:solidFill>
+              <a:srgbClr val="DADCE0"/>
+            </a:solidFill>
+          </a:ln>
+        </p:spPr>
+        <p:txBody>
+          <a:bodyPr wrap="square" lIns="0" tIns="0" rIns="0" bIns="0" rtlCol="0" anchor="ctr"/>
+          <a:lstStyle/>
+          <a:p>
+            <a:pPr algn="ctr" indent="0" marL="0">
+              <a:buNone/>
+            </a:pPr>
+            <a:r>
+              <a:rPr lang="en-US" sz="420" b="1" dirty="0">
+                <a:solidFill>
+                  <a:srgbClr val="202124"/>
+                </a:solidFill>
+                <a:latin typeface="Arial" pitchFamily="34" charset="0"/>
+                <a:ea typeface="Arial" pitchFamily="34" charset="-122"/>
+                <a:cs typeface="Arial" pitchFamily="34" charset="-120"/>
+              </a:rPr>
+              <a:t>Response</a:t>
+            </a:r>
+            <a:endParaRPr lang="en-US" sz="420" dirty="0"/>
+          </a:p>
+        </p:txBody>
+      </p:sp>
+      <p:sp>
+        <p:nvSpPr>
+          <p:cNvPr id="161" name="Text 139"/>
+          <p:cNvSpPr/>
+          <p:nvPr/>
+        </p:nvSpPr>
+        <p:spPr>
+          <a:xfrm>
+            <a:off x="6238951" y="2823667"/>
+            <a:ext cx="347472" cy="114300"/>
+          </a:xfrm>
+          <a:prstGeom prst="roundRect">
+            <a:avLst>
+              <a:gd name="adj" fmla="val 24000"/>
+            </a:avLst>
+          </a:prstGeom>
+          <a:solidFill>
+            <a:srgbClr val="FFFFFF"/>
+          </a:solidFill>
+          <a:ln w="5080">
+            <a:solidFill>
+              <a:srgbClr val="DADCE0"/>
+            </a:solidFill>
+          </a:ln>
+        </p:spPr>
+        <p:txBody>
+          <a:bodyPr wrap="square" lIns="0" tIns="0" rIns="0" bIns="0" rtlCol="0" anchor="ctr"/>
+          <a:lstStyle/>
+          <a:p>
+            <a:pPr algn="ctr" indent="0" marL="0">
+              <a:buNone/>
+            </a:pPr>
+            <a:r>
+              <a:rPr lang="en-US" sz="420" b="1" dirty="0">
+                <a:solidFill>
+                  <a:srgbClr val="202124"/>
+                </a:solidFill>
+                <a:latin typeface="Arial" pitchFamily="34" charset="0"/>
+                <a:ea typeface="Arial" pitchFamily="34" charset="-122"/>
+                <a:cs typeface="Arial" pitchFamily="34" charset="-120"/>
+              </a:rPr>
+              <a:t>Response</a:t>
+            </a:r>
+            <a:endParaRPr lang="en-US" sz="420" dirty="0"/>
+          </a:p>
+        </p:txBody>
+      </p:sp>
+      <p:sp>
+        <p:nvSpPr>
+          <p:cNvPr id="162" name="Text 140"/>
+          <p:cNvSpPr/>
+          <p:nvPr/>
+        </p:nvSpPr>
+        <p:spPr>
+          <a:xfrm>
+            <a:off x="5531206" y="1463954"/>
+            <a:ext cx="347472" cy="114300"/>
+          </a:xfrm>
+          <a:prstGeom prst="roundRect">
+            <a:avLst>
+              <a:gd name="adj" fmla="val 24000"/>
+            </a:avLst>
+          </a:prstGeom>
+          <a:solidFill>
+            <a:srgbClr val="FFFFFF"/>
+          </a:solidFill>
+          <a:ln w="5080">
+            <a:solidFill>
+              <a:srgbClr val="DADCE0"/>
+            </a:solidFill>
+          </a:ln>
+        </p:spPr>
+        <p:txBody>
+          <a:bodyPr wrap="square" lIns="0" tIns="0" rIns="0" bIns="0" rtlCol="0" anchor="ctr"/>
+          <a:lstStyle/>
+          <a:p>
+            <a:pPr algn="ctr" indent="0" marL="0">
+              <a:buNone/>
+            </a:pPr>
+            <a:r>
+              <a:rPr lang="en-US" sz="420" b="1" dirty="0">
+                <a:solidFill>
+                  <a:srgbClr val="202124"/>
+                </a:solidFill>
+                <a:latin typeface="Arial" pitchFamily="34" charset="0"/>
+                <a:ea typeface="Arial" pitchFamily="34" charset="-122"/>
+                <a:cs typeface="Arial" pitchFamily="34" charset="-120"/>
+              </a:rPr>
+              <a:t>Request</a:t>
+            </a:r>
+            <a:endParaRPr lang="en-US" sz="420" dirty="0"/>
+          </a:p>
+        </p:txBody>
+      </p:sp>
+      <p:sp>
+        <p:nvSpPr>
+          <p:cNvPr id="163" name="Text 141"/>
+          <p:cNvSpPr/>
+          <p:nvPr/>
+        </p:nvSpPr>
+        <p:spPr>
+          <a:xfrm>
+            <a:off x="5531206" y="2823667"/>
+            <a:ext cx="347472" cy="114300"/>
+          </a:xfrm>
+          <a:prstGeom prst="roundRect">
+            <a:avLst>
+              <a:gd name="adj" fmla="val 24000"/>
+            </a:avLst>
+          </a:prstGeom>
+          <a:solidFill>
+            <a:srgbClr val="FFFFFF"/>
+          </a:solidFill>
+          <a:ln w="5080">
+            <a:solidFill>
+              <a:srgbClr val="DADCE0"/>
+            </a:solidFill>
+          </a:ln>
+        </p:spPr>
+        <p:txBody>
+          <a:bodyPr wrap="square" lIns="0" tIns="0" rIns="0" bIns="0" rtlCol="0" anchor="ctr"/>
+          <a:lstStyle/>
+          <a:p>
+            <a:pPr algn="ctr" indent="0" marL="0">
+              <a:buNone/>
+            </a:pPr>
+            <a:r>
+              <a:rPr lang="en-US" sz="420" b="1" dirty="0">
+                <a:solidFill>
+                  <a:srgbClr val="202124"/>
+                </a:solidFill>
+                <a:latin typeface="Arial" pitchFamily="34" charset="0"/>
+                <a:ea typeface="Arial" pitchFamily="34" charset="-122"/>
+                <a:cs typeface="Arial" pitchFamily="34" charset="-120"/>
+              </a:rPr>
+              <a:t>Request</a:t>
+            </a:r>
+            <a:endParaRPr lang="en-US" sz="420" dirty="0"/>
           </a:p>
         </p:txBody>
       </p:sp>
@@ -7657,8 +7488,8 @@
         </p:nvSpPr>
         <p:spPr>
           <a:xfrm>
-            <a:off x="749808" y="621792"/>
-            <a:ext cx="10680192" cy="219456"/>
+            <a:off x="749808" y="603504"/>
+            <a:ext cx="10680192" cy="201168"/>
           </a:xfrm>
           <a:prstGeom prst="rect">
             <a:avLst/>
@@ -7674,7 +7505,7 @@
               <a:buNone/>
             </a:pPr>
             <a:r>
-              <a:rPr lang="en-US" sz="940" dirty="0">
+              <a:rPr lang="en-US" sz="920" dirty="0">
                 <a:solidFill>
                   <a:srgbClr val="3C4043"/>
                 </a:solidFill>
@@ -7684,7 +7515,7 @@
               </a:rPr>
               <a:t>The architecture consists of the following components:</a:t>
             </a:r>
-            <a:endParaRPr lang="en-US" sz="940" dirty="0"/>
+            <a:endParaRPr lang="en-US" sz="920" dirty="0"/>
           </a:p>
         </p:txBody>
       </p:sp>
@@ -7696,8 +7527,8 @@
         </p:nvSpPr>
         <p:spPr>
           <a:xfrm>
-            <a:off x="749808" y="877824"/>
-            <a:ext cx="2889504" cy="274320"/>
+            <a:off x="749808" y="841248"/>
+            <a:ext cx="2889504" cy="256032"/>
           </a:xfrm>
           <a:prstGeom prst="rect">
             <a:avLst/>
@@ -7721,8 +7552,8 @@
         </p:nvSpPr>
         <p:spPr>
           <a:xfrm>
-            <a:off x="841248" y="877824"/>
-            <a:ext cx="2706624" cy="274320"/>
+            <a:off x="841248" y="841248"/>
+            <a:ext cx="2706624" cy="256032"/>
           </a:xfrm>
           <a:prstGeom prst="rect">
             <a:avLst/>
@@ -7760,8 +7591,8 @@
         </p:nvSpPr>
         <p:spPr>
           <a:xfrm>
-            <a:off x="3639312" y="877824"/>
-            <a:ext cx="7790688" cy="274320"/>
+            <a:off x="3639312" y="841248"/>
+            <a:ext cx="7790688" cy="256032"/>
           </a:xfrm>
           <a:prstGeom prst="rect">
             <a:avLst/>
@@ -7785,8 +7616,8 @@
         </p:nvSpPr>
         <p:spPr>
           <a:xfrm>
-            <a:off x="3749040" y="877824"/>
-            <a:ext cx="7571232" cy="274320"/>
+            <a:off x="3749040" y="841248"/>
+            <a:ext cx="7571232" cy="256032"/>
           </a:xfrm>
           <a:prstGeom prst="rect">
             <a:avLst/>
@@ -7824,8 +7655,8 @@
         </p:nvSpPr>
         <p:spPr>
           <a:xfrm>
-            <a:off x="749808" y="1152144"/>
-            <a:ext cx="2889504" cy="296266"/>
+            <a:off x="749808" y="1097280"/>
+            <a:ext cx="2889504" cy="338328"/>
           </a:xfrm>
           <a:prstGeom prst="rect">
             <a:avLst/>
@@ -7849,8 +7680,8 @@
         </p:nvSpPr>
         <p:spPr>
           <a:xfrm>
-            <a:off x="841248" y="1170432"/>
-            <a:ext cx="2706624" cy="259690"/>
+            <a:off x="841248" y="1115568"/>
+            <a:ext cx="2706624" cy="301752"/>
           </a:xfrm>
           <a:prstGeom prst="rect">
             <a:avLst/>
@@ -7859,14 +7690,16 @@
           <a:ln/>
         </p:spPr>
         <p:txBody>
-          <a:bodyPr wrap="square" rtlCol="0" anchor="ctr"/>
-          <a:lstStyle/>
-          <a:p>
-            <a:pPr indent="0" marL="0">
-              <a:buNone/>
-            </a:pPr>
-            <a:r>
-              <a:rPr lang="en-US" sz="780" b="1" dirty="0">
+          <a:bodyPr wrap="square" rtlCol="0" anchor="ctr">
+            <a:normAutofit/>
+          </a:bodyPr>
+          <a:lstStyle/>
+          <a:p>
+            <a:pPr indent="0" marL="0">
+              <a:buNone/>
+            </a:pPr>
+            <a:r>
+              <a:rPr lang="en-US" sz="750" b="1" dirty="0">
                 <a:solidFill>
                   <a:srgbClr val="202124"/>
                 </a:solidFill>
@@ -7881,7 +7714,7 @@
               <a:buNone/>
             </a:pPr>
             <a:r>
-              <a:rPr lang="en-US" sz="670" dirty="0">
+              <a:rPr lang="en-US" sz="650" dirty="0">
                 <a:solidFill>
                   <a:srgbClr val="5F6368"/>
                 </a:solidFill>
@@ -7889,9 +7722,9 @@
                 <a:ea typeface="Arial" pitchFamily="34" charset="-122"/>
                 <a:cs typeface="Arial" pitchFamily="34" charset="-120"/>
               </a:rPr>
-              <a:t>Outer security and governance boundary that prevents unauthorized data exfiltration.</a:t>
-            </a:r>
-            <a:endParaRPr lang="en-US" sz="780" dirty="0"/>
+              <a:t>Outer security and governance boundary that prevents unauthorized data.</a:t>
+            </a:r>
+            <a:endParaRPr lang="en-US" sz="750" dirty="0"/>
           </a:p>
         </p:txBody>
       </p:sp>
@@ -7903,8 +7736,8 @@
         </p:nvSpPr>
         <p:spPr>
           <a:xfrm>
-            <a:off x="3639312" y="1152144"/>
-            <a:ext cx="7790688" cy="296266"/>
+            <a:off x="3639312" y="1097280"/>
+            <a:ext cx="7790688" cy="338328"/>
           </a:xfrm>
           <a:prstGeom prst="rect">
             <a:avLst/>
@@ -7928,8 +7761,8 @@
         </p:nvSpPr>
         <p:spPr>
           <a:xfrm>
-            <a:off x="3749040" y="1170432"/>
-            <a:ext cx="7571232" cy="259690"/>
+            <a:off x="3749040" y="1115568"/>
+            <a:ext cx="7571232" cy="301752"/>
           </a:xfrm>
           <a:prstGeom prst="rect">
             <a:avLst/>
@@ -7938,14 +7771,19 @@
           <a:ln/>
         </p:spPr>
         <p:txBody>
-          <a:bodyPr wrap="square" rtlCol="0" anchor="ctr"/>
-          <a:lstStyle/>
-          <a:p>
-            <a:pPr indent="0" marL="0">
-              <a:buNone/>
-            </a:pPr>
-            <a:r>
-              <a:rPr lang="en-US" sz="720" b="1" dirty="0">
+          <a:bodyPr wrap="square" rtlCol="0" anchor="ctr">
+            <a:normAutofit/>
+          </a:bodyPr>
+          <a:lstStyle/>
+          <a:p>
+            <a:pPr indent="0" marL="0">
+              <a:lnSpc>
+                <a:spcPct val="102000"/>
+              </a:lnSpc>
+              <a:buNone/>
+            </a:pPr>
+            <a:r>
+              <a:rPr lang="en-US" sz="690" b="1" dirty="0">
                 <a:solidFill>
                   <a:srgbClr val="202124"/>
                 </a:solidFill>
@@ -7956,10 +7794,13 @@
               <a:t>• Shared Control Plane &amp; Multi-Tenant Governance Perimeter: </a:t>
             </a:r>
             <a:pPr indent="0" marL="0">
-              <a:buNone/>
-            </a:pPr>
-            <a:r>
-              <a:rPr lang="en-US" sz="700" dirty="0">
+              <a:lnSpc>
+                <a:spcPct val="102000"/>
+              </a:lnSpc>
+              <a:buNone/>
+            </a:pPr>
+            <a:r>
+              <a:rPr lang="en-US" sz="670" dirty="0">
                 <a:solidFill>
                   <a:srgbClr val="3C4043"/>
                 </a:solidFill>
@@ -7969,7 +7810,7 @@
               </a:rPr>
               <a:t>Enforces VPC Service Controls service perimeters around hub and spoke projects to block unauthorized cross-perimeter data movement.</a:t>
             </a:r>
-            <a:endParaRPr lang="en-US" sz="720" dirty="0"/>
+            <a:endParaRPr lang="en-US" sz="690" dirty="0"/>
           </a:p>
         </p:txBody>
       </p:sp>
@@ -7981,8 +7822,8 @@
         </p:nvSpPr>
         <p:spPr>
           <a:xfrm>
-            <a:off x="749808" y="1448410"/>
-            <a:ext cx="2889504" cy="786384"/>
+            <a:off x="749808" y="1435608"/>
+            <a:ext cx="2889504" cy="822960"/>
           </a:xfrm>
           <a:prstGeom prst="rect">
             <a:avLst/>
@@ -8006,8 +7847,8 @@
         </p:nvSpPr>
         <p:spPr>
           <a:xfrm>
-            <a:off x="841248" y="1466698"/>
-            <a:ext cx="2706624" cy="749808"/>
+            <a:off x="841248" y="1453896"/>
+            <a:ext cx="2706624" cy="786384"/>
           </a:xfrm>
           <a:prstGeom prst="rect">
             <a:avLst/>
@@ -8016,14 +7857,16 @@
           <a:ln/>
         </p:spPr>
         <p:txBody>
-          <a:bodyPr wrap="square" rtlCol="0" anchor="ctr"/>
-          <a:lstStyle/>
-          <a:p>
-            <a:pPr indent="0" marL="0">
-              <a:buNone/>
-            </a:pPr>
-            <a:r>
-              <a:rPr lang="en-US" sz="780" b="1" dirty="0">
+          <a:bodyPr wrap="square" rtlCol="0" anchor="ctr">
+            <a:normAutofit/>
+          </a:bodyPr>
+          <a:lstStyle/>
+          <a:p>
+            <a:pPr indent="0" marL="0">
+              <a:buNone/>
+            </a:pPr>
+            <a:r>
+              <a:rPr lang="en-US" sz="750" b="1" dirty="0">
                 <a:solidFill>
                   <a:srgbClr val="202124"/>
                 </a:solidFill>
@@ -8038,7 +7881,7 @@
               <a:buNone/>
             </a:pPr>
             <a:r>
-              <a:rPr lang="en-US" sz="670" dirty="0">
+              <a:rPr lang="en-US" sz="650" dirty="0">
                 <a:solidFill>
                   <a:srgbClr val="5F6368"/>
                 </a:solidFill>
@@ -8048,7 +7891,7 @@
               </a:rPr>
               <a:t>Centralized ingress and control plane managing edge security, identity verification, and request routing.</a:t>
             </a:r>
-            <a:endParaRPr lang="en-US" sz="780" dirty="0"/>
+            <a:endParaRPr lang="en-US" sz="750" dirty="0"/>
           </a:p>
         </p:txBody>
       </p:sp>
@@ -8060,8 +7903,8 @@
         </p:nvSpPr>
         <p:spPr>
           <a:xfrm>
-            <a:off x="3639312" y="1448410"/>
-            <a:ext cx="7790688" cy="786384"/>
+            <a:off x="3639312" y="1435608"/>
+            <a:ext cx="7790688" cy="822960"/>
           </a:xfrm>
           <a:prstGeom prst="rect">
             <a:avLst/>
@@ -8085,8 +7928,8 @@
         </p:nvSpPr>
         <p:spPr>
           <a:xfrm>
-            <a:off x="3749040" y="1466698"/>
-            <a:ext cx="7571232" cy="749808"/>
+            <a:off x="3749040" y="1453896"/>
+            <a:ext cx="7571232" cy="786384"/>
           </a:xfrm>
           <a:prstGeom prst="rect">
             <a:avLst/>
@@ -8095,14 +7938,19 @@
           <a:ln/>
         </p:spPr>
         <p:txBody>
-          <a:bodyPr wrap="square" rtlCol="0" anchor="ctr"/>
-          <a:lstStyle/>
-          <a:p>
-            <a:pPr indent="0" marL="0">
-              <a:buNone/>
-            </a:pPr>
-            <a:r>
-              <a:rPr lang="en-US" sz="720" b="1" dirty="0">
+          <a:bodyPr wrap="square" rtlCol="0" anchor="ctr">
+            <a:normAutofit/>
+          </a:bodyPr>
+          <a:lstStyle/>
+          <a:p>
+            <a:pPr indent="0" marL="0">
+              <a:lnSpc>
+                <a:spcPct val="102000"/>
+              </a:lnSpc>
+              <a:buNone/>
+            </a:pPr>
+            <a:r>
+              <a:rPr lang="en-US" sz="690" b="1" dirty="0">
                 <a:solidFill>
                   <a:srgbClr val="202124"/>
                 </a:solidFill>
@@ -8113,10 +7961,13 @@
               <a:t>• External Application Load Balancer: </a:t>
             </a:r>
             <a:pPr indent="0" marL="0">
-              <a:buNone/>
-            </a:pPr>
-            <a:r>
-              <a:rPr lang="en-US" sz="700" dirty="0">
+              <a:lnSpc>
+                <a:spcPct val="102000"/>
+              </a:lnSpc>
+              <a:buNone/>
+            </a:pPr>
+            <a:r>
+              <a:rPr lang="en-US" sz="670" dirty="0">
                 <a:solidFill>
                   <a:srgbClr val="3C4043"/>
                 </a:solidFill>
@@ -8128,24 +7979,30 @@
 </a:t>
             </a:r>
             <a:pPr indent="0" marL="0">
-              <a:buNone/>
-            </a:pPr>
-            <a:r>
-              <a:rPr lang="en-US" sz="720" b="1" dirty="0">
-                <a:solidFill>
-                  <a:srgbClr val="202124"/>
-                </a:solidFill>
-                <a:latin typeface="Arial" pitchFamily="34" charset="0"/>
-                <a:ea typeface="Arial" pitchFamily="34" charset="-122"/>
-                <a:cs typeface="Arial" pitchFamily="34" charset="-120"/>
-              </a:rPr>
-              <a:t>• Cloud Armor &amp; IAP &amp; RFC 8693 OBO + DPoP: </a:t>
-            </a:r>
-            <a:pPr indent="0" marL="0">
-              <a:buNone/>
-            </a:pPr>
-            <a:r>
-              <a:rPr lang="en-US" sz="700" dirty="0">
+              <a:lnSpc>
+                <a:spcPct val="102000"/>
+              </a:lnSpc>
+              <a:buNone/>
+            </a:pPr>
+            <a:r>
+              <a:rPr lang="en-US" sz="690" b="1" dirty="0">
+                <a:solidFill>
+                  <a:srgbClr val="202124"/>
+                </a:solidFill>
+                <a:latin typeface="Arial" pitchFamily="34" charset="0"/>
+                <a:ea typeface="Arial" pitchFamily="34" charset="-122"/>
+                <a:cs typeface="Arial" pitchFamily="34" charset="-120"/>
+              </a:rPr>
+              <a:t>• Google Cloud Armor &amp; RFC 8693 OBO + DPoP: </a:t>
+            </a:r>
+            <a:pPr indent="0" marL="0">
+              <a:lnSpc>
+                <a:spcPct val="102000"/>
+              </a:lnSpc>
+              <a:buNone/>
+            </a:pPr>
+            <a:r>
+              <a:rPr lang="en-US" sz="670" dirty="0">
                 <a:solidFill>
                   <a:srgbClr val="3C4043"/>
                 </a:solidFill>
@@ -8157,10 +8014,13 @@
 </a:t>
             </a:r>
             <a:pPr indent="0" marL="0">
-              <a:buNone/>
-            </a:pPr>
-            <a:r>
-              <a:rPr lang="en-US" sz="720" b="1" dirty="0">
+              <a:lnSpc>
+                <a:spcPct val="102000"/>
+              </a:lnSpc>
+              <a:buNone/>
+            </a:pPr>
+            <a:r>
+              <a:rPr lang="en-US" sz="690" b="1" dirty="0">
                 <a:solidFill>
                   <a:srgbClr val="202124"/>
                 </a:solidFill>
@@ -8171,10 +8031,13 @@
               <a:t>• Model Armor: </a:t>
             </a:r>
             <a:pPr indent="0" marL="0">
-              <a:buNone/>
-            </a:pPr>
-            <a:r>
-              <a:rPr lang="en-US" sz="700" dirty="0">
+              <a:lnSpc>
+                <a:spcPct val="102000"/>
+              </a:lnSpc>
+              <a:buNone/>
+            </a:pPr>
+            <a:r>
+              <a:rPr lang="en-US" sz="670" dirty="0">
                 <a:solidFill>
                   <a:srgbClr val="3C4043"/>
                 </a:solidFill>
@@ -8186,10 +8049,13 @@
 </a:t>
             </a:r>
             <a:pPr indent="0" marL="0">
-              <a:buNone/>
-            </a:pPr>
-            <a:r>
-              <a:rPr lang="en-US" sz="720" b="1" dirty="0">
+              <a:lnSpc>
+                <a:spcPct val="102000"/>
+              </a:lnSpc>
+              <a:buNone/>
+            </a:pPr>
+            <a:r>
+              <a:rPr lang="en-US" sz="690" b="1" dirty="0">
                 <a:solidFill>
                   <a:srgbClr val="202124"/>
                 </a:solidFill>
@@ -8200,10 +8066,13 @@
               <a:t>• Cloud Run: </a:t>
             </a:r>
             <a:pPr indent="0" marL="0">
-              <a:buNone/>
-            </a:pPr>
-            <a:r>
-              <a:rPr lang="en-US" sz="700" dirty="0">
+              <a:lnSpc>
+                <a:spcPct val="102000"/>
+              </a:lnSpc>
+              <a:buNone/>
+            </a:pPr>
+            <a:r>
+              <a:rPr lang="en-US" sz="670" dirty="0">
                 <a:solidFill>
                   <a:srgbClr val="3C4043"/>
                 </a:solidFill>
@@ -8213,7 +8082,7 @@
               </a:rPr>
               <a:t>Serverless routing service that validates caller tokens and dispatches requests to the target execution spoke.</a:t>
             </a:r>
-            <a:endParaRPr lang="en-US" sz="720" dirty="0"/>
+            <a:endParaRPr lang="en-US" sz="690" dirty="0"/>
           </a:p>
         </p:txBody>
       </p:sp>
@@ -8225,8 +8094,8 @@
         </p:nvSpPr>
         <p:spPr>
           <a:xfrm>
-            <a:off x="749808" y="2234794"/>
-            <a:ext cx="2889504" cy="615391"/>
+            <a:off x="749808" y="2258568"/>
+            <a:ext cx="2889504" cy="822960"/>
           </a:xfrm>
           <a:prstGeom prst="rect">
             <a:avLst/>
@@ -8250,8 +8119,8 @@
         </p:nvSpPr>
         <p:spPr>
           <a:xfrm>
-            <a:off x="841248" y="2253082"/>
-            <a:ext cx="2706624" cy="578815"/>
+            <a:off x="841248" y="2276856"/>
+            <a:ext cx="2706624" cy="786384"/>
           </a:xfrm>
           <a:prstGeom prst="rect">
             <a:avLst/>
@@ -8260,14 +8129,16 @@
           <a:ln/>
         </p:spPr>
         <p:txBody>
-          <a:bodyPr wrap="square" rtlCol="0" anchor="ctr"/>
-          <a:lstStyle/>
-          <a:p>
-            <a:pPr indent="0" marL="0">
-              <a:buNone/>
-            </a:pPr>
-            <a:r>
-              <a:rPr lang="en-US" sz="780" b="1" dirty="0">
+          <a:bodyPr wrap="square" rtlCol="0" anchor="ctr">
+            <a:normAutofit/>
+          </a:bodyPr>
+          <a:lstStyle/>
+          <a:p>
+            <a:pPr indent="0" marL="0">
+              <a:buNone/>
+            </a:pPr>
+            <a:r>
+              <a:rPr lang="en-US" sz="750" b="1" dirty="0">
                 <a:solidFill>
                   <a:srgbClr val="202124"/>
                 </a:solidFill>
@@ -8282,7 +8153,7 @@
               <a:buNone/>
             </a:pPr>
             <a:r>
-              <a:rPr lang="en-US" sz="670" dirty="0">
+              <a:rPr lang="en-US" sz="650" dirty="0">
                 <a:solidFill>
                   <a:srgbClr val="5F6368"/>
                 </a:solidFill>
@@ -8292,7 +8163,7 @@
               </a:rPr>
               <a:t>Dedicated governance plane providing unified security posture, cryptographic key management, and OpenTelemetry observability.</a:t>
             </a:r>
-            <a:endParaRPr lang="en-US" sz="780" dirty="0"/>
+            <a:endParaRPr lang="en-US" sz="750" dirty="0"/>
           </a:p>
         </p:txBody>
       </p:sp>
@@ -8304,8 +8175,8 @@
         </p:nvSpPr>
         <p:spPr>
           <a:xfrm>
-            <a:off x="3639312" y="2234794"/>
-            <a:ext cx="7790688" cy="615391"/>
+            <a:off x="3639312" y="2258568"/>
+            <a:ext cx="7790688" cy="822960"/>
           </a:xfrm>
           <a:prstGeom prst="rect">
             <a:avLst/>
@@ -8329,8 +8200,8 @@
         </p:nvSpPr>
         <p:spPr>
           <a:xfrm>
-            <a:off x="3749040" y="2253082"/>
-            <a:ext cx="7571232" cy="578815"/>
+            <a:off x="3749040" y="2276856"/>
+            <a:ext cx="7571232" cy="786384"/>
           </a:xfrm>
           <a:prstGeom prst="rect">
             <a:avLst/>
@@ -8339,14 +8210,19 @@
           <a:ln/>
         </p:spPr>
         <p:txBody>
-          <a:bodyPr wrap="square" rtlCol="0" anchor="ctr"/>
-          <a:lstStyle/>
-          <a:p>
-            <a:pPr indent="0" marL="0">
-              <a:buNone/>
-            </a:pPr>
-            <a:r>
-              <a:rPr lang="en-US" sz="720" b="1" dirty="0">
+          <a:bodyPr wrap="square" rtlCol="0" anchor="ctr">
+            <a:normAutofit/>
+          </a:bodyPr>
+          <a:lstStyle/>
+          <a:p>
+            <a:pPr indent="0" marL="0">
+              <a:lnSpc>
+                <a:spcPct val="102000"/>
+              </a:lnSpc>
+              <a:buNone/>
+            </a:pPr>
+            <a:r>
+              <a:rPr lang="en-US" sz="690" b="1" dirty="0">
                 <a:solidFill>
                   <a:srgbClr val="202124"/>
                 </a:solidFill>
@@ -8357,10 +8233,13 @@
               <a:t>• Security Command Center: </a:t>
             </a:r>
             <a:pPr indent="0" marL="0">
-              <a:buNone/>
-            </a:pPr>
-            <a:r>
-              <a:rPr lang="en-US" sz="700" dirty="0">
+              <a:lnSpc>
+                <a:spcPct val="102000"/>
+              </a:lnSpc>
+              <a:buNone/>
+            </a:pPr>
+            <a:r>
+              <a:rPr lang="en-US" sz="670" dirty="0">
                 <a:solidFill>
                   <a:srgbClr val="3C4043"/>
                 </a:solidFill>
@@ -8372,10 +8251,13 @@
 </a:t>
             </a:r>
             <a:pPr indent="0" marL="0">
-              <a:buNone/>
-            </a:pPr>
-            <a:r>
-              <a:rPr lang="en-US" sz="720" b="1" dirty="0">
+              <a:lnSpc>
+                <a:spcPct val="102000"/>
+              </a:lnSpc>
+              <a:buNone/>
+            </a:pPr>
+            <a:r>
+              <a:rPr lang="en-US" sz="690" b="1" dirty="0">
                 <a:solidFill>
                   <a:srgbClr val="202124"/>
                 </a:solidFill>
@@ -8386,10 +8268,13 @@
               <a:t>• Central IAM &amp; PAB: </a:t>
             </a:r>
             <a:pPr indent="0" marL="0">
-              <a:buNone/>
-            </a:pPr>
-            <a:r>
-              <a:rPr lang="en-US" sz="700" dirty="0">
+              <a:lnSpc>
+                <a:spcPct val="102000"/>
+              </a:lnSpc>
+              <a:buNone/>
+            </a:pPr>
+            <a:r>
+              <a:rPr lang="en-US" sz="670" dirty="0">
                 <a:solidFill>
                   <a:srgbClr val="3C4043"/>
                 </a:solidFill>
@@ -8401,10 +8286,13 @@
 </a:t>
             </a:r>
             <a:pPr indent="0" marL="0">
-              <a:buNone/>
-            </a:pPr>
-            <a:r>
-              <a:rPr lang="en-US" sz="720" b="1" dirty="0">
+              <a:lnSpc>
+                <a:spcPct val="102000"/>
+              </a:lnSpc>
+              <a:buNone/>
+            </a:pPr>
+            <a:r>
+              <a:rPr lang="en-US" sz="690" b="1" dirty="0">
                 <a:solidFill>
                   <a:srgbClr val="202124"/>
                 </a:solidFill>
@@ -8415,10 +8303,13 @@
               <a:t>• Cloud Logging &amp; BQ: </a:t>
             </a:r>
             <a:pPr indent="0" marL="0">
-              <a:buNone/>
-            </a:pPr>
-            <a:r>
-              <a:rPr lang="en-US" sz="700" dirty="0">
+              <a:lnSpc>
+                <a:spcPct val="102000"/>
+              </a:lnSpc>
+              <a:buNone/>
+            </a:pPr>
+            <a:r>
+              <a:rPr lang="en-US" sz="670" dirty="0">
                 <a:solidFill>
                   <a:srgbClr val="3C4043"/>
                 </a:solidFill>
@@ -8428,7 +8319,7 @@
               </a:rPr>
               <a:t>Aggregates audit logs, execution traces, and OpenTelemetry FinOps telemetry into BigQuery.</a:t>
             </a:r>
-            <a:endParaRPr lang="en-US" sz="720" dirty="0"/>
+            <a:endParaRPr lang="en-US" sz="690" dirty="0"/>
           </a:p>
         </p:txBody>
       </p:sp>
@@ -8440,8 +8331,8 @@
         </p:nvSpPr>
         <p:spPr>
           <a:xfrm>
-            <a:off x="749808" y="2850185"/>
-            <a:ext cx="2889504" cy="296266"/>
+            <a:off x="749808" y="3081528"/>
+            <a:ext cx="2889504" cy="338328"/>
           </a:xfrm>
           <a:prstGeom prst="rect">
             <a:avLst/>
@@ -8465,8 +8356,8 @@
         </p:nvSpPr>
         <p:spPr>
           <a:xfrm>
-            <a:off x="841248" y="2868473"/>
-            <a:ext cx="2706624" cy="259690"/>
+            <a:off x="841248" y="3099816"/>
+            <a:ext cx="2706624" cy="301752"/>
           </a:xfrm>
           <a:prstGeom prst="rect">
             <a:avLst/>
@@ -8475,14 +8366,16 @@
           <a:ln/>
         </p:spPr>
         <p:txBody>
-          <a:bodyPr wrap="square" rtlCol="0" anchor="ctr"/>
-          <a:lstStyle/>
-          <a:p>
-            <a:pPr indent="0" marL="0">
-              <a:buNone/>
-            </a:pPr>
-            <a:r>
-              <a:rPr lang="en-US" sz="780" b="1" dirty="0">
+          <a:bodyPr wrap="square" rtlCol="0" anchor="ctr">
+            <a:normAutofit/>
+          </a:bodyPr>
+          <a:lstStyle/>
+          <a:p>
+            <a:pPr indent="0" marL="0">
+              <a:buNone/>
+            </a:pPr>
+            <a:r>
+              <a:rPr lang="en-US" sz="750" b="1" dirty="0">
                 <a:solidFill>
                   <a:srgbClr val="202124"/>
                 </a:solidFill>
@@ -8497,7 +8390,7 @@
               <a:buNone/>
             </a:pPr>
             <a:r>
-              <a:rPr lang="en-US" sz="670" dirty="0">
+              <a:rPr lang="en-US" sz="650" dirty="0">
                 <a:solidFill>
                   <a:srgbClr val="5F6368"/>
                 </a:solidFill>
@@ -8507,7 +8400,7 @@
               </a:rPr>
               <a:t>Identity and resource isolation boundary restricting principal access so workloads.</a:t>
             </a:r>
-            <a:endParaRPr lang="en-US" sz="780" dirty="0"/>
+            <a:endParaRPr lang="en-US" sz="750" dirty="0"/>
           </a:p>
         </p:txBody>
       </p:sp>
@@ -8519,8 +8412,8 @@
         </p:nvSpPr>
         <p:spPr>
           <a:xfrm>
-            <a:off x="3639312" y="2850185"/>
-            <a:ext cx="7790688" cy="296266"/>
+            <a:off x="3639312" y="3081528"/>
+            <a:ext cx="7790688" cy="338328"/>
           </a:xfrm>
           <a:prstGeom prst="rect">
             <a:avLst/>
@@ -8544,8 +8437,8 @@
         </p:nvSpPr>
         <p:spPr>
           <a:xfrm>
-            <a:off x="3749040" y="2868473"/>
-            <a:ext cx="7571232" cy="259690"/>
+            <a:off x="3749040" y="3099816"/>
+            <a:ext cx="7571232" cy="301752"/>
           </a:xfrm>
           <a:prstGeom prst="rect">
             <a:avLst/>
@@ -8554,14 +8447,19 @@
           <a:ln/>
         </p:spPr>
         <p:txBody>
-          <a:bodyPr wrap="square" rtlCol="0" anchor="ctr"/>
-          <a:lstStyle/>
-          <a:p>
-            <a:pPr indent="0" marL="0">
-              <a:buNone/>
-            </a:pPr>
-            <a:r>
-              <a:rPr lang="en-US" sz="720" b="1" dirty="0">
+          <a:bodyPr wrap="square" rtlCol="0" anchor="ctr">
+            <a:normAutofit/>
+          </a:bodyPr>
+          <a:lstStyle/>
+          <a:p>
+            <a:pPr indent="0" marL="0">
+              <a:lnSpc>
+                <a:spcPct val="102000"/>
+              </a:lnSpc>
+              <a:buNone/>
+            </a:pPr>
+            <a:r>
+              <a:rPr lang="en-US" sz="690" b="1" dirty="0">
                 <a:solidFill>
                   <a:srgbClr val="202124"/>
                 </a:solidFill>
@@ -8572,10 +8470,13 @@
               <a:t>• VPC &amp; 5-Hop Cryptographic Context Chain: </a:t>
             </a:r>
             <a:pPr indent="0" marL="0">
-              <a:buNone/>
-            </a:pPr>
-            <a:r>
-              <a:rPr lang="en-US" sz="700" dirty="0">
+              <a:lnSpc>
+                <a:spcPct val="102000"/>
+              </a:lnSpc>
+              <a:buNone/>
+            </a:pPr>
+            <a:r>
+              <a:rPr lang="en-US" sz="670" dirty="0">
                 <a:solidFill>
                   <a:srgbClr val="3C4043"/>
                 </a:solidFill>
@@ -8585,7 +8486,7 @@
               </a:rPr>
               <a:t>Binds IAM Principal Access Boundary (PAB) policies to spoke principals so credentials and tool calls remain strictly scoped to their authorized boundary.</a:t>
             </a:r>
-            <a:endParaRPr lang="en-US" sz="720" dirty="0"/>
+            <a:endParaRPr lang="en-US" sz="690" dirty="0"/>
           </a:p>
         </p:txBody>
       </p:sp>
@@ -8597,8 +8498,8 @@
         </p:nvSpPr>
         <p:spPr>
           <a:xfrm>
-            <a:off x="749808" y="3146450"/>
-            <a:ext cx="2889504" cy="785470"/>
+            <a:off x="749808" y="3419856"/>
+            <a:ext cx="2889504" cy="822960"/>
           </a:xfrm>
           <a:prstGeom prst="rect">
             <a:avLst/>
@@ -8622,8 +8523,8 @@
         </p:nvSpPr>
         <p:spPr>
           <a:xfrm>
-            <a:off x="841248" y="3164738"/>
-            <a:ext cx="2706624" cy="748894"/>
+            <a:off x="841248" y="3438144"/>
+            <a:ext cx="2706624" cy="786384"/>
           </a:xfrm>
           <a:prstGeom prst="rect">
             <a:avLst/>
@@ -8632,14 +8533,16 @@
           <a:ln/>
         </p:spPr>
         <p:txBody>
-          <a:bodyPr wrap="square" rtlCol="0" anchor="ctr"/>
-          <a:lstStyle/>
-          <a:p>
-            <a:pPr indent="0" marL="0">
-              <a:buNone/>
-            </a:pPr>
-            <a:r>
-              <a:rPr lang="en-US" sz="780" b="1" dirty="0">
+          <a:bodyPr wrap="square" rtlCol="0" anchor="ctr">
+            <a:normAutofit/>
+          </a:bodyPr>
+          <a:lstStyle/>
+          <a:p>
+            <a:pPr indent="0" marL="0">
+              <a:buNone/>
+            </a:pPr>
+            <a:r>
+              <a:rPr lang="en-US" sz="750" b="1" dirty="0">
                 <a:solidFill>
                   <a:srgbClr val="202124"/>
                 </a:solidFill>
@@ -8654,7 +8557,7 @@
               <a:buNone/>
             </a:pPr>
             <a:r>
-              <a:rPr lang="en-US" sz="670" dirty="0">
+              <a:rPr lang="en-US" sz="650" dirty="0">
                 <a:solidFill>
                   <a:srgbClr val="5F6368"/>
                 </a:solidFill>
@@ -8664,7 +8567,7 @@
               </a:rPr>
               <a:t>Isolated Google Cloud execution spokes.</a:t>
             </a:r>
-            <a:endParaRPr lang="en-US" sz="780" dirty="0"/>
+            <a:endParaRPr lang="en-US" sz="750" dirty="0"/>
           </a:p>
         </p:txBody>
       </p:sp>
@@ -8676,8 +8579,8 @@
         </p:nvSpPr>
         <p:spPr>
           <a:xfrm>
-            <a:off x="3639312" y="3146450"/>
-            <a:ext cx="7790688" cy="785470"/>
+            <a:off x="3639312" y="3419856"/>
+            <a:ext cx="7790688" cy="822960"/>
           </a:xfrm>
           <a:prstGeom prst="rect">
             <a:avLst/>
@@ -8701,8 +8604,8 @@
         </p:nvSpPr>
         <p:spPr>
           <a:xfrm>
-            <a:off x="3749040" y="3164738"/>
-            <a:ext cx="7571232" cy="748894"/>
+            <a:off x="3749040" y="3438144"/>
+            <a:ext cx="7571232" cy="786384"/>
           </a:xfrm>
           <a:prstGeom prst="rect">
             <a:avLst/>
@@ -8711,14 +8614,19 @@
           <a:ln/>
         </p:spPr>
         <p:txBody>
-          <a:bodyPr wrap="square" rtlCol="0" anchor="ctr"/>
-          <a:lstStyle/>
-          <a:p>
-            <a:pPr indent="0" marL="0">
-              <a:buNone/>
-            </a:pPr>
-            <a:r>
-              <a:rPr lang="en-US" sz="720" b="1" dirty="0">
+          <a:bodyPr wrap="square" rtlCol="0" anchor="ctr">
+            <a:normAutofit/>
+          </a:bodyPr>
+          <a:lstStyle/>
+          <a:p>
+            <a:pPr indent="0" marL="0">
+              <a:lnSpc>
+                <a:spcPct val="102000"/>
+              </a:lnSpc>
+              <a:buNone/>
+            </a:pPr>
+            <a:r>
+              <a:rPr lang="en-US" sz="690" b="1" dirty="0">
                 <a:solidFill>
                   <a:srgbClr val="202124"/>
                 </a:solidFill>
@@ -8729,10 +8637,13 @@
               <a:t>• Vertex AI Agent Engine: </a:t>
             </a:r>
             <a:pPr indent="0" marL="0">
-              <a:buNone/>
-            </a:pPr>
-            <a:r>
-              <a:rPr lang="en-US" sz="700" dirty="0">
+              <a:lnSpc>
+                <a:spcPct val="102000"/>
+              </a:lnSpc>
+              <a:buNone/>
+            </a:pPr>
+            <a:r>
+              <a:rPr lang="en-US" sz="670" dirty="0">
                 <a:solidFill>
                   <a:srgbClr val="3C4043"/>
                 </a:solidFill>
@@ -8744,10 +8655,13 @@
 </a:t>
             </a:r>
             <a:pPr indent="0" marL="0">
-              <a:buNone/>
-            </a:pPr>
-            <a:r>
-              <a:rPr lang="en-US" sz="720" b="1" dirty="0">
+              <a:lnSpc>
+                <a:spcPct val="102000"/>
+              </a:lnSpc>
+              <a:buNone/>
+            </a:pPr>
+            <a:r>
+              <a:rPr lang="en-US" sz="690" b="1" dirty="0">
                 <a:solidFill>
                   <a:srgbClr val="202124"/>
                 </a:solidFill>
@@ -8758,10 +8672,13 @@
               <a:t>• Model Armor: </a:t>
             </a:r>
             <a:pPr indent="0" marL="0">
-              <a:buNone/>
-            </a:pPr>
-            <a:r>
-              <a:rPr lang="en-US" sz="700" dirty="0">
+              <a:lnSpc>
+                <a:spcPct val="102000"/>
+              </a:lnSpc>
+              <a:buNone/>
+            </a:pPr>
+            <a:r>
+              <a:rPr lang="en-US" sz="670" dirty="0">
                 <a:solidFill>
                   <a:srgbClr val="3C4043"/>
                 </a:solidFill>
@@ -8773,10 +8690,13 @@
 </a:t>
             </a:r>
             <a:pPr indent="0" marL="0">
-              <a:buNone/>
-            </a:pPr>
-            <a:r>
-              <a:rPr lang="en-US" sz="720" b="1" dirty="0">
+              <a:lnSpc>
+                <a:spcPct val="102000"/>
+              </a:lnSpc>
+              <a:buNone/>
+            </a:pPr>
+            <a:r>
+              <a:rPr lang="en-US" sz="690" b="1" dirty="0">
                 <a:solidFill>
                   <a:srgbClr val="202124"/>
                 </a:solidFill>
@@ -8787,10 +8707,13 @@
               <a:t>• MCP servers: </a:t>
             </a:r>
             <a:pPr indent="0" marL="0">
-              <a:buNone/>
-            </a:pPr>
-            <a:r>
-              <a:rPr lang="en-US" sz="700" dirty="0">
+              <a:lnSpc>
+                <a:spcPct val="102000"/>
+              </a:lnSpc>
+              <a:buNone/>
+            </a:pPr>
+            <a:r>
+              <a:rPr lang="en-US" sz="670" dirty="0">
                 <a:solidFill>
                   <a:srgbClr val="3C4043"/>
                 </a:solidFill>
@@ -8802,10 +8725,13 @@
 </a:t>
             </a:r>
             <a:pPr indent="0" marL="0">
-              <a:buNone/>
-            </a:pPr>
-            <a:r>
-              <a:rPr lang="en-US" sz="720" b="1" dirty="0">
+              <a:lnSpc>
+                <a:spcPct val="102000"/>
+              </a:lnSpc>
+              <a:buNone/>
+            </a:pPr>
+            <a:r>
+              <a:rPr lang="en-US" sz="690" b="1" dirty="0">
                 <a:solidFill>
                   <a:srgbClr val="202124"/>
                 </a:solidFill>
@@ -8816,10 +8742,13 @@
               <a:t>• Shared AlloyDB: </a:t>
             </a:r>
             <a:pPr indent="0" marL="0">
-              <a:buNone/>
-            </a:pPr>
-            <a:r>
-              <a:rPr lang="en-US" sz="700" dirty="0">
+              <a:lnSpc>
+                <a:spcPct val="102000"/>
+              </a:lnSpc>
+              <a:buNone/>
+            </a:pPr>
+            <a:r>
+              <a:rPr lang="en-US" sz="670" dirty="0">
                 <a:solidFill>
                   <a:srgbClr val="3C4043"/>
                 </a:solidFill>
@@ -8829,7 +8758,7 @@
               </a:rPr>
               <a:t>Isolated persistence layer enforcing access boundaries, vector namespaces, and encryption at rest.</a:t>
             </a:r>
-            <a:endParaRPr lang="en-US" sz="720" dirty="0"/>
+            <a:endParaRPr lang="en-US" sz="690" dirty="0"/>
           </a:p>
         </p:txBody>
       </p:sp>
@@ -8841,7 +8770,7 @@
         </p:nvSpPr>
         <p:spPr>
           <a:xfrm>
-            <a:off x="749808" y="4041648"/>
+            <a:off x="749808" y="4315968"/>
             <a:ext cx="10680192" cy="0"/>
           </a:xfrm>
           <a:prstGeom prst="line">
@@ -8864,8 +8793,8 @@
         </p:nvSpPr>
         <p:spPr>
           <a:xfrm>
-            <a:off x="749808" y="4114800"/>
-            <a:ext cx="10680192" cy="256032"/>
+            <a:off x="749808" y="4370832"/>
+            <a:ext cx="10680192" cy="237744"/>
           </a:xfrm>
           <a:prstGeom prst="rect">
             <a:avLst/>
@@ -8881,7 +8810,7 @@
               <a:buNone/>
             </a:pPr>
             <a:r>
-              <a:rPr lang="en-US" sz="1300" dirty="0">
+              <a:rPr lang="en-US" sz="1250" dirty="0">
                 <a:solidFill>
                   <a:srgbClr val="202124"/>
                 </a:solidFill>
@@ -8891,7 +8820,7 @@
               </a:rPr>
               <a:t>Agentic flow</a:t>
             </a:r>
-            <a:endParaRPr lang="en-US" sz="1300" dirty="0"/>
+            <a:endParaRPr lang="en-US" sz="1250" dirty="0"/>
           </a:p>
         </p:txBody>
       </p:sp>
@@ -8903,8 +8832,8 @@
         </p:nvSpPr>
         <p:spPr>
           <a:xfrm>
-            <a:off x="749808" y="4407408"/>
-            <a:ext cx="10680192" cy="2139696"/>
+            <a:off x="749808" y="4626864"/>
+            <a:ext cx="10680192" cy="1901952"/>
           </a:xfrm>
           <a:prstGeom prst="rect">
             <a:avLst/>
@@ -8913,17 +8842,19 @@
           <a:ln/>
         </p:spPr>
         <p:txBody>
-          <a:bodyPr wrap="square" rtlCol="0" anchor="t"/>
-          <a:lstStyle/>
-          <a:p>
-            <a:pPr indent="0" marL="0">
-              <a:lnSpc>
-                <a:spcPct val="108000"/>
-              </a:lnSpc>
-              <a:buNone/>
-            </a:pPr>
-            <a:r>
-              <a:rPr lang="en-US" sz="740" b="1" dirty="0">
+          <a:bodyPr wrap="square" rtlCol="0" anchor="t">
+            <a:normAutofit/>
+          </a:bodyPr>
+          <a:lstStyle/>
+          <a:p>
+            <a:pPr indent="0" marL="0">
+              <a:lnSpc>
+                <a:spcPct val="106000"/>
+              </a:lnSpc>
+              <a:buNone/>
+            </a:pPr>
+            <a:r>
+              <a:rPr lang="en-US" sz="730" b="1" dirty="0">
                 <a:solidFill>
                   <a:srgbClr val="202124"/>
                 </a:solidFill>
@@ -8935,12 +8866,12 @@
             </a:r>
             <a:pPr indent="0" marL="0">
               <a:lnSpc>
-                <a:spcPct val="108000"/>
-              </a:lnSpc>
-              <a:buNone/>
-            </a:pPr>
-            <a:r>
-              <a:rPr lang="en-US" sz="730" dirty="0">
+                <a:spcPct val="106000"/>
+              </a:lnSpc>
+              <a:buNone/>
+            </a:pPr>
+            <a:r>
+              <a:rPr lang="en-US" sz="720" dirty="0">
                 <a:solidFill>
                   <a:srgbClr val="3C4043"/>
                 </a:solidFill>
@@ -8953,12 +8884,12 @@
             </a:r>
             <a:pPr indent="0" marL="0">
               <a:lnSpc>
-                <a:spcPct val="108000"/>
-              </a:lnSpc>
-              <a:buNone/>
-            </a:pPr>
-            <a:r>
-              <a:rPr lang="en-US" sz="740" b="1" dirty="0">
+                <a:spcPct val="106000"/>
+              </a:lnSpc>
+              <a:buNone/>
+            </a:pPr>
+            <a:r>
+              <a:rPr lang="en-US" sz="730" b="1" dirty="0">
                 <a:solidFill>
                   <a:srgbClr val="202124"/>
                 </a:solidFill>
@@ -8970,12 +8901,12 @@
             </a:r>
             <a:pPr indent="0" marL="0">
               <a:lnSpc>
-                <a:spcPct val="108000"/>
-              </a:lnSpc>
-              <a:buNone/>
-            </a:pPr>
-            <a:r>
-              <a:rPr lang="en-US" sz="730" dirty="0">
+                <a:spcPct val="106000"/>
+              </a:lnSpc>
+              <a:buNone/>
+            </a:pPr>
+            <a:r>
+              <a:rPr lang="en-US" sz="720" dirty="0">
                 <a:solidFill>
                   <a:srgbClr val="3C4043"/>
                 </a:solidFill>
@@ -8983,17 +8914,17 @@
                 <a:ea typeface="Arial" pitchFamily="34" charset="-122"/>
                 <a:cs typeface="Arial" pitchFamily="34" charset="-120"/>
               </a:rPr>
-              <a:t>After passing policy and security checks across Cloud Armor &amp; IAP, Model Armor, and RFC 8693 OBO + DPoP, the request is forwarded to Cloud Run.
+              <a:t>After passing policy and security checks across Google Cloud Armor, Model Armor, and RFC 8693 OBO + DPoP, the request is forwarded to Cloud Run.
 </a:t>
             </a:r>
             <a:pPr indent="0" marL="0">
               <a:lnSpc>
-                <a:spcPct val="108000"/>
-              </a:lnSpc>
-              <a:buNone/>
-            </a:pPr>
-            <a:r>
-              <a:rPr lang="en-US" sz="740" b="1" dirty="0">
+                <a:spcPct val="106000"/>
+              </a:lnSpc>
+              <a:buNone/>
+            </a:pPr>
+            <a:r>
+              <a:rPr lang="en-US" sz="730" b="1" dirty="0">
                 <a:solidFill>
                   <a:srgbClr val="202124"/>
                 </a:solidFill>
@@ -9005,12 +8936,12 @@
             </a:r>
             <a:pPr indent="0" marL="0">
               <a:lnSpc>
-                <a:spcPct val="108000"/>
-              </a:lnSpc>
-              <a:buNone/>
-            </a:pPr>
-            <a:r>
-              <a:rPr lang="en-US" sz="730" dirty="0">
+                <a:spcPct val="106000"/>
+              </a:lnSpc>
+              <a:buNone/>
+            </a:pPr>
+            <a:r>
+              <a:rPr lang="en-US" sz="720" dirty="0">
                 <a:solidFill>
                   <a:srgbClr val="3C4043"/>
                 </a:solidFill>
@@ -9023,12 +8954,12 @@
             </a:r>
             <a:pPr indent="0" marL="0">
               <a:lnSpc>
-                <a:spcPct val="108000"/>
-              </a:lnSpc>
-              <a:buNone/>
-            </a:pPr>
-            <a:r>
-              <a:rPr lang="en-US" sz="740" b="1" dirty="0">
+                <a:spcPct val="106000"/>
+              </a:lnSpc>
+              <a:buNone/>
+            </a:pPr>
+            <a:r>
+              <a:rPr lang="en-US" sz="730" b="1" dirty="0">
                 <a:solidFill>
                   <a:srgbClr val="202124"/>
                 </a:solidFill>
@@ -9040,12 +8971,12 @@
             </a:r>
             <a:pPr indent="0" marL="0">
               <a:lnSpc>
-                <a:spcPct val="108000"/>
-              </a:lnSpc>
-              <a:buNone/>
-            </a:pPr>
-            <a:r>
-              <a:rPr lang="en-US" sz="730" dirty="0">
+                <a:spcPct val="106000"/>
+              </a:lnSpc>
+              <a:buNone/>
+            </a:pPr>
+            <a:r>
+              <a:rPr lang="en-US" sz="720" dirty="0">
                 <a:solidFill>
                   <a:srgbClr val="3C4043"/>
                 </a:solidFill>
@@ -9058,12 +8989,12 @@
             </a:r>
             <a:pPr indent="0" marL="0">
               <a:lnSpc>
-                <a:spcPct val="108000"/>
-              </a:lnSpc>
-              <a:buNone/>
-            </a:pPr>
-            <a:r>
-              <a:rPr lang="en-US" sz="700" b="1" dirty="0">
+                <a:spcPct val="106000"/>
+              </a:lnSpc>
+              <a:buNone/>
+            </a:pPr>
+            <a:r>
+              <a:rPr lang="en-US" sz="690" b="1" dirty="0">
                 <a:solidFill>
                   <a:srgbClr val="202124"/>
                 </a:solidFill>
@@ -9075,12 +9006,12 @@
             </a:r>
             <a:pPr indent="0" marL="0">
               <a:lnSpc>
-                <a:spcPct val="108000"/>
-              </a:lnSpc>
-              <a:buNone/>
-            </a:pPr>
-            <a:r>
-              <a:rPr lang="en-US" sz="690" dirty="0">
+                <a:spcPct val="106000"/>
+              </a:lnSpc>
+              <a:buNone/>
+            </a:pPr>
+            <a:r>
+              <a:rPr lang="en-US" sz="680" dirty="0">
                 <a:solidFill>
                   <a:srgbClr val="3C4043"/>
                 </a:solidFill>
@@ -9093,12 +9024,12 @@
             </a:r>
             <a:pPr indent="0" marL="0">
               <a:lnSpc>
-                <a:spcPct val="108000"/>
-              </a:lnSpc>
-              <a:buNone/>
-            </a:pPr>
-            <a:r>
-              <a:rPr lang="en-US" sz="700" b="1" dirty="0">
+                <a:spcPct val="106000"/>
+              </a:lnSpc>
+              <a:buNone/>
+            </a:pPr>
+            <a:r>
+              <a:rPr lang="en-US" sz="690" b="1" dirty="0">
                 <a:solidFill>
                   <a:srgbClr val="202124"/>
                 </a:solidFill>
@@ -9110,12 +9041,12 @@
             </a:r>
             <a:pPr indent="0" marL="0">
               <a:lnSpc>
-                <a:spcPct val="108000"/>
-              </a:lnSpc>
-              <a:buNone/>
-            </a:pPr>
-            <a:r>
-              <a:rPr lang="en-US" sz="690" dirty="0">
+                <a:spcPct val="106000"/>
+              </a:lnSpc>
+              <a:buNone/>
+            </a:pPr>
+            <a:r>
+              <a:rPr lang="en-US" sz="680" dirty="0">
                 <a:solidFill>
                   <a:srgbClr val="3C4043"/>
                 </a:solidFill>
@@ -9128,12 +9059,12 @@
             </a:r>
             <a:pPr indent="0" marL="0">
               <a:lnSpc>
-                <a:spcPct val="108000"/>
-              </a:lnSpc>
-              <a:buNone/>
-            </a:pPr>
-            <a:r>
-              <a:rPr lang="en-US" sz="700" b="1" dirty="0">
+                <a:spcPct val="106000"/>
+              </a:lnSpc>
+              <a:buNone/>
+            </a:pPr>
+            <a:r>
+              <a:rPr lang="en-US" sz="690" b="1" dirty="0">
                 <a:solidFill>
                   <a:srgbClr val="202124"/>
                 </a:solidFill>
@@ -9145,12 +9076,12 @@
             </a:r>
             <a:pPr indent="0" marL="0">
               <a:lnSpc>
-                <a:spcPct val="108000"/>
-              </a:lnSpc>
-              <a:buNone/>
-            </a:pPr>
-            <a:r>
-              <a:rPr lang="en-US" sz="690" dirty="0">
+                <a:spcPct val="106000"/>
+              </a:lnSpc>
+              <a:buNone/>
+            </a:pPr>
+            <a:r>
+              <a:rPr lang="en-US" sz="680" dirty="0">
                 <a:solidFill>
                   <a:srgbClr val="3C4043"/>
                 </a:solidFill>
@@ -9163,12 +9094,12 @@
             </a:r>
             <a:pPr indent="0" marL="0">
               <a:lnSpc>
-                <a:spcPct val="108000"/>
-              </a:lnSpc>
-              <a:buNone/>
-            </a:pPr>
-            <a:r>
-              <a:rPr lang="en-US" sz="700" b="1" dirty="0">
+                <a:spcPct val="106000"/>
+              </a:lnSpc>
+              <a:buNone/>
+            </a:pPr>
+            <a:r>
+              <a:rPr lang="en-US" sz="690" b="1" dirty="0">
                 <a:solidFill>
                   <a:srgbClr val="202124"/>
                 </a:solidFill>
@@ -9180,12 +9111,12 @@
             </a:r>
             <a:pPr indent="0" marL="0">
               <a:lnSpc>
-                <a:spcPct val="108000"/>
-              </a:lnSpc>
-              <a:buNone/>
-            </a:pPr>
-            <a:r>
-              <a:rPr lang="en-US" sz="690" dirty="0">
+                <a:spcPct val="106000"/>
+              </a:lnSpc>
+              <a:buNone/>
+            </a:pPr>
+            <a:r>
+              <a:rPr lang="en-US" sz="680" dirty="0">
                 <a:solidFill>
                   <a:srgbClr val="3C4043"/>
                 </a:solidFill>
@@ -9198,12 +9129,12 @@
             </a:r>
             <a:pPr indent="0" marL="0">
               <a:lnSpc>
-                <a:spcPct val="108000"/>
-              </a:lnSpc>
-              <a:buNone/>
-            </a:pPr>
-            <a:r>
-              <a:rPr lang="en-US" sz="740" b="1" dirty="0">
+                <a:spcPct val="106000"/>
+              </a:lnSpc>
+              <a:buNone/>
+            </a:pPr>
+            <a:r>
+              <a:rPr lang="en-US" sz="730" b="1" dirty="0">
                 <a:solidFill>
                   <a:srgbClr val="202124"/>
                 </a:solidFill>
@@ -9215,12 +9146,12 @@
             </a:r>
             <a:pPr indent="0" marL="0">
               <a:lnSpc>
-                <a:spcPct val="108000"/>
-              </a:lnSpc>
-              <a:buNone/>
-            </a:pPr>
-            <a:r>
-              <a:rPr lang="en-US" sz="730" dirty="0">
+                <a:spcPct val="106000"/>
+              </a:lnSpc>
+              <a:buNone/>
+            </a:pPr>
+            <a:r>
+              <a:rPr lang="en-US" sz="720" dirty="0">
                 <a:solidFill>
                   <a:srgbClr val="3C4043"/>
                 </a:solidFill>
@@ -9233,12 +9164,12 @@
             </a:r>
             <a:pPr indent="0" marL="0">
               <a:lnSpc>
-                <a:spcPct val="108000"/>
-              </a:lnSpc>
-              <a:buNone/>
-            </a:pPr>
-            <a:r>
-              <a:rPr lang="en-US" sz="740" b="1" dirty="0">
+                <a:spcPct val="106000"/>
+              </a:lnSpc>
+              <a:buNone/>
+            </a:pPr>
+            <a:r>
+              <a:rPr lang="en-US" sz="730" b="1" dirty="0">
                 <a:solidFill>
                   <a:srgbClr val="202124"/>
                 </a:solidFill>
@@ -9250,12 +9181,12 @@
             </a:r>
             <a:pPr indent="0" marL="0">
               <a:lnSpc>
-                <a:spcPct val="108000"/>
-              </a:lnSpc>
-              <a:buNone/>
-            </a:pPr>
-            <a:r>
-              <a:rPr lang="en-US" sz="730" dirty="0">
+                <a:spcPct val="106000"/>
+              </a:lnSpc>
+              <a:buNone/>
+            </a:pPr>
+            <a:r>
+              <a:rPr lang="en-US" sz="720" dirty="0">
                 <a:solidFill>
                   <a:srgbClr val="3C4043"/>
                 </a:solidFill>
@@ -9268,12 +9199,12 @@
             </a:r>
             <a:pPr indent="0" marL="0">
               <a:lnSpc>
-                <a:spcPct val="108000"/>
-              </a:lnSpc>
-              <a:buNone/>
-            </a:pPr>
-            <a:r>
-              <a:rPr lang="en-US" sz="740" b="1" dirty="0">
+                <a:spcPct val="106000"/>
+              </a:lnSpc>
+              <a:buNone/>
+            </a:pPr>
+            <a:r>
+              <a:rPr lang="en-US" sz="730" b="1" dirty="0">
                 <a:solidFill>
                   <a:srgbClr val="202124"/>
                 </a:solidFill>
@@ -9285,12 +9216,12 @@
             </a:r>
             <a:pPr indent="0" marL="0">
               <a:lnSpc>
-                <a:spcPct val="108000"/>
-              </a:lnSpc>
-              <a:buNone/>
-            </a:pPr>
-            <a:r>
-              <a:rPr lang="en-US" sz="730" dirty="0">
+                <a:spcPct val="106000"/>
+              </a:lnSpc>
+              <a:buNone/>
+            </a:pPr>
+            <a:r>
+              <a:rPr lang="en-US" sz="720" dirty="0">
                 <a:solidFill>
                   <a:srgbClr val="3C4043"/>
                 </a:solidFill>
@@ -9301,7 +9232,7 @@
               <a:t>The verified response returns to the caller through the Routing hub, while structured OpenTelemetry audit and FinOps spans stream to the Central governance and FinOps observability hub.
 </a:t>
             </a:r>
-            <a:endParaRPr lang="en-US" sz="740" dirty="0"/>
+            <a:endParaRPr lang="en-US" sz="730" dirty="0"/>
           </a:p>
         </p:txBody>
       </p:sp>
@@ -9473,8 +9404,8 @@
         </p:nvSpPr>
         <p:spPr>
           <a:xfrm>
-            <a:off x="749808" y="658368"/>
-            <a:ext cx="10680192" cy="310896"/>
+            <a:off x="749808" y="621792"/>
+            <a:ext cx="10680192" cy="274320"/>
           </a:xfrm>
           <a:prstGeom prst="rect">
             <a:avLst/>
@@ -9490,7 +9421,7 @@
               <a:buNone/>
             </a:pPr>
             <a:r>
-              <a:rPr lang="en-US" sz="1550" dirty="0">
+              <a:rPr lang="en-US" sz="1500" dirty="0">
                 <a:solidFill>
                   <a:srgbClr val="202124"/>
                 </a:solidFill>
@@ -9500,7 +9431,7 @@
               </a:rPr>
               <a:t>Products used</a:t>
             </a:r>
-            <a:endParaRPr lang="en-US" sz="1550" dirty="0"/>
+            <a:endParaRPr lang="en-US" sz="1500" dirty="0"/>
           </a:p>
         </p:txBody>
       </p:sp>
@@ -9512,8 +9443,8 @@
         </p:nvSpPr>
         <p:spPr>
           <a:xfrm>
-            <a:off x="749808" y="1005840"/>
-            <a:ext cx="10680192" cy="219456"/>
+            <a:off x="749808" y="914400"/>
+            <a:ext cx="10680192" cy="329184"/>
           </a:xfrm>
           <a:prstGeom prst="rect">
             <a:avLst/>
@@ -9522,14 +9453,14 @@
           <a:ln/>
         </p:spPr>
         <p:txBody>
-          <a:bodyPr wrap="square" rtlCol="0" anchor="ctr"/>
-          <a:lstStyle/>
-          <a:p>
-            <a:pPr indent="0" marL="0">
-              <a:buNone/>
-            </a:pPr>
-            <a:r>
-              <a:rPr lang="en-US" sz="920" dirty="0">
+          <a:bodyPr wrap="square" rtlCol="0" anchor="t"/>
+          <a:lstStyle/>
+          <a:p>
+            <a:pPr indent="0" marL="0">
+              <a:buNone/>
+            </a:pPr>
+            <a:r>
+              <a:rPr lang="en-US" sz="860" dirty="0">
                 <a:solidFill>
                   <a:srgbClr val="3C4043"/>
                 </a:solidFill>
@@ -9539,7 +9470,7 @@
               </a:rPr>
               <a:t>This reference architecture uses the following Google Cloud services and open-source frameworks to implement Agentic AI Reference Architecture: Multimodal GraphRAG Resource Orchestration with Spanner Graph.</a:t>
             </a:r>
-            <a:endParaRPr lang="en-US" sz="920" dirty="0"/>
+            <a:endParaRPr lang="en-US" sz="860" dirty="0"/>
           </a:p>
         </p:txBody>
       </p:sp>
@@ -9551,8 +9482,8 @@
         </p:nvSpPr>
         <p:spPr>
           <a:xfrm>
-            <a:off x="877824" y="1280160"/>
-            <a:ext cx="10552176" cy="1993392"/>
+            <a:off x="877824" y="1261872"/>
+            <a:ext cx="10552176" cy="2011680"/>
           </a:xfrm>
           <a:prstGeom prst="rect">
             <a:avLst/>
@@ -9561,17 +9492,19 @@
           <a:ln/>
         </p:spPr>
         <p:txBody>
-          <a:bodyPr wrap="square" rtlCol="0" anchor="t"/>
-          <a:lstStyle/>
-          <a:p>
-            <a:pPr indent="0" marL="0">
-              <a:lnSpc>
-                <a:spcPct val="124000"/>
-              </a:lnSpc>
-              <a:buNone/>
-            </a:pPr>
-            <a:r>
-              <a:rPr lang="en-US" sz="840" b="1" dirty="0">
+          <a:bodyPr wrap="square" rtlCol="0" anchor="t">
+            <a:normAutofit/>
+          </a:bodyPr>
+          <a:lstStyle/>
+          <a:p>
+            <a:pPr indent="0" marL="0">
+              <a:lnSpc>
+                <a:spcPct val="118000"/>
+              </a:lnSpc>
+              <a:buNone/>
+            </a:pPr>
+            <a:r>
+              <a:rPr lang="en-US" sz="810" b="1" dirty="0">
                 <a:solidFill>
                   <a:srgbClr val="1A73E8"/>
                 </a:solidFill>
@@ -9583,12 +9516,12 @@
             </a:r>
             <a:pPr indent="0" marL="0">
               <a:lnSpc>
-                <a:spcPct val="124000"/>
-              </a:lnSpc>
-              <a:buNone/>
-            </a:pPr>
-            <a:r>
-              <a:rPr lang="en-US" sz="820" dirty="0">
+                <a:spcPct val="118000"/>
+              </a:lnSpc>
+              <a:buNone/>
+            </a:pPr>
+            <a:r>
+              <a:rPr lang="en-US" sz="790" dirty="0">
                 <a:solidFill>
                   <a:srgbClr val="3C4043"/>
                 </a:solidFill>
@@ -9601,12 +9534,12 @@
             </a:r>
             <a:pPr indent="0" marL="0">
               <a:lnSpc>
-                <a:spcPct val="124000"/>
-              </a:lnSpc>
-              <a:buNone/>
-            </a:pPr>
-            <a:r>
-              <a:rPr lang="en-US" sz="840" b="1" dirty="0">
+                <a:spcPct val="118000"/>
+              </a:lnSpc>
+              <a:buNone/>
+            </a:pPr>
+            <a:r>
+              <a:rPr lang="en-US" sz="810" b="1" dirty="0">
                 <a:solidFill>
                   <a:srgbClr val="1A73E8"/>
                 </a:solidFill>
@@ -9618,12 +9551,12 @@
             </a:r>
             <a:pPr indent="0" marL="0">
               <a:lnSpc>
-                <a:spcPct val="124000"/>
-              </a:lnSpc>
-              <a:buNone/>
-            </a:pPr>
-            <a:r>
-              <a:rPr lang="en-US" sz="820" dirty="0">
+                <a:spcPct val="118000"/>
+              </a:lnSpc>
+              <a:buNone/>
+            </a:pPr>
+            <a:r>
+              <a:rPr lang="en-US" sz="790" dirty="0">
                 <a:solidFill>
                   <a:srgbClr val="3C4043"/>
                 </a:solidFill>
@@ -9636,12 +9569,12 @@
             </a:r>
             <a:pPr indent="0" marL="0">
               <a:lnSpc>
-                <a:spcPct val="124000"/>
-              </a:lnSpc>
-              <a:buNone/>
-            </a:pPr>
-            <a:r>
-              <a:rPr lang="en-US" sz="840" b="1" dirty="0">
+                <a:spcPct val="118000"/>
+              </a:lnSpc>
+              <a:buNone/>
+            </a:pPr>
+            <a:r>
+              <a:rPr lang="en-US" sz="810" b="1" dirty="0">
                 <a:solidFill>
                   <a:srgbClr val="1A73E8"/>
                 </a:solidFill>
@@ -9653,12 +9586,12 @@
             </a:r>
             <a:pPr indent="0" marL="0">
               <a:lnSpc>
-                <a:spcPct val="124000"/>
-              </a:lnSpc>
-              <a:buNone/>
-            </a:pPr>
-            <a:r>
-              <a:rPr lang="en-US" sz="820" dirty="0">
+                <a:spcPct val="118000"/>
+              </a:lnSpc>
+              <a:buNone/>
+            </a:pPr>
+            <a:r>
+              <a:rPr lang="en-US" sz="790" dirty="0">
                 <a:solidFill>
                   <a:srgbClr val="3C4043"/>
                 </a:solidFill>
@@ -9671,12 +9604,12 @@
             </a:r>
             <a:pPr indent="0" marL="0">
               <a:lnSpc>
-                <a:spcPct val="124000"/>
-              </a:lnSpc>
-              <a:buNone/>
-            </a:pPr>
-            <a:r>
-              <a:rPr lang="en-US" sz="840" b="1" dirty="0">
+                <a:spcPct val="118000"/>
+              </a:lnSpc>
+              <a:buNone/>
+            </a:pPr>
+            <a:r>
+              <a:rPr lang="en-US" sz="810" b="1" dirty="0">
                 <a:solidFill>
                   <a:srgbClr val="1A73E8"/>
                 </a:solidFill>
@@ -9688,12 +9621,12 @@
             </a:r>
             <a:pPr indent="0" marL="0">
               <a:lnSpc>
-                <a:spcPct val="124000"/>
-              </a:lnSpc>
-              <a:buNone/>
-            </a:pPr>
-            <a:r>
-              <a:rPr lang="en-US" sz="820" dirty="0">
+                <a:spcPct val="118000"/>
+              </a:lnSpc>
+              <a:buNone/>
+            </a:pPr>
+            <a:r>
+              <a:rPr lang="en-US" sz="790" dirty="0">
                 <a:solidFill>
                   <a:srgbClr val="3C4043"/>
                 </a:solidFill>
@@ -9706,12 +9639,12 @@
             </a:r>
             <a:pPr indent="0" marL="0">
               <a:lnSpc>
-                <a:spcPct val="124000"/>
-              </a:lnSpc>
-              <a:buNone/>
-            </a:pPr>
-            <a:r>
-              <a:rPr lang="en-US" sz="840" b="1" dirty="0">
+                <a:spcPct val="118000"/>
+              </a:lnSpc>
+              <a:buNone/>
+            </a:pPr>
+            <a:r>
+              <a:rPr lang="en-US" sz="810" b="1" dirty="0">
                 <a:solidFill>
                   <a:srgbClr val="1A73E8"/>
                 </a:solidFill>
@@ -9723,12 +9656,12 @@
             </a:r>
             <a:pPr indent="0" marL="0">
               <a:lnSpc>
-                <a:spcPct val="124000"/>
-              </a:lnSpc>
-              <a:buNone/>
-            </a:pPr>
-            <a:r>
-              <a:rPr lang="en-US" sz="820" dirty="0">
+                <a:spcPct val="118000"/>
+              </a:lnSpc>
+              <a:buNone/>
+            </a:pPr>
+            <a:r>
+              <a:rPr lang="en-US" sz="790" dirty="0">
                 <a:solidFill>
                   <a:srgbClr val="3C4043"/>
                 </a:solidFill>
@@ -9738,43 +9671,165 @@
               </a:rPr>
               <a:t>Core Google Cloud service used in DOC-REF-07 to enforce production security, scalability, and observability.</a:t>
             </a:r>
+            <a:endParaRPr lang="en-US" sz="810" dirty="0"/>
+          </a:p>
+        </p:txBody>
+      </p:sp>
+      <p:sp>
+        <p:nvSpPr>
+          <p:cNvPr id="9" name="Shape 7"/>
+          <p:cNvSpPr/>
+          <p:nvPr/>
+        </p:nvSpPr>
+        <p:spPr>
+          <a:xfrm>
+            <a:off x="749808" y="3346704"/>
+            <a:ext cx="10680192" cy="0"/>
+          </a:xfrm>
+          <a:prstGeom prst="line">
+            <a:avLst/>
+          </a:prstGeom>
+          <a:noFill/>
+          <a:ln w="9525">
+            <a:solidFill>
+              <a:srgbClr val="DADCE0"/>
+            </a:solidFill>
+            <a:prstDash val="solid"/>
+          </a:ln>
+        </p:spPr>
+      </p:sp>
+      <p:sp>
+        <p:nvSpPr>
+          <p:cNvPr id="10" name="Text 8"/>
+          <p:cNvSpPr/>
+          <p:nvPr/>
+        </p:nvSpPr>
+        <p:spPr>
+          <a:xfrm>
+            <a:off x="749808" y="3419856"/>
+            <a:ext cx="10680192" cy="274320"/>
+          </a:xfrm>
+          <a:prstGeom prst="rect">
+            <a:avLst/>
+          </a:prstGeom>
+          <a:noFill/>
+          <a:ln/>
+        </p:spPr>
+        <p:txBody>
+          <a:bodyPr wrap="square" rtlCol="0" anchor="ctr"/>
+          <a:lstStyle/>
+          <a:p>
+            <a:pPr indent="0" marL="0">
+              <a:buNone/>
+            </a:pPr>
+            <a:r>
+              <a:rPr lang="en-US" sz="1500" dirty="0">
+                <a:solidFill>
+                  <a:srgbClr val="202124"/>
+                </a:solidFill>
+                <a:latin typeface="Arial" pitchFamily="34" charset="0"/>
+                <a:ea typeface="Arial" pitchFamily="34" charset="-122"/>
+                <a:cs typeface="Arial" pitchFamily="34" charset="-120"/>
+              </a:rPr>
+              <a:t>Use case</a:t>
+            </a:r>
+            <a:endParaRPr lang="en-US" sz="1500" dirty="0"/>
+          </a:p>
+        </p:txBody>
+      </p:sp>
+      <p:sp>
+        <p:nvSpPr>
+          <p:cNvPr id="11" name="Text 9"/>
+          <p:cNvSpPr/>
+          <p:nvPr/>
+        </p:nvSpPr>
+        <p:spPr>
+          <a:xfrm>
+            <a:off x="749808" y="3712464"/>
+            <a:ext cx="10680192" cy="237744"/>
+          </a:xfrm>
+          <a:prstGeom prst="rect">
+            <a:avLst/>
+          </a:prstGeom>
+          <a:noFill/>
+          <a:ln/>
+        </p:spPr>
+        <p:txBody>
+          <a:bodyPr wrap="square" rtlCol="0" anchor="ctr"/>
+          <a:lstStyle/>
+          <a:p>
+            <a:pPr indent="0" marL="0">
+              <a:buNone/>
+            </a:pPr>
+            <a:r>
+              <a:rPr lang="en-US" sz="1100" b="1" dirty="0">
+                <a:solidFill>
+                  <a:srgbClr val="202124"/>
+                </a:solidFill>
+                <a:latin typeface="Arial" pitchFamily="34" charset="0"/>
+                <a:ea typeface="Arial" pitchFamily="34" charset="-122"/>
+                <a:cs typeface="Arial" pitchFamily="34" charset="-120"/>
+              </a:rPr>
+              <a:t>Reciprocal Rank Fusion &amp; Deterministic Entity Linking</a:t>
+            </a:r>
+            <a:endParaRPr lang="en-US" sz="1100" dirty="0"/>
+          </a:p>
+        </p:txBody>
+      </p:sp>
+      <p:sp>
+        <p:nvSpPr>
+          <p:cNvPr id="12" name="Text 10"/>
+          <p:cNvSpPr/>
+          <p:nvPr/>
+        </p:nvSpPr>
+        <p:spPr>
+          <a:xfrm>
+            <a:off x="749808" y="3986784"/>
+            <a:ext cx="10680192" cy="749808"/>
+          </a:xfrm>
+          <a:prstGeom prst="rect">
+            <a:avLst/>
+          </a:prstGeom>
+          <a:noFill/>
+          <a:ln/>
+        </p:spPr>
+        <p:txBody>
+          <a:bodyPr wrap="square" rtlCol="0" anchor="t">
+            <a:normAutofit/>
+          </a:bodyPr>
+          <a:lstStyle/>
+          <a:p>
+            <a:pPr indent="0" marL="0">
+              <a:lnSpc>
+                <a:spcPct val="114000"/>
+              </a:lnSpc>
+              <a:buNone/>
+            </a:pPr>
+            <a:r>
+              <a:rPr lang="en-US" sz="840" dirty="0">
+                <a:solidFill>
+                  <a:srgbClr val="3C4043"/>
+                </a:solidFill>
+                <a:latin typeface="Arial" pitchFamily="34" charset="0"/>
+                <a:ea typeface="Arial" pitchFamily="34" charset="-122"/>
+                <a:cs typeface="Arial" pitchFamily="34" charset="-120"/>
+              </a:rPr>
+              <a:t>To prevent duplicate entity nodes when ingesting heterogeneous PDFs and audio transcripts, the Graph Upsert Agent resolves canonical entity IDs before merging Spanner Graph edges and computing RRF scores.</a:t>
+            </a:r>
             <a:endParaRPr lang="en-US" sz="840" dirty="0"/>
           </a:p>
         </p:txBody>
       </p:sp>
       <p:sp>
         <p:nvSpPr>
-          <p:cNvPr id="9" name="Shape 7"/>
-          <p:cNvSpPr/>
-          <p:nvPr/>
-        </p:nvSpPr>
-        <p:spPr>
-          <a:xfrm>
-            <a:off x="749808" y="3383280"/>
-            <a:ext cx="10680192" cy="0"/>
-          </a:xfrm>
-          <a:prstGeom prst="line">
-            <a:avLst/>
-          </a:prstGeom>
-          <a:noFill/>
-          <a:ln w="9525">
-            <a:solidFill>
-              <a:srgbClr val="DADCE0"/>
-            </a:solidFill>
-            <a:prstDash val="solid"/>
-          </a:ln>
-        </p:spPr>
-      </p:sp>
-      <p:sp>
-        <p:nvSpPr>
-          <p:cNvPr id="10" name="Text 8"/>
-          <p:cNvSpPr/>
-          <p:nvPr/>
-        </p:nvSpPr>
-        <p:spPr>
-          <a:xfrm>
-            <a:off x="749808" y="3511296"/>
-            <a:ext cx="10680192" cy="310896"/>
+          <p:cNvPr id="13" name="Text 11"/>
+          <p:cNvSpPr/>
+          <p:nvPr/>
+        </p:nvSpPr>
+        <p:spPr>
+          <a:xfrm>
+            <a:off x="749808" y="4773168"/>
+            <a:ext cx="10680192" cy="201168"/>
           </a:xfrm>
           <a:prstGeom prst="rect">
             <a:avLst/>
@@ -9790,30 +9845,30 @@
               <a:buNone/>
             </a:pPr>
             <a:r>
-              <a:rPr lang="en-US" sz="1550" dirty="0">
-                <a:solidFill>
-                  <a:srgbClr val="202124"/>
-                </a:solidFill>
-                <a:latin typeface="Arial" pitchFamily="34" charset="0"/>
-                <a:ea typeface="Arial" pitchFamily="34" charset="-122"/>
-                <a:cs typeface="Arial" pitchFamily="34" charset="-120"/>
-              </a:rPr>
-              <a:t>Use case</a:t>
-            </a:r>
-            <a:endParaRPr lang="en-US" sz="1550" dirty="0"/>
-          </a:p>
-        </p:txBody>
-      </p:sp>
-      <p:sp>
-        <p:nvSpPr>
-          <p:cNvPr id="11" name="Text 9"/>
-          <p:cNvSpPr/>
-          <p:nvPr/>
-        </p:nvSpPr>
-        <p:spPr>
-          <a:xfrm>
-            <a:off x="749808" y="3858768"/>
-            <a:ext cx="10680192" cy="256032"/>
+              <a:rPr lang="en-US" sz="860" dirty="0">
+                <a:solidFill>
+                  <a:srgbClr val="3C4043"/>
+                </a:solidFill>
+                <a:latin typeface="Arial" pitchFamily="34" charset="0"/>
+                <a:ea typeface="Arial" pitchFamily="34" charset="-122"/>
+                <a:cs typeface="Arial" pitchFamily="34" charset="-120"/>
+              </a:rPr>
+              <a:t>For this use case, the architecture provides the following benefits:</a:t>
+            </a:r>
+            <a:endParaRPr lang="en-US" sz="860" dirty="0"/>
+          </a:p>
+        </p:txBody>
+      </p:sp>
+      <p:sp>
+        <p:nvSpPr>
+          <p:cNvPr id="14" name="Text 12"/>
+          <p:cNvSpPr/>
+          <p:nvPr/>
+        </p:nvSpPr>
+        <p:spPr>
+          <a:xfrm>
+            <a:off x="877824" y="5010912"/>
+            <a:ext cx="10552176" cy="1481328"/>
           </a:xfrm>
           <a:prstGeom prst="rect">
             <a:avLst/>
@@ -9822,137 +9877,19 @@
           <a:ln/>
         </p:spPr>
         <p:txBody>
-          <a:bodyPr wrap="square" rtlCol="0" anchor="ctr"/>
-          <a:lstStyle/>
-          <a:p>
-            <a:pPr indent="0" marL="0">
-              <a:buNone/>
-            </a:pPr>
-            <a:r>
-              <a:rPr lang="en-US" sz="1150" b="1" dirty="0">
-                <a:solidFill>
-                  <a:srgbClr val="202124"/>
-                </a:solidFill>
-                <a:latin typeface="Arial" pitchFamily="34" charset="0"/>
-                <a:ea typeface="Arial" pitchFamily="34" charset="-122"/>
-                <a:cs typeface="Arial" pitchFamily="34" charset="-120"/>
-              </a:rPr>
-              <a:t>Reciprocal Rank Fusion &amp; Deterministic Entity Linking</a:t>
-            </a:r>
-            <a:endParaRPr lang="en-US" sz="1150" dirty="0"/>
-          </a:p>
-        </p:txBody>
-      </p:sp>
-      <p:sp>
-        <p:nvSpPr>
-          <p:cNvPr id="12" name="Text 10"/>
-          <p:cNvSpPr/>
-          <p:nvPr/>
-        </p:nvSpPr>
-        <p:spPr>
-          <a:xfrm>
-            <a:off x="749808" y="4151376"/>
-            <a:ext cx="10680192" cy="658368"/>
-          </a:xfrm>
-          <a:prstGeom prst="rect">
-            <a:avLst/>
-          </a:prstGeom>
-          <a:noFill/>
-          <a:ln/>
-        </p:spPr>
-        <p:txBody>
-          <a:bodyPr wrap="square" rtlCol="0" anchor="t"/>
-          <a:lstStyle/>
-          <a:p>
-            <a:pPr indent="0" marL="0">
-              <a:lnSpc>
-                <a:spcPct val="118000"/>
-              </a:lnSpc>
-              <a:buNone/>
-            </a:pPr>
-            <a:r>
-              <a:rPr lang="en-US" sz="880" dirty="0">
-                <a:solidFill>
-                  <a:srgbClr val="3C4043"/>
-                </a:solidFill>
-                <a:latin typeface="Arial" pitchFamily="34" charset="0"/>
-                <a:ea typeface="Arial" pitchFamily="34" charset="-122"/>
-                <a:cs typeface="Arial" pitchFamily="34" charset="-120"/>
-              </a:rPr>
-              <a:t>To prevent duplicate entity nodes when ingesting heterogeneous PDFs and audio transcripts, the Graph Upsert Agent resolves canonical entity IDs before merging Spanner Graph edges and computing RRF scores.</a:t>
-            </a:r>
-            <a:endParaRPr lang="en-US" sz="880" dirty="0"/>
-          </a:p>
-        </p:txBody>
-      </p:sp>
-      <p:sp>
-        <p:nvSpPr>
-          <p:cNvPr id="13" name="Text 11"/>
-          <p:cNvSpPr/>
-          <p:nvPr/>
-        </p:nvSpPr>
-        <p:spPr>
-          <a:xfrm>
-            <a:off x="749808" y="4846320"/>
-            <a:ext cx="10680192" cy="201168"/>
-          </a:xfrm>
-          <a:prstGeom prst="rect">
-            <a:avLst/>
-          </a:prstGeom>
-          <a:noFill/>
-          <a:ln/>
-        </p:spPr>
-        <p:txBody>
-          <a:bodyPr wrap="square" rtlCol="0" anchor="ctr"/>
-          <a:lstStyle/>
-          <a:p>
-            <a:pPr indent="0" marL="0">
-              <a:buNone/>
-            </a:pPr>
-            <a:r>
-              <a:rPr lang="en-US" sz="880" dirty="0">
-                <a:solidFill>
-                  <a:srgbClr val="3C4043"/>
-                </a:solidFill>
-                <a:latin typeface="Arial" pitchFamily="34" charset="0"/>
-                <a:ea typeface="Arial" pitchFamily="34" charset="-122"/>
-                <a:cs typeface="Arial" pitchFamily="34" charset="-120"/>
-              </a:rPr>
-              <a:t>For this use case, the architecture provides the following benefits:</a:t>
-            </a:r>
-            <a:endParaRPr lang="en-US" sz="880" dirty="0"/>
-          </a:p>
-        </p:txBody>
-      </p:sp>
-      <p:sp>
-        <p:nvSpPr>
-          <p:cNvPr id="14" name="Text 12"/>
-          <p:cNvSpPr/>
-          <p:nvPr/>
-        </p:nvSpPr>
-        <p:spPr>
-          <a:xfrm>
-            <a:off x="877824" y="5084064"/>
-            <a:ext cx="10552176" cy="1426464"/>
-          </a:xfrm>
-          <a:prstGeom prst="rect">
-            <a:avLst/>
-          </a:prstGeom>
-          <a:noFill/>
-          <a:ln/>
-        </p:spPr>
-        <p:txBody>
-          <a:bodyPr wrap="square" rtlCol="0" anchor="t"/>
-          <a:lstStyle/>
-          <a:p>
-            <a:pPr indent="0" marL="0">
-              <a:lnSpc>
-                <a:spcPct val="120000"/>
-              </a:lnSpc>
-              <a:buNone/>
-            </a:pPr>
-            <a:r>
-              <a:rPr lang="en-US" sz="820" b="1" dirty="0">
+          <a:bodyPr wrap="square" rtlCol="0" anchor="t">
+            <a:normAutofit/>
+          </a:bodyPr>
+          <a:lstStyle/>
+          <a:p>
+            <a:pPr indent="0" marL="0">
+              <a:lnSpc>
+                <a:spcPct val="116000"/>
+              </a:lnSpc>
+              <a:buNone/>
+            </a:pPr>
+            <a:r>
+              <a:rPr lang="en-US" sz="800" b="1" dirty="0">
                 <a:solidFill>
                   <a:srgbClr val="202124"/>
                 </a:solidFill>
@@ -9964,12 +9901,12 @@
             </a:r>
             <a:pPr indent="0" marL="0">
               <a:lnSpc>
-                <a:spcPct val="120000"/>
-              </a:lnSpc>
-              <a:buNone/>
-            </a:pPr>
-            <a:r>
-              <a:rPr lang="en-US" sz="800" dirty="0">
+                <a:spcPct val="116000"/>
+              </a:lnSpc>
+              <a:buNone/>
+            </a:pPr>
+            <a:r>
+              <a:rPr lang="en-US" sz="780" dirty="0">
                 <a:solidFill>
                   <a:srgbClr val="3C4043"/>
                 </a:solidFill>
@@ -9982,12 +9919,12 @@
             </a:r>
             <a:pPr indent="0" marL="0">
               <a:lnSpc>
-                <a:spcPct val="120000"/>
-              </a:lnSpc>
-              <a:buNone/>
-            </a:pPr>
-            <a:r>
-              <a:rPr lang="en-US" sz="820" b="1" dirty="0">
+                <a:spcPct val="116000"/>
+              </a:lnSpc>
+              <a:buNone/>
+            </a:pPr>
+            <a:r>
+              <a:rPr lang="en-US" sz="800" b="1" dirty="0">
                 <a:solidFill>
                   <a:srgbClr val="202124"/>
                 </a:solidFill>
@@ -9999,12 +9936,12 @@
             </a:r>
             <a:pPr indent="0" marL="0">
               <a:lnSpc>
-                <a:spcPct val="120000"/>
-              </a:lnSpc>
-              <a:buNone/>
-            </a:pPr>
-            <a:r>
-              <a:rPr lang="en-US" sz="800" dirty="0">
+                <a:spcPct val="116000"/>
+              </a:lnSpc>
+              <a:buNone/>
+            </a:pPr>
+            <a:r>
+              <a:rPr lang="en-US" sz="780" dirty="0">
                 <a:solidFill>
                   <a:srgbClr val="3C4043"/>
                 </a:solidFill>
@@ -10017,12 +9954,12 @@
             </a:r>
             <a:pPr indent="0" marL="0">
               <a:lnSpc>
-                <a:spcPct val="120000"/>
-              </a:lnSpc>
-              <a:buNone/>
-            </a:pPr>
-            <a:r>
-              <a:rPr lang="en-US" sz="820" b="1" dirty="0">
+                <a:spcPct val="116000"/>
+              </a:lnSpc>
+              <a:buNone/>
+            </a:pPr>
+            <a:r>
+              <a:rPr lang="en-US" sz="800" b="1" dirty="0">
                 <a:solidFill>
                   <a:srgbClr val="202124"/>
                 </a:solidFill>
@@ -10034,12 +9971,12 @@
             </a:r>
             <a:pPr indent="0" marL="0">
               <a:lnSpc>
-                <a:spcPct val="120000"/>
-              </a:lnSpc>
-              <a:buNone/>
-            </a:pPr>
-            <a:r>
-              <a:rPr lang="en-US" sz="800" dirty="0">
+                <a:spcPct val="116000"/>
+              </a:lnSpc>
+              <a:buNone/>
+            </a:pPr>
+            <a:r>
+              <a:rPr lang="en-US" sz="780" dirty="0">
                 <a:solidFill>
                   <a:srgbClr val="3C4043"/>
                 </a:solidFill>
@@ -10049,7 +9986,7 @@
               </a:rPr>
               <a:t>Every node and edge table in Cloud Spanner Graph is interleaved under TenantCatalog so multi-hop GQL traversals remain physically co-located and tenant-isolated.</a:t>
             </a:r>
-            <a:endParaRPr lang="en-US" sz="820" dirty="0"/>
+            <a:endParaRPr lang="en-US" sz="800" dirty="0"/>
           </a:p>
         </p:txBody>
       </p:sp>
@@ -10270,7 +10207,9 @@
           <a:ln/>
         </p:spPr>
         <p:txBody>
-          <a:bodyPr wrap="square" rtlCol="0" anchor="t"/>
+          <a:bodyPr wrap="square" rtlCol="0" anchor="t">
+            <a:normAutofit/>
+          </a:bodyPr>
           <a:lstStyle/>
           <a:p>
             <a:pPr indent="0" marL="0">
@@ -10280,7 +10219,7 @@
               <a:buNone/>
             </a:pPr>
             <a:r>
-              <a:rPr lang="en-US" sz="820" b="1" dirty="0">
+              <a:rPr lang="en-US" sz="810" b="1" dirty="0">
                 <a:solidFill>
                   <a:srgbClr val="202124"/>
                 </a:solidFill>
@@ -10340,7 +10279,7 @@
                 <a:ea typeface="Arial" pitchFamily="34" charset="-122"/>
                 <a:cs typeface="Arial" pitchFamily="34" charset="-120"/>
               </a:rPr>
-              <a:t>For internet-facing workloads, retain the global External Application Load Balancer with Cloud Armor &amp; IAP and Model Armor.
+              <a:t>For internet-facing workloads, retain the global External Application Load Balancer with Google Cloud Armor and Model Armor.
 </a:t>
             </a:r>
             <a:pPr indent="0" marL="0">
@@ -10349,14 +10288,8 @@
               </a:lnSpc>
               <a:buNone/>
             </a:pPr>
-            <a:pPr indent="0" marL="0">
-              <a:lnSpc>
-                <a:spcPct val="112000"/>
-              </a:lnSpc>
-              <a:buNone/>
-            </a:pPr>
-            <a:r>
-              <a:rPr lang="en-US" sz="820" b="1" dirty="0">
+            <a:r>
+              <a:rPr lang="en-US" sz="810" b="1" dirty="0">
                 <a:solidFill>
                   <a:srgbClr val="202124"/>
                 </a:solidFill>
@@ -10419,7 +10352,7 @@
               <a:t>Spoke-local MCP servers: Maximizes blast-radius containment by keeping credentials, service accounts, and data access strictly inside Pattern A: Pooled Shared Runtime.; Shared enterprise tool gateway: Consolidates stateless, non-tenant-specific MCP tools into a central hub project via Private Service Connect.
 </a:t>
             </a:r>
-            <a:endParaRPr lang="en-US" sz="820" dirty="0"/>
+            <a:endParaRPr lang="en-US" sz="810" dirty="0"/>
           </a:p>
         </p:txBody>
       </p:sp>
@@ -10823,48 +10756,50 @@
           <a:ln/>
         </p:spPr>
         <p:txBody>
-          <a:bodyPr wrap="square" rtlCol="0" anchor="ctr"/>
-          <a:lstStyle/>
-          <a:p>
-            <a:pPr indent="0" marL="0">
-              <a:buNone/>
-            </a:pPr>
-            <a:r>
-              <a:rPr lang="en-US" sz="720" b="1" dirty="0">
-                <a:solidFill>
-                  <a:srgbClr val="202124"/>
-                </a:solidFill>
-                <a:latin typeface="Arial" pitchFamily="34" charset="0"/>
-                <a:ea typeface="Arial" pitchFamily="34" charset="-122"/>
-                <a:cs typeface="Arial" pitchFamily="34" charset="-120"/>
-              </a:rPr>
-              <a:t>• Shared Control Plane &amp; Multi-Tenant Governance Perimeter &amp; VPC &amp; 5-Hop Cryptographic Context Chain</a:t>
-            </a:r>
-            <a:endParaRPr lang="en-US" sz="720" dirty="0"/>
-          </a:p>
-          <a:p>
-            <a:pPr indent="0" marL="0">
-              <a:buNone/>
-            </a:pPr>
-            <a:r>
-              <a:rPr lang="en-US" sz="720" b="1" dirty="0">
-                <a:solidFill>
-                  <a:srgbClr val="202124"/>
-                </a:solidFill>
-                <a:latin typeface="Arial" pitchFamily="34" charset="0"/>
-                <a:ea typeface="Arial" pitchFamily="34" charset="-122"/>
-                <a:cs typeface="Arial" pitchFamily="34" charset="-120"/>
-              </a:rPr>
-              <a:t>• Cloud Armor &amp; IAP, Model Armor &amp; Model Armor</a:t>
-            </a:r>
-            <a:endParaRPr lang="en-US" sz="720" dirty="0"/>
-          </a:p>
-          <a:p>
-            <a:pPr indent="0" marL="0">
-              <a:buNone/>
-            </a:pPr>
-            <a:r>
-              <a:rPr lang="en-US" sz="720" b="1" dirty="0">
+          <a:bodyPr wrap="square" rtlCol="0" anchor="ctr">
+            <a:normAutofit/>
+          </a:bodyPr>
+          <a:lstStyle/>
+          <a:p>
+            <a:pPr indent="0" marL="0">
+              <a:buNone/>
+            </a:pPr>
+            <a:r>
+              <a:rPr lang="en-US" sz="710" b="1" dirty="0">
+                <a:solidFill>
+                  <a:srgbClr val="202124"/>
+                </a:solidFill>
+                <a:latin typeface="Arial" pitchFamily="34" charset="0"/>
+                <a:ea typeface="Arial" pitchFamily="34" charset="-122"/>
+                <a:cs typeface="Arial" pitchFamily="34" charset="-120"/>
+              </a:rPr>
+              <a:t>• VPC Service Controls &amp; Access Boundaries</a:t>
+            </a:r>
+            <a:endParaRPr lang="en-US" sz="710" dirty="0"/>
+          </a:p>
+          <a:p>
+            <a:pPr indent="0" marL="0">
+              <a:buNone/>
+            </a:pPr>
+            <a:r>
+              <a:rPr lang="en-US" sz="710" b="1" dirty="0">
+                <a:solidFill>
+                  <a:srgbClr val="202124"/>
+                </a:solidFill>
+                <a:latin typeface="Arial" pitchFamily="34" charset="0"/>
+                <a:ea typeface="Arial" pitchFamily="34" charset="-122"/>
+                <a:cs typeface="Arial" pitchFamily="34" charset="-120"/>
+              </a:rPr>
+              <a:t>• Google Cloud Armor &amp; Model Armor</a:t>
+            </a:r>
+            <a:endParaRPr lang="en-US" sz="710" dirty="0"/>
+          </a:p>
+          <a:p>
+            <a:pPr indent="0" marL="0">
+              <a:buNone/>
+            </a:pPr>
+            <a:r>
+              <a:rPr lang="en-US" sz="710" b="1" dirty="0">
                 <a:solidFill>
                   <a:srgbClr val="202124"/>
                 </a:solidFill>
@@ -10874,7 +10809,7 @@
               </a:rPr>
               <a:t>• Shared AlloyDB &amp; Central IAM &amp; PAB</a:t>
             </a:r>
-            <a:endParaRPr lang="en-US" sz="720" dirty="0"/>
+            <a:endParaRPr lang="en-US" sz="710" dirty="0"/>
           </a:p>
         </p:txBody>
       </p:sp>
@@ -10921,28 +10856,30 @@
           <a:ln/>
         </p:spPr>
         <p:txBody>
-          <a:bodyPr wrap="square" rtlCol="0" anchor="ctr"/>
-          <a:lstStyle/>
-          <a:p>
-            <a:pPr indent="0" marL="0">
-              <a:buNone/>
-            </a:pPr>
-            <a:r>
-              <a:rPr lang="en-US" sz="710" b="1" dirty="0">
-                <a:solidFill>
-                  <a:srgbClr val="202124"/>
-                </a:solidFill>
-                <a:latin typeface="Arial" pitchFamily="34" charset="0"/>
-                <a:ea typeface="Arial" pitchFamily="34" charset="-122"/>
-                <a:cs typeface="Arial" pitchFamily="34" charset="-120"/>
-              </a:rPr>
-              <a:t>• Shared Control Plane &amp; Multi-Tenant Governance Perimeter &amp; VPC &amp; 5-Hop Cryptographic Context Chain: </a:t>
-            </a:r>
-            <a:pPr indent="0" marL="0">
-              <a:buNone/>
-            </a:pPr>
-            <a:r>
-              <a:rPr lang="en-US" sz="700" dirty="0">
+          <a:bodyPr wrap="square" rtlCol="0" anchor="ctr">
+            <a:normAutofit/>
+          </a:bodyPr>
+          <a:lstStyle/>
+          <a:p>
+            <a:pPr indent="0" marL="0">
+              <a:buNone/>
+            </a:pPr>
+            <a:r>
+              <a:rPr lang="en-US" sz="700" b="1" dirty="0">
+                <a:solidFill>
+                  <a:srgbClr val="202124"/>
+                </a:solidFill>
+                <a:latin typeface="Arial" pitchFamily="34" charset="0"/>
+                <a:ea typeface="Arial" pitchFamily="34" charset="-122"/>
+                <a:cs typeface="Arial" pitchFamily="34" charset="-120"/>
+              </a:rPr>
+              <a:t>• VPC Service Controls &amp; Access Boundaries: </a:t>
+            </a:r>
+            <a:pPr indent="0" marL="0">
+              <a:buNone/>
+            </a:pPr>
+            <a:r>
+              <a:rPr lang="en-US" sz="690" dirty="0">
                 <a:solidFill>
                   <a:srgbClr val="3C4043"/>
                 </a:solidFill>
@@ -10950,28 +10887,28 @@
                 <a:ea typeface="Arial" pitchFamily="34" charset="-122"/>
                 <a:cs typeface="Arial" pitchFamily="34" charset="-120"/>
               </a:rPr>
-              <a:t>Enforce Shared Control Plane &amp; Multi-Tenant Governance Perimeter perimeters around hub and spoke projects to block unauthorized data exfiltration, and bind VPC &amp; 5-Hop Cryptographic.
+              <a:t>Enforce VPC Service Controls perimeters around hub and spoke projects to block unauthorized data exfiltration, and bind Principal Access Boundary (PAB) policies to spoke principals.
 </a:t>
             </a:r>
             <a:pPr indent="0" marL="0">
               <a:buNone/>
             </a:pPr>
             <a:r>
-              <a:rPr lang="en-US" sz="710" b="1" dirty="0">
-                <a:solidFill>
-                  <a:srgbClr val="202124"/>
-                </a:solidFill>
-                <a:latin typeface="Arial" pitchFamily="34" charset="0"/>
-                <a:ea typeface="Arial" pitchFamily="34" charset="-122"/>
-                <a:cs typeface="Arial" pitchFamily="34" charset="-120"/>
-              </a:rPr>
-              <a:t>• Cloud Armor &amp; IAP, Model Armor &amp; Model Armor: </a:t>
-            </a:r>
-            <a:pPr indent="0" marL="0">
-              <a:buNone/>
-            </a:pPr>
-            <a:r>
-              <a:rPr lang="en-US" sz="700" dirty="0">
+              <a:rPr lang="en-US" sz="700" b="1" dirty="0">
+                <a:solidFill>
+                  <a:srgbClr val="202124"/>
+                </a:solidFill>
+                <a:latin typeface="Arial" pitchFamily="34" charset="0"/>
+                <a:ea typeface="Arial" pitchFamily="34" charset="-122"/>
+                <a:cs typeface="Arial" pitchFamily="34" charset="-120"/>
+              </a:rPr>
+              <a:t>• Google Cloud Armor &amp; Model Armor: </a:t>
+            </a:r>
+            <a:pPr indent="0" marL="0">
+              <a:buNone/>
+            </a:pPr>
+            <a:r>
+              <a:rPr lang="en-US" sz="690" dirty="0">
                 <a:solidFill>
                   <a:srgbClr val="3C4043"/>
                 </a:solidFill>
@@ -10979,14 +10916,14 @@
                 <a:ea typeface="Arial" pitchFamily="34" charset="-122"/>
                 <a:cs typeface="Arial" pitchFamily="34" charset="-120"/>
               </a:rPr>
-              <a:t>Strip client-supplied privilege headers at the edge, verify caller identity claims, and screen both incoming prompts and outgoing completions with Model Armor.
+              <a:t>Strip client-supplied privilege headers at the edge, verify caller identity claims, and screen prompts and completions with Model Armor.
 </a:t>
             </a:r>
             <a:pPr indent="0" marL="0">
               <a:buNone/>
             </a:pPr>
             <a:r>
-              <a:rPr lang="en-US" sz="710" b="1" dirty="0">
+              <a:rPr lang="en-US" sz="700" b="1" dirty="0">
                 <a:solidFill>
                   <a:srgbClr val="202124"/>
                 </a:solidFill>
@@ -11000,7 +10937,7 @@
               <a:buNone/>
             </a:pPr>
             <a:r>
-              <a:rPr lang="en-US" sz="700" dirty="0">
+              <a:rPr lang="en-US" sz="690" dirty="0">
                 <a:solidFill>
                   <a:srgbClr val="3C4043"/>
                 </a:solidFill>
@@ -11010,7 +10947,7 @@
               </a:rPr>
               <a:t>Encrypt state at rest with Customer-Managed Encryption Keys and enforce least-privilege access scopes on Shared AlloyDB.</a:t>
             </a:r>
-            <a:endParaRPr lang="en-US" sz="710" dirty="0"/>
+            <a:endParaRPr lang="en-US" sz="700" dirty="0"/>
           </a:p>
         </p:txBody>
       </p:sp>
@@ -11121,14 +11058,16 @@
           <a:ln/>
         </p:spPr>
         <p:txBody>
-          <a:bodyPr wrap="square" rtlCol="0" anchor="ctr"/>
-          <a:lstStyle/>
-          <a:p>
-            <a:pPr indent="0" marL="0">
-              <a:buNone/>
-            </a:pPr>
-            <a:r>
-              <a:rPr lang="en-US" sz="720" b="1" dirty="0">
+          <a:bodyPr wrap="square" rtlCol="0" anchor="ctr">
+            <a:normAutofit/>
+          </a:bodyPr>
+          <a:lstStyle/>
+          <a:p>
+            <a:pPr indent="0" marL="0">
+              <a:buNone/>
+            </a:pPr>
+            <a:r>
+              <a:rPr lang="en-US" sz="710" b="1" dirty="0">
                 <a:solidFill>
                   <a:srgbClr val="202124"/>
                 </a:solidFill>
@@ -11138,14 +11077,14 @@
               </a:rPr>
               <a:t>• External Application Load Balancer &amp; Cloud Run</a:t>
             </a:r>
-            <a:endParaRPr lang="en-US" sz="720" dirty="0"/>
-          </a:p>
-          <a:p>
-            <a:pPr indent="0" marL="0">
-              <a:buNone/>
-            </a:pPr>
-            <a:r>
-              <a:rPr lang="en-US" sz="720" b="1" dirty="0">
+            <a:endParaRPr lang="en-US" sz="710" dirty="0"/>
+          </a:p>
+          <a:p>
+            <a:pPr indent="0" marL="0">
+              <a:buNone/>
+            </a:pPr>
+            <a:r>
+              <a:rPr lang="en-US" sz="710" b="1" dirty="0">
                 <a:solidFill>
                   <a:srgbClr val="202124"/>
                 </a:solidFill>
@@ -11155,14 +11094,14 @@
               </a:rPr>
               <a:t>• Vertex AI Agent Engine &amp; MCP servers</a:t>
             </a:r>
-            <a:endParaRPr lang="en-US" sz="720" dirty="0"/>
-          </a:p>
-          <a:p>
-            <a:pPr indent="0" marL="0">
-              <a:buNone/>
-            </a:pPr>
-            <a:r>
-              <a:rPr lang="en-US" sz="720" b="1" dirty="0">
+            <a:endParaRPr lang="en-US" sz="710" dirty="0"/>
+          </a:p>
+          <a:p>
+            <a:pPr indent="0" marL="0">
+              <a:buNone/>
+            </a:pPr>
+            <a:r>
+              <a:rPr lang="en-US" sz="710" b="1" dirty="0">
                 <a:solidFill>
                   <a:srgbClr val="202124"/>
                 </a:solidFill>
@@ -11172,7 +11111,7 @@
               </a:rPr>
               <a:t>• Shared AlloyDB</a:t>
             </a:r>
-            <a:endParaRPr lang="en-US" sz="720" dirty="0"/>
+            <a:endParaRPr lang="en-US" sz="710" dirty="0"/>
           </a:p>
         </p:txBody>
       </p:sp>
@@ -11219,14 +11158,16 @@
           <a:ln/>
         </p:spPr>
         <p:txBody>
-          <a:bodyPr wrap="square" rtlCol="0" anchor="ctr"/>
-          <a:lstStyle/>
-          <a:p>
-            <a:pPr indent="0" marL="0">
-              <a:buNone/>
-            </a:pPr>
-            <a:r>
-              <a:rPr lang="en-US" sz="710" b="1" dirty="0">
+          <a:bodyPr wrap="square" rtlCol="0" anchor="ctr">
+            <a:normAutofit/>
+          </a:bodyPr>
+          <a:lstStyle/>
+          <a:p>
+            <a:pPr indent="0" marL="0">
+              <a:buNone/>
+            </a:pPr>
+            <a:r>
+              <a:rPr lang="en-US" sz="700" b="1" dirty="0">
                 <a:solidFill>
                   <a:srgbClr val="202124"/>
                 </a:solidFill>
@@ -11240,7 +11181,7 @@
               <a:buNone/>
             </a:pPr>
             <a:r>
-              <a:rPr lang="en-US" sz="700" dirty="0">
+              <a:rPr lang="en-US" sz="690" dirty="0">
                 <a:solidFill>
                   <a:srgbClr val="3C4043"/>
                 </a:solidFill>
@@ -11255,7 +11196,7 @@
               <a:buNone/>
             </a:pPr>
             <a:r>
-              <a:rPr lang="en-US" sz="710" b="1" dirty="0">
+              <a:rPr lang="en-US" sz="700" b="1" dirty="0">
                 <a:solidFill>
                   <a:srgbClr val="202124"/>
                 </a:solidFill>
@@ -11269,7 +11210,7 @@
               <a:buNone/>
             </a:pPr>
             <a:r>
-              <a:rPr lang="en-US" sz="700" dirty="0">
+              <a:rPr lang="en-US" sz="690" dirty="0">
                 <a:solidFill>
                   <a:srgbClr val="3C4043"/>
                 </a:solidFill>
@@ -11284,7 +11225,7 @@
               <a:buNone/>
             </a:pPr>
             <a:r>
-              <a:rPr lang="en-US" sz="710" b="1" dirty="0">
+              <a:rPr lang="en-US" sz="700" b="1" dirty="0">
                 <a:solidFill>
                   <a:srgbClr val="202124"/>
                 </a:solidFill>
@@ -11298,7 +11239,7 @@
               <a:buNone/>
             </a:pPr>
             <a:r>
-              <a:rPr lang="en-US" sz="700" dirty="0">
+              <a:rPr lang="en-US" sz="690" dirty="0">
                 <a:solidFill>
                   <a:srgbClr val="3C4043"/>
                 </a:solidFill>
@@ -11308,7 +11249,7 @@
               </a:rPr>
               <a:t>Enable regional high availability and Point-in-Time Recovery on Shared AlloyDB with automated backup verification.</a:t>
             </a:r>
-            <a:endParaRPr lang="en-US" sz="710" dirty="0"/>
+            <a:endParaRPr lang="en-US" sz="700" dirty="0"/>
           </a:p>
         </p:txBody>
       </p:sp>
@@ -11419,14 +11360,16 @@
           <a:ln/>
         </p:spPr>
         <p:txBody>
-          <a:bodyPr wrap="square" rtlCol="0" anchor="ctr"/>
-          <a:lstStyle/>
-          <a:p>
-            <a:pPr indent="0" marL="0">
-              <a:buNone/>
-            </a:pPr>
-            <a:r>
-              <a:rPr lang="en-US" sz="720" b="1" dirty="0">
+          <a:bodyPr wrap="square" rtlCol="0" anchor="ctr">
+            <a:normAutofit/>
+          </a:bodyPr>
+          <a:lstStyle/>
+          <a:p>
+            <a:pPr indent="0" marL="0">
+              <a:buNone/>
+            </a:pPr>
+            <a:r>
+              <a:rPr lang="en-US" sz="710" b="1" dirty="0">
                 <a:solidFill>
                   <a:srgbClr val="202124"/>
                 </a:solidFill>
@@ -11436,14 +11379,14 @@
               </a:rPr>
               <a:t>• Infrastructure as Code</a:t>
             </a:r>
-            <a:endParaRPr lang="en-US" sz="720" dirty="0"/>
-          </a:p>
-          <a:p>
-            <a:pPr indent="0" marL="0">
-              <a:buNone/>
-            </a:pPr>
-            <a:r>
-              <a:rPr lang="en-US" sz="720" b="1" dirty="0">
+            <a:endParaRPr lang="en-US" sz="710" dirty="0"/>
+          </a:p>
+          <a:p>
+            <a:pPr indent="0" marL="0">
+              <a:buNone/>
+            </a:pPr>
+            <a:r>
+              <a:rPr lang="en-US" sz="710" b="1" dirty="0">
                 <a:solidFill>
                   <a:srgbClr val="202124"/>
                 </a:solidFill>
@@ -11453,14 +11396,14 @@
               </a:rPr>
               <a:t>• Security Command Center &amp; Cloud Logging &amp; BQ</a:t>
             </a:r>
-            <a:endParaRPr lang="en-US" sz="720" dirty="0"/>
-          </a:p>
-          <a:p>
-            <a:pPr indent="0" marL="0">
-              <a:buNone/>
-            </a:pPr>
-            <a:r>
-              <a:rPr lang="en-US" sz="720" b="1" dirty="0">
+            <a:endParaRPr lang="en-US" sz="710" dirty="0"/>
+          </a:p>
+          <a:p>
+            <a:pPr indent="0" marL="0">
+              <a:buNone/>
+            </a:pPr>
+            <a:r>
+              <a:rPr lang="en-US" sz="710" b="1" dirty="0">
                 <a:solidFill>
                   <a:srgbClr val="202124"/>
                 </a:solidFill>
@@ -11470,7 +11413,7 @@
               </a:rPr>
               <a:t>• Automated CI/CD &amp; Red-Team Gates</a:t>
             </a:r>
-            <a:endParaRPr lang="en-US" sz="720" dirty="0"/>
+            <a:endParaRPr lang="en-US" sz="710" dirty="0"/>
           </a:p>
         </p:txBody>
       </p:sp>
@@ -11517,14 +11460,16 @@
           <a:ln/>
         </p:spPr>
         <p:txBody>
-          <a:bodyPr wrap="square" rtlCol="0" anchor="ctr"/>
-          <a:lstStyle/>
-          <a:p>
-            <a:pPr indent="0" marL="0">
-              <a:buNone/>
-            </a:pPr>
-            <a:r>
-              <a:rPr lang="en-US" sz="710" b="1" dirty="0">
+          <a:bodyPr wrap="square" rtlCol="0" anchor="ctr">
+            <a:normAutofit/>
+          </a:bodyPr>
+          <a:lstStyle/>
+          <a:p>
+            <a:pPr indent="0" marL="0">
+              <a:buNone/>
+            </a:pPr>
+            <a:r>
+              <a:rPr lang="en-US" sz="700" b="1" dirty="0">
                 <a:solidFill>
                   <a:srgbClr val="202124"/>
                 </a:solidFill>
@@ -11538,7 +11483,7 @@
               <a:buNone/>
             </a:pPr>
             <a:r>
-              <a:rPr lang="en-US" sz="700" dirty="0">
+              <a:rPr lang="en-US" sz="690" dirty="0">
                 <a:solidFill>
                   <a:srgbClr val="3C4043"/>
                 </a:solidFill>
@@ -11553,7 +11498,7 @@
               <a:buNone/>
             </a:pPr>
             <a:r>
-              <a:rPr lang="en-US" sz="710" b="1" dirty="0">
+              <a:rPr lang="en-US" sz="700" b="1" dirty="0">
                 <a:solidFill>
                   <a:srgbClr val="202124"/>
                 </a:solidFill>
@@ -11567,7 +11512,7 @@
               <a:buNone/>
             </a:pPr>
             <a:r>
-              <a:rPr lang="en-US" sz="700" dirty="0">
+              <a:rPr lang="en-US" sz="690" dirty="0">
                 <a:solidFill>
                   <a:srgbClr val="3C4043"/>
                 </a:solidFill>
@@ -11582,7 +11527,7 @@
               <a:buNone/>
             </a:pPr>
             <a:r>
-              <a:rPr lang="en-US" sz="710" b="1" dirty="0">
+              <a:rPr lang="en-US" sz="700" b="1" dirty="0">
                 <a:solidFill>
                   <a:srgbClr val="202124"/>
                 </a:solidFill>
@@ -11596,7 +11541,7 @@
               <a:buNone/>
             </a:pPr>
             <a:r>
-              <a:rPr lang="en-US" sz="700" dirty="0">
+              <a:rPr lang="en-US" sz="690" dirty="0">
                 <a:solidFill>
                   <a:srgbClr val="3C4043"/>
                 </a:solidFill>
@@ -11606,7 +11551,7 @@
               </a:rPr>
               <a:t>Gate every prompt, model, or tool change on automated Vertex AI Gen AI Evaluation Service benchmarks and security regression checks before production rollout.</a:t>
             </a:r>
-            <a:endParaRPr lang="en-US" sz="710" dirty="0"/>
+            <a:endParaRPr lang="en-US" sz="700" dirty="0"/>
           </a:p>
         </p:txBody>
       </p:sp>
@@ -11717,14 +11662,16 @@
           <a:ln/>
         </p:spPr>
         <p:txBody>
-          <a:bodyPr wrap="square" rtlCol="0" anchor="ctr"/>
-          <a:lstStyle/>
-          <a:p>
-            <a:pPr indent="0" marL="0">
-              <a:buNone/>
-            </a:pPr>
-            <a:r>
-              <a:rPr lang="en-US" sz="720" b="1" dirty="0">
+          <a:bodyPr wrap="square" rtlCol="0" anchor="ctr">
+            <a:normAutofit/>
+          </a:bodyPr>
+          <a:lstStyle/>
+          <a:p>
+            <a:pPr indent="0" marL="0">
+              <a:buNone/>
+            </a:pPr>
+            <a:r>
+              <a:rPr lang="en-US" sz="710" b="1" dirty="0">
                 <a:solidFill>
                   <a:srgbClr val="202124"/>
                 </a:solidFill>
@@ -11734,14 +11681,14 @@
               </a:rPr>
               <a:t>• Gemini 2.5 Pro Context Caching</a:t>
             </a:r>
-            <a:endParaRPr lang="en-US" sz="720" dirty="0"/>
-          </a:p>
-          <a:p>
-            <a:pPr indent="0" marL="0">
-              <a:buNone/>
-            </a:pPr>
-            <a:r>
-              <a:rPr lang="en-US" sz="720" b="1" dirty="0">
+            <a:endParaRPr lang="en-US" sz="710" dirty="0"/>
+          </a:p>
+          <a:p>
+            <a:pPr indent="0" marL="0">
+              <a:buNone/>
+            </a:pPr>
+            <a:r>
+              <a:rPr lang="en-US" sz="710" b="1" dirty="0">
                 <a:solidFill>
                   <a:srgbClr val="202124"/>
                 </a:solidFill>
@@ -11751,14 +11698,14 @@
               </a:rPr>
               <a:t>• RFC 8693 OBO + DPoP &amp; MCP servers</a:t>
             </a:r>
-            <a:endParaRPr lang="en-US" sz="720" dirty="0"/>
-          </a:p>
-          <a:p>
-            <a:pPr indent="0" marL="0">
-              <a:buNone/>
-            </a:pPr>
-            <a:r>
-              <a:rPr lang="en-US" sz="720" b="1" dirty="0">
+            <a:endParaRPr lang="en-US" sz="710" dirty="0"/>
+          </a:p>
+          <a:p>
+            <a:pPr indent="0" marL="0">
+              <a:buNone/>
+            </a:pPr>
+            <a:r>
+              <a:rPr lang="en-US" sz="710" b="1" dirty="0">
                 <a:solidFill>
                   <a:srgbClr val="202124"/>
                 </a:solidFill>
@@ -11768,7 +11715,7 @@
               </a:rPr>
               <a:t>• Cloud Logging &amp; BQ FinOps Attribution</a:t>
             </a:r>
-            <a:endParaRPr lang="en-US" sz="720" dirty="0"/>
+            <a:endParaRPr lang="en-US" sz="710" dirty="0"/>
           </a:p>
         </p:txBody>
       </p:sp>
@@ -11815,14 +11762,16 @@
           <a:ln/>
         </p:spPr>
         <p:txBody>
-          <a:bodyPr wrap="square" rtlCol="0" anchor="ctr"/>
-          <a:lstStyle/>
-          <a:p>
-            <a:pPr indent="0" marL="0">
-              <a:buNone/>
-            </a:pPr>
-            <a:r>
-              <a:rPr lang="en-US" sz="710" b="1" dirty="0">
+          <a:bodyPr wrap="square" rtlCol="0" anchor="ctr">
+            <a:normAutofit/>
+          </a:bodyPr>
+          <a:lstStyle/>
+          <a:p>
+            <a:pPr indent="0" marL="0">
+              <a:buNone/>
+            </a:pPr>
+            <a:r>
+              <a:rPr lang="en-US" sz="700" b="1" dirty="0">
                 <a:solidFill>
                   <a:srgbClr val="202124"/>
                 </a:solidFill>
@@ -11836,7 +11785,7 @@
               <a:buNone/>
             </a:pPr>
             <a:r>
-              <a:rPr lang="en-US" sz="700" dirty="0">
+              <a:rPr lang="en-US" sz="690" dirty="0">
                 <a:solidFill>
                   <a:srgbClr val="3C4043"/>
                 </a:solidFill>
@@ -11851,7 +11800,7 @@
               <a:buNone/>
             </a:pPr>
             <a:r>
-              <a:rPr lang="en-US" sz="710" b="1" dirty="0">
+              <a:rPr lang="en-US" sz="700" b="1" dirty="0">
                 <a:solidFill>
                   <a:srgbClr val="202124"/>
                 </a:solidFill>
@@ -11865,7 +11814,7 @@
               <a:buNone/>
             </a:pPr>
             <a:r>
-              <a:rPr lang="en-US" sz="700" dirty="0">
+              <a:rPr lang="en-US" sz="690" dirty="0">
                 <a:solidFill>
                   <a:srgbClr val="3C4043"/>
                 </a:solidFill>
@@ -11880,7 +11829,7 @@
               <a:buNone/>
             </a:pPr>
             <a:r>
-              <a:rPr lang="en-US" sz="710" b="1" dirty="0">
+              <a:rPr lang="en-US" sz="700" b="1" dirty="0">
                 <a:solidFill>
                   <a:srgbClr val="202124"/>
                 </a:solidFill>
@@ -11894,7 +11843,7 @@
               <a:buNone/>
             </a:pPr>
             <a:r>
-              <a:rPr lang="en-US" sz="700" dirty="0">
+              <a:rPr lang="en-US" sz="690" dirty="0">
                 <a:solidFill>
                   <a:srgbClr val="3C4043"/>
                 </a:solidFill>
@@ -11904,7 +11853,7 @@
               </a:rPr>
               <a:t>Export OpenTelemetry token usage spans and Cloud Billing records to BigQuery to enforce per-spoke quota budgets and automated spend alerts.</a:t>
             </a:r>
-            <a:endParaRPr lang="en-US" sz="710" dirty="0"/>
+            <a:endParaRPr lang="en-US" sz="700" dirty="0"/>
           </a:p>
         </p:txBody>
       </p:sp>
@@ -12282,8 +12231,8 @@
         </p:nvSpPr>
         <p:spPr>
           <a:xfrm>
-            <a:off x="877824" y="1554480"/>
-            <a:ext cx="10424160" cy="1920240"/>
+            <a:off x="877824" y="1536192"/>
+            <a:ext cx="10424160" cy="1956816"/>
           </a:xfrm>
           <a:prstGeom prst="rect">
             <a:avLst/>
@@ -12292,17 +12241,19 @@
           <a:ln/>
         </p:spPr>
         <p:txBody>
-          <a:bodyPr wrap="square" rtlCol="0" anchor="t"/>
-          <a:lstStyle/>
-          <a:p>
-            <a:pPr indent="0" marL="0">
-              <a:lnSpc>
-                <a:spcPct val="112000"/>
-              </a:lnSpc>
-              <a:buNone/>
-            </a:pPr>
-            <a:r>
-              <a:rPr lang="en-US" sz="740" dirty="0">
+          <a:bodyPr wrap="square" rtlCol="0" anchor="t">
+            <a:normAutofit/>
+          </a:bodyPr>
+          <a:lstStyle/>
+          <a:p>
+            <a:pPr indent="0" marL="0">
+              <a:lnSpc>
+                <a:spcPct val="106000"/>
+              </a:lnSpc>
+              <a:buNone/>
+            </a:pPr>
+            <a:r>
+              <a:rPr lang="en-US" sz="690" dirty="0">
                 <a:solidFill>
                   <a:srgbClr val="202124"/>
                 </a:solidFill>
@@ -12312,17 +12263,17 @@
               </a:rPr>
               <a:t>GRAPH CorporateKnowledgeGraph</a:t>
             </a:r>
-            <a:endParaRPr lang="en-US" sz="740" dirty="0"/>
-          </a:p>
-          <a:p>
-            <a:pPr indent="0" marL="0">
-              <a:lnSpc>
-                <a:spcPct val="112000"/>
-              </a:lnSpc>
-              <a:buNone/>
-            </a:pPr>
-            <a:r>
-              <a:rPr lang="en-US" sz="740" dirty="0">
+            <a:endParaRPr lang="en-US" sz="690" dirty="0"/>
+          </a:p>
+          <a:p>
+            <a:pPr indent="0" marL="0">
+              <a:lnSpc>
+                <a:spcPct val="106000"/>
+              </a:lnSpc>
+              <a:buNone/>
+            </a:pPr>
+            <a:r>
+              <a:rPr lang="en-US" sz="690" dirty="0">
                 <a:solidFill>
                   <a:srgbClr val="202124"/>
                 </a:solidFill>
@@ -12332,17 +12283,17 @@
               </a:rPr>
               <a:t>MATCH (a:Company {tenant_id: @tenant_id})-[t1:TRANSFERRED_TO]-&gt;(b:Company)</a:t>
             </a:r>
-            <a:endParaRPr lang="en-US" sz="740" dirty="0"/>
-          </a:p>
-          <a:p>
-            <a:pPr indent="0" marL="0">
-              <a:lnSpc>
-                <a:spcPct val="112000"/>
-              </a:lnSpc>
-              <a:buNone/>
-            </a:pPr>
-            <a:r>
-              <a:rPr lang="en-US" sz="740" dirty="0">
+            <a:endParaRPr lang="en-US" sz="690" dirty="0"/>
+          </a:p>
+          <a:p>
+            <a:pPr indent="0" marL="0">
+              <a:lnSpc>
+                <a:spcPct val="106000"/>
+              </a:lnSpc>
+              <a:buNone/>
+            </a:pPr>
+            <a:r>
+              <a:rPr lang="en-US" sz="690" dirty="0">
                 <a:solidFill>
                   <a:srgbClr val="202124"/>
                 </a:solidFill>
@@ -12352,17 +12303,17 @@
               </a:rPr>
               <a:t>      -[t2:TRANSFERRED_TO]-&gt;(c:Company)-[t3:TRANSFERRED_TO]-&gt;(a)</a:t>
             </a:r>
-            <a:endParaRPr lang="en-US" sz="740" dirty="0"/>
-          </a:p>
-          <a:p>
-            <a:pPr indent="0" marL="0">
-              <a:lnSpc>
-                <a:spcPct val="112000"/>
-              </a:lnSpc>
-              <a:buNone/>
-            </a:pPr>
-            <a:r>
-              <a:rPr lang="en-US" sz="740" dirty="0">
+            <a:endParaRPr lang="en-US" sz="690" dirty="0"/>
+          </a:p>
+          <a:p>
+            <a:pPr indent="0" marL="0">
+              <a:lnSpc>
+                <a:spcPct val="106000"/>
+              </a:lnSpc>
+              <a:buNone/>
+            </a:pPr>
+            <a:r>
+              <a:rPr lang="en-US" sz="690" dirty="0">
                 <a:solidFill>
                   <a:srgbClr val="202124"/>
                 </a:solidFill>
@@ -12372,17 +12323,17 @@
               </a:rPr>
               <a:t>WHERE t1.amount_usd + t2.amount_usd + t3.amount_usd &gt; 1000000</a:t>
             </a:r>
-            <a:endParaRPr lang="en-US" sz="740" dirty="0"/>
-          </a:p>
-          <a:p>
-            <a:pPr indent="0" marL="0">
-              <a:lnSpc>
-                <a:spcPct val="112000"/>
-              </a:lnSpc>
-              <a:buNone/>
-            </a:pPr>
-            <a:r>
-              <a:rPr lang="en-US" sz="740" dirty="0">
+            <a:endParaRPr lang="en-US" sz="690" dirty="0"/>
+          </a:p>
+          <a:p>
+            <a:pPr indent="0" marL="0">
+              <a:lnSpc>
+                <a:spcPct val="106000"/>
+              </a:lnSpc>
+              <a:buNone/>
+            </a:pPr>
+            <a:r>
+              <a:rPr lang="en-US" sz="690" dirty="0">
                 <a:solidFill>
                   <a:srgbClr val="202124"/>
                 </a:solidFill>
@@ -12392,17 +12343,17 @@
               </a:rPr>
               <a:t>  AND TIMESTAMP_DIFF(t3.tx_timestamp, t1.tx_timestamp, HOUR) &lt;= 24</a:t>
             </a:r>
-            <a:endParaRPr lang="en-US" sz="740" dirty="0"/>
-          </a:p>
-          <a:p>
-            <a:pPr indent="0" marL="0">
-              <a:lnSpc>
-                <a:spcPct val="112000"/>
-              </a:lnSpc>
-              <a:buNone/>
-            </a:pPr>
-            <a:r>
-              <a:rPr lang="en-US" sz="740" dirty="0">
+            <a:endParaRPr lang="en-US" sz="690" dirty="0"/>
+          </a:p>
+          <a:p>
+            <a:pPr indent="0" marL="0">
+              <a:lnSpc>
+                <a:spcPct val="106000"/>
+              </a:lnSpc>
+              <a:buNone/>
+            </a:pPr>
+            <a:r>
+              <a:rPr lang="en-US" sz="690" dirty="0">
                 <a:solidFill>
                   <a:srgbClr val="202124"/>
                 </a:solidFill>
@@ -12412,17 +12363,17 @@
               </a:rPr>
               <a:t>RETURN a.company_name AS origin_entity,</a:t>
             </a:r>
-            <a:endParaRPr lang="en-US" sz="740" dirty="0"/>
-          </a:p>
-          <a:p>
-            <a:pPr indent="0" marL="0">
-              <a:lnSpc>
-                <a:spcPct val="112000"/>
-              </a:lnSpc>
-              <a:buNone/>
-            </a:pPr>
-            <a:r>
-              <a:rPr lang="en-US" sz="740" dirty="0">
+            <a:endParaRPr lang="en-US" sz="690" dirty="0"/>
+          </a:p>
+          <a:p>
+            <a:pPr indent="0" marL="0">
+              <a:lnSpc>
+                <a:spcPct val="106000"/>
+              </a:lnSpc>
+              <a:buNone/>
+            </a:pPr>
+            <a:r>
+              <a:rPr lang="en-US" sz="690" dirty="0">
                 <a:solidFill>
                   <a:srgbClr val="202124"/>
                 </a:solidFill>
@@ -12432,17 +12383,17 @@
               </a:rPr>
               <a:t>       b.company_name AS intermediary_1,</a:t>
             </a:r>
-            <a:endParaRPr lang="en-US" sz="740" dirty="0"/>
-          </a:p>
-          <a:p>
-            <a:pPr indent="0" marL="0">
-              <a:lnSpc>
-                <a:spcPct val="112000"/>
-              </a:lnSpc>
-              <a:buNone/>
-            </a:pPr>
-            <a:r>
-              <a:rPr lang="en-US" sz="740" dirty="0">
+            <a:endParaRPr lang="en-US" sz="690" dirty="0"/>
+          </a:p>
+          <a:p>
+            <a:pPr indent="0" marL="0">
+              <a:lnSpc>
+                <a:spcPct val="106000"/>
+              </a:lnSpc>
+              <a:buNone/>
+            </a:pPr>
+            <a:r>
+              <a:rPr lang="en-US" sz="690" dirty="0">
                 <a:solidFill>
                   <a:srgbClr val="202124"/>
                 </a:solidFill>
@@ -12452,17 +12403,17 @@
               </a:rPr>
               <a:t>       c.company_name AS intermediary_2,</a:t>
             </a:r>
-            <a:endParaRPr lang="en-US" sz="740" dirty="0"/>
-          </a:p>
-          <a:p>
-            <a:pPr indent="0" marL="0">
-              <a:lnSpc>
-                <a:spcPct val="112000"/>
-              </a:lnSpc>
-              <a:buNone/>
-            </a:pPr>
-            <a:r>
-              <a:rPr lang="en-US" sz="740" dirty="0">
+            <a:endParaRPr lang="en-US" sz="690" dirty="0"/>
+          </a:p>
+          <a:p>
+            <a:pPr indent="0" marL="0">
+              <a:lnSpc>
+                <a:spcPct val="106000"/>
+              </a:lnSpc>
+              <a:buNone/>
+            </a:pPr>
+            <a:r>
+              <a:rPr lang="en-US" sz="690" dirty="0">
                 <a:solidFill>
                   <a:srgbClr val="202124"/>
                 </a:solidFill>
@@ -12472,7 +12423,7 @@
               </a:rPr>
               <a:t>       (t1.amount_usd + t2.amount_usd + t3.amount_usd) AS total_circular_volume_usd;</a:t>
             </a:r>
-            <a:endParaRPr lang="en-US" sz="740" dirty="0"/>
+            <a:endParaRPr lang="en-US" sz="690" dirty="0"/>
           </a:p>
         </p:txBody>
       </p:sp>

--- a/slides/doc-ref-07-editable-slides.pptx
+++ b/slides/doc-ref-07-editable-slides.pptx
@@ -1753,7 +1753,7 @@
                 <a:ea typeface="Arial" pitchFamily="34" charset="-122"/>
                 <a:cs typeface="Arial" pitchFamily="34" charset="-120"/>
               </a:rPr>
-              <a:t>The topology separates centralized ingress and governance from isolated execution spokes (Pattern A: Pooled Shared Runtime and Pattern B &amp; Pattern C), ensuring deterministic policy enforcement and unified observability across the Google Cloud organization.</a:t>
+              <a:t>The topology separates centralized ingress and governance from isolated execution spokes, ensuring deterministic policy enforcement and unified observability across the Google Cloud organization.</a:t>
             </a:r>
             <a:endParaRPr lang="en-US" sz="960" dirty="0"/>
           </a:p>
@@ -2166,7 +2166,7 @@
                 <a:ea typeface="Arial" pitchFamily="34" charset="-122"/>
                 <a:cs typeface="Arial" pitchFamily="34" charset="-120"/>
               </a:rPr>
-              <a:t>Shared Control Plane &amp; Multi-Tenant Governance Perimeter</a:t>
+              <a:t>VPC Service Controls Multimodal GraphRAG Perimeter</a:t>
             </a:r>
             <a:endParaRPr lang="en-US" sz="420" dirty="0"/>
           </a:p>
@@ -2237,7 +2237,7 @@
                 <a:ea typeface="Arial" pitchFamily="34" charset="-122"/>
                 <a:cs typeface="Arial" pitchFamily="34" charset="-120"/>
               </a:rPr>
-              <a:t>VPC &amp; 5-Hop Cryptographic Context Chain</a:t>
+              <a:t>Shared VPC</a:t>
             </a:r>
             <a:endParaRPr lang="en-US" sz="420" dirty="0"/>
           </a:p>
@@ -2308,7 +2308,7 @@
                 <a:ea typeface="Arial" pitchFamily="34" charset="-122"/>
                 <a:cs typeface="Arial" pitchFamily="34" charset="-120"/>
               </a:rPr>
-              <a:t>Pattern A: Pooled Shared Runtime</a:t>
+              <a:t>Spoke 1: Sequential Multimodal Ingestion Pipeline</a:t>
             </a:r>
             <a:endParaRPr lang="en-US" sz="385" dirty="0"/>
           </a:p>
@@ -2379,7 +2379,7 @@
                 <a:ea typeface="Arial" pitchFamily="34" charset="-122"/>
                 <a:cs typeface="Arial" pitchFamily="34" charset="-120"/>
               </a:rPr>
-              <a:t>Pattern B (Sovereign Silos) &amp; Pattern C</a:t>
+              <a:t>Spoke 2: Hybrid Spanner Graph ISO GQL + ANN Vector RRF Retrieval</a:t>
             </a:r>
             <a:endParaRPr lang="en-US" sz="385" dirty="0"/>
           </a:p>
@@ -2450,7 +2450,7 @@
                 <a:ea typeface="Arial" pitchFamily="34" charset="-122"/>
                 <a:cs typeface="Arial" pitchFamily="34" charset="-120"/>
               </a:rPr>
-              <a:t>Tenant Pool (Shared Runtime)</a:t>
+              <a:t>Multimodal Ingestion Spoke</a:t>
             </a:r>
             <a:endParaRPr lang="en-US" sz="540" dirty="0"/>
           </a:p>
@@ -2470,7 +2470,7 @@
                 <a:ea typeface="Arial" pitchFamily="34" charset="-122"/>
                 <a:cs typeface="Arial" pitchFamily="34" charset="-120"/>
               </a:rPr>
-              <a:t>FinVault (8k Cap) &amp; RetailStream (4k Cap)</a:t>
+              <a:t>PDF, audio &amp; chart entity extraction with deterministic entity linking</a:t>
             </a:r>
             <a:endParaRPr lang="en-US" sz="540" dirty="0"/>
           </a:p>
@@ -2541,7 +2541,7 @@
                 <a:ea typeface="Arial" pitchFamily="34" charset="-122"/>
                 <a:cs typeface="Arial" pitchFamily="34" charset="-120"/>
               </a:rPr>
-              <a:t>Dedicated Sovereign Tenant Project</a:t>
+              <a:t>Hybrid GraphRAG Search Spoke</a:t>
             </a:r>
             <a:endParaRPr lang="en-US" sz="540" dirty="0"/>
           </a:p>
@@ -2561,7 +2561,7 @@
                 <a:ea typeface="Arial" pitchFamily="34" charset="-122"/>
                 <a:cs typeface="Arial" pitchFamily="34" charset="-120"/>
               </a:rPr>
-              <a:t>VPC-SC + IAM PAB + CMEK Kill-Switch + PSC</a:t>
+              <a:t>Multi-hop ISO GQL traversal fused with ANN cosine similarity via RRF</a:t>
             </a:r>
             <a:endParaRPr lang="en-US" sz="540" dirty="0"/>
           </a:p>
@@ -2632,7 +2632,7 @@
                 <a:ea typeface="Arial" pitchFamily="34" charset="-122"/>
                 <a:cs typeface="Arial" pitchFamily="34" charset="-120"/>
               </a:rPr>
-              <a:t>Routing hub (Hop 1 &amp; Hop 2 PEP/PDP)</a:t>
+              <a:t>Coordinator &amp; Multimodal Ingress Hub</a:t>
             </a:r>
             <a:endParaRPr lang="en-US" sz="480" dirty="0"/>
           </a:p>
@@ -2652,7 +2652,7 @@
                 <a:ea typeface="Arial" pitchFamily="34" charset="-122"/>
                 <a:cs typeface="Arial" pitchFamily="34" charset="-120"/>
               </a:rPr>
-              <a:t>Central ingress, OBO+DPoP &amp; Discovery Engine Agent Catalog filter</a:t>
+              <a:t>Ingress security, session state &amp; Coordinator Agent routing</a:t>
             </a:r>
             <a:endParaRPr lang="en-US" sz="480" dirty="0"/>
           </a:p>
@@ -2723,7 +2723,7 @@
                 <a:ea typeface="Arial" pitchFamily="34" charset="-122"/>
                 <a:cs typeface="Arial" pitchFamily="34" charset="-120"/>
               </a:rPr>
-              <a:t>Central governance and FinOps observability hub</a:t>
+              <a:t>Central governance and graph lineage hub</a:t>
             </a:r>
             <a:endParaRPr lang="en-US" sz="460" dirty="0"/>
           </a:p>
@@ -3454,6 +3454,7 @@
               <a:srgbClr val="5F6368"/>
             </a:solidFill>
             <a:prstDash val="solid"/>
+            <a:headEnd type="triangle" w="sm" len="sm"/>
           </a:ln>
         </p:spPr>
       </p:sp>
@@ -3501,6 +3502,7 @@
               <a:srgbClr val="5F6368"/>
             </a:solidFill>
             <a:prstDash val="solid"/>
+            <a:headEnd type="triangle" w="sm" len="sm"/>
           </a:ln>
         </p:spPr>
       </p:sp>
@@ -3686,6 +3688,7 @@
               <a:srgbClr val="5F6368"/>
             </a:solidFill>
             <a:prstDash val="solid"/>
+            <a:headEnd type="triangle" w="sm" len="sm"/>
           </a:ln>
         </p:spPr>
       </p:sp>
@@ -3733,6 +3736,7 @@
               <a:srgbClr val="5F6368"/>
             </a:solidFill>
             <a:prstDash val="solid"/>
+            <a:headEnd type="triangle" w="sm" len="sm"/>
           </a:ln>
         </p:spPr>
       </p:sp>
@@ -3849,7 +3853,7 @@
                 <a:ea typeface="Arial" pitchFamily="34" charset="-122"/>
                 <a:cs typeface="Arial" pitchFamily="34" charset="-120"/>
               </a:rPr>
-              <a:t>Competing B2B Tenants</a:t>
+              <a:t>Financial Analyst</a:t>
             </a:r>
             <a:endParaRPr lang="en-US" sz="560" dirty="0"/>
           </a:p>
@@ -3869,7 +3873,7 @@
                 <a:ea typeface="Arial" pitchFamily="34" charset="-122"/>
                 <a:cs typeface="Arial" pitchFamily="34" charset="-120"/>
               </a:rPr>
-              <a:t>FinVault (OIDC) &amp; RetailStream (Entra)</a:t>
+              <a:t>Multimodal Query &amp; Upload UI</a:t>
             </a:r>
             <a:endParaRPr lang="en-US" sz="560" dirty="0"/>
           </a:p>
@@ -3984,7 +3988,7 @@
                 <a:ea typeface="Arial" pitchFamily="34" charset="-122"/>
                 <a:cs typeface="Arial" pitchFamily="34" charset="-120"/>
               </a:rPr>
-              <a:t>Cloud Load Balancing</a:t>
+              <a:t>Global HTTPS Ingress</a:t>
             </a:r>
             <a:endParaRPr lang="en-US" sz="435" dirty="0"/>
           </a:p>
@@ -4099,7 +4103,7 @@
                 <a:ea typeface="Arial" pitchFamily="34" charset="-122"/>
                 <a:cs typeface="Arial" pitchFamily="34" charset="-120"/>
               </a:rPr>
-              <a:t>Cross-Pattern Breach Alerts</a:t>
+              <a:t>Data Exfiltration &amp; DLP Posture</a:t>
             </a:r>
             <a:endParaRPr lang="en-US" sz="435" dirty="0"/>
           </a:p>
@@ -4214,7 +4218,7 @@
                 <a:ea typeface="Arial" pitchFamily="34" charset="-122"/>
                 <a:cs typeface="Arial" pitchFamily="34" charset="-120"/>
               </a:rPr>
-              <a:t>Zero-PII OTel &amp; Chargeback</a:t>
+              <a:t>GQL Hop Depth &amp; RRF Telemetry</a:t>
             </a:r>
             <a:endParaRPr lang="en-US" sz="435" dirty="0"/>
           </a:p>
@@ -4329,7 +4333,7 @@
                 <a:ea typeface="Arial" pitchFamily="34" charset="-122"/>
                 <a:cs typeface="Arial" pitchFamily="34" charset="-120"/>
               </a:rPr>
-              <a:t>Agent Identity (2LO/3LO)</a:t>
+              <a:t>Interleaved Tenant Graph ACLs</a:t>
             </a:r>
             <a:endParaRPr lang="en-US" sz="435" dirty="0"/>
           </a:p>
@@ -4424,7 +4428,7 @@
                 <a:ea typeface="Arial" pitchFamily="34" charset="-122"/>
                 <a:cs typeface="Arial" pitchFamily="34" charset="-120"/>
               </a:rPr>
-              <a:t>Vertex AI Agent Engine</a:t>
+              <a:t>Extraction &amp; Upsert Agents</a:t>
             </a:r>
             <a:endParaRPr lang="en-US" sz="435" dirty="0"/>
           </a:p>
@@ -4444,7 +4448,7 @@
                 <a:ea typeface="Arial" pitchFamily="34" charset="-122"/>
                 <a:cs typeface="Arial" pitchFamily="34" charset="-120"/>
               </a:rPr>
-              <a:t>gVisor + temp:tenant_id</a:t>
+              <a:t>Sequential Cloud Run Pipeline</a:t>
             </a:r>
             <a:endParaRPr lang="en-US" sz="435" dirty="0"/>
           </a:p>
@@ -4539,7 +4543,7 @@
                 <a:ea typeface="Arial" pitchFamily="34" charset="-122"/>
                 <a:cs typeface="Arial" pitchFamily="34" charset="-120"/>
               </a:rPr>
-              <a:t>MCP servers</a:t>
+              <a:t>Entity Resolution MCP</a:t>
             </a:r>
             <a:endParaRPr lang="en-US" sz="435" dirty="0"/>
           </a:p>
@@ -4559,7 +4563,7 @@
                 <a:ea typeface="Arial" pitchFamily="34" charset="-122"/>
                 <a:cs typeface="Arial" pitchFamily="34" charset="-120"/>
               </a:rPr>
-              <a:t>2LO + 3LO OIDC/Entra</a:t>
+              <a:t>Canonical Company ID Linker</a:t>
             </a:r>
             <a:endParaRPr lang="en-US" sz="435" dirty="0"/>
           </a:p>
@@ -4654,7 +4658,7 @@
                 <a:ea typeface="Arial" pitchFamily="34" charset="-122"/>
                 <a:cs typeface="Arial" pitchFamily="34" charset="-120"/>
               </a:rPr>
-              <a:t>Shared AlloyDB</a:t>
+              <a:t>Cloud Storage &amp; Spanner</a:t>
             </a:r>
             <a:endParaRPr lang="en-US" sz="435" dirty="0"/>
           </a:p>
@@ -4674,7 +4678,7 @@
                 <a:ea typeface="Arial" pitchFamily="34" charset="-122"/>
                 <a:cs typeface="Arial" pitchFamily="34" charset="-120"/>
               </a:rPr>
-              <a:t>FORCE Row-Level Security</a:t>
+              <a:t>Raw Assets &amp; Interleaved Graph</a:t>
             </a:r>
             <a:endParaRPr lang="en-US" sz="435" dirty="0"/>
           </a:p>
@@ -4789,7 +4793,7 @@
                 <a:ea typeface="Arial" pitchFamily="34" charset="-122"/>
                 <a:cs typeface="Arial" pitchFamily="34" charset="-120"/>
               </a:rPr>
-              <a:t>Dedicated Silo + Agent Alpha</a:t>
+              <a:t>GraphRAG Search Agent + Memory</a:t>
             </a:r>
             <a:endParaRPr lang="en-US" sz="435" dirty="0"/>
           </a:p>
@@ -4884,7 +4888,7 @@
                 <a:ea typeface="Arial" pitchFamily="34" charset="-122"/>
                 <a:cs typeface="Arial" pitchFamily="34" charset="-120"/>
               </a:rPr>
-              <a:t>MCP servers</a:t>
+              <a:t>Spanner Graph MCP</a:t>
             </a:r>
             <a:endParaRPr lang="en-US" sz="435" dirty="0"/>
           </a:p>
@@ -4904,7 +4908,7 @@
                 <a:ea typeface="Arial" pitchFamily="34" charset="-122"/>
                 <a:cs typeface="Arial" pitchFamily="34" charset="-120"/>
               </a:rPr>
-              <a:t>Local Silo 3LO Connectors</a:t>
+              <a:t>Bounded ISO GQL + Vector Tool</a:t>
             </a:r>
             <a:endParaRPr lang="en-US" sz="435" dirty="0"/>
           </a:p>
@@ -4999,7 +5003,7 @@
                 <a:ea typeface="Arial" pitchFamily="34" charset="-122"/>
                 <a:cs typeface="Arial" pitchFamily="34" charset="-120"/>
               </a:rPr>
-              <a:t>CMEK Datastore</a:t>
+              <a:t>Cloud Spanner Graph</a:t>
             </a:r>
             <a:endParaRPr lang="en-US" sz="435" dirty="0"/>
           </a:p>
@@ -5019,7 +5023,7 @@
                 <a:ea typeface="Arial" pitchFamily="34" charset="-122"/>
                 <a:cs typeface="Arial" pitchFamily="34" charset="-120"/>
               </a:rPr>
-              <a:t>AlloyDB, BQ &amp; KMS 423 Lock</a:t>
+              <a:t>ISO GQL + 768-d RRF Scoring</a:t>
             </a:r>
             <a:endParaRPr lang="en-US" sz="435" dirty="0"/>
           </a:p>
@@ -5114,7 +5118,7 @@
                 <a:ea typeface="Arial" pitchFamily="34" charset="-122"/>
                 <a:cs typeface="Arial" pitchFamily="34" charset="-120"/>
               </a:rPr>
-              <a:t>Cloud Run</a:t>
+              <a:t>Cloud Run Coordinator</a:t>
             </a:r>
             <a:endParaRPr lang="en-US" sz="435" dirty="0"/>
           </a:p>
@@ -5134,7 +5138,7 @@
                 <a:ea typeface="Arial" pitchFamily="34" charset="-122"/>
                 <a:cs typeface="Arial" pitchFamily="34" charset="-120"/>
               </a:rPr>
-              <a:t>Topology Router &amp; Agent Catalog PDP</a:t>
+              <a:t>Routes Ingestion vs RRF Search</a:t>
             </a:r>
             <a:endParaRPr lang="en-US" sz="435" dirty="0"/>
           </a:p>
@@ -5229,7 +5233,7 @@
                 <a:ea typeface="Arial" pitchFamily="34" charset="-122"/>
                 <a:cs typeface="Arial" pitchFamily="34" charset="-120"/>
               </a:rPr>
-              <a:t>Model Armor</a:t>
+              <a:t>Model Armor &amp; DLP</a:t>
             </a:r>
             <a:endParaRPr lang="en-US" sz="435" dirty="0"/>
           </a:p>
@@ -5249,7 +5253,7 @@
                 <a:ea typeface="Arial" pitchFamily="34" charset="-122"/>
                 <a:cs typeface="Arial" pitchFamily="34" charset="-120"/>
               </a:rPr>
-              <a:t>Tenant Rai Filters &amp; SDP PII</a:t>
+              <a:t>Redacts PII Before Graph Upsert</a:t>
             </a:r>
             <a:endParaRPr lang="en-US" sz="435" dirty="0"/>
           </a:p>
@@ -5344,7 +5348,7 @@
                 <a:ea typeface="Arial" pitchFamily="34" charset="-122"/>
                 <a:cs typeface="Arial" pitchFamily="34" charset="-120"/>
               </a:rPr>
-              <a:t>Gemini 2.5 Pro</a:t>
+              <a:t>Gemini 2.5 Pro &amp; Emb</a:t>
             </a:r>
             <a:endParaRPr lang="en-US" sz="435" dirty="0"/>
           </a:p>
@@ -5364,7 +5368,7 @@
                 <a:ea typeface="Arial" pitchFamily="34" charset="-122"/>
                 <a:cs typeface="Arial" pitchFamily="34" charset="-120"/>
               </a:rPr>
-              <a:t>90% Prefix Cache Savings</a:t>
+              <a:t>Entity Extraction &amp; 768-d Vectors</a:t>
             </a:r>
             <a:endParaRPr lang="en-US" sz="435" dirty="0"/>
           </a:p>
@@ -5459,7 +5463,7 @@
                 <a:ea typeface="Arial" pitchFamily="34" charset="-122"/>
                 <a:cs typeface="Arial" pitchFamily="34" charset="-120"/>
               </a:rPr>
-              <a:t>VPC-SC &amp; Model Armor</a:t>
+              <a:t>Model Armor</a:t>
             </a:r>
             <a:endParaRPr lang="en-US" sz="435" dirty="0"/>
           </a:p>
@@ -5479,7 +5483,7 @@
                 <a:ea typeface="Arial" pitchFamily="34" charset="-122"/>
                 <a:cs typeface="Arial" pitchFamily="34" charset="-120"/>
               </a:rPr>
-              <a:t>Sovereign Silo Guardrails</a:t>
+              <a:t>Citation &amp; Hallucination Guard</a:t>
             </a:r>
             <a:endParaRPr lang="en-US" sz="435" dirty="0"/>
           </a:p>
@@ -5574,7 +5578,7 @@
                 <a:ea typeface="Arial" pitchFamily="34" charset="-122"/>
                 <a:cs typeface="Arial" pitchFamily="34" charset="-120"/>
               </a:rPr>
-              <a:t>Gemini / Gemma 3</a:t>
+              <a:t>Gemini 2.5 Pro</a:t>
             </a:r>
             <a:endParaRPr lang="en-US" sz="435" dirty="0"/>
           </a:p>
@@ -5594,7 +5598,7 @@
                 <a:ea typeface="Arial" pitchFamily="34" charset="-122"/>
                 <a:cs typeface="Arial" pitchFamily="34" charset="-120"/>
               </a:rPr>
-              <a:t>Claude 3.7 or Private GKE</a:t>
+              <a:t>Multi-Hop Synthesis Engine</a:t>
             </a:r>
             <a:endParaRPr lang="en-US" sz="435" dirty="0"/>
           </a:p>
@@ -5709,7 +5713,7 @@
                 <a:ea typeface="Arial" pitchFamily="34" charset="-122"/>
                 <a:cs typeface="Arial" pitchFamily="34" charset="-120"/>
               </a:rPr>
-              <a:t>WAF &amp; IAP Header Strip</a:t>
+              <a:t>WAF &amp; Upload Rate Limiting</a:t>
             </a:r>
             <a:endParaRPr lang="en-US" sz="435" dirty="0"/>
           </a:p>
@@ -5824,7 +5828,7 @@
                 <a:ea typeface="Arial" pitchFamily="34" charset="-122"/>
                 <a:cs typeface="Arial" pitchFamily="34" charset="-120"/>
               </a:rPr>
-              <a:t>Ingress Prompt Screen</a:t>
+              <a:t>Multimodal Prompt Guardrails</a:t>
             </a:r>
             <a:endParaRPr lang="en-US" sz="435" dirty="0"/>
           </a:p>
@@ -5919,7 +5923,7 @@
                 <a:ea typeface="Arial" pitchFamily="34" charset="-122"/>
                 <a:cs typeface="Arial" pitchFamily="34" charset="-120"/>
               </a:rPr>
-              <a:t>RFC 8693 OBO + DPoP</a:t>
+              <a:t>IAP &amp; Enterprise OIDC</a:t>
             </a:r>
             <a:endParaRPr lang="en-US" sz="435" dirty="0"/>
           </a:p>
@@ -5939,7 +5943,7 @@
                 <a:ea typeface="Arial" pitchFamily="34" charset="-122"/>
                 <a:cs typeface="Arial" pitchFamily="34" charset="-120"/>
               </a:rPr>
-              <a:t>Sender-Constrained JWT</a:t>
+              <a:t>Analyst Tenant Auth</a:t>
             </a:r>
             <a:endParaRPr lang="en-US" sz="435" dirty="0"/>
           </a:p>
@@ -6562,7 +6566,7 @@
                 <a:ea typeface="Arial" pitchFamily="34" charset="-122"/>
                 <a:cs typeface="Arial" pitchFamily="34" charset="-120"/>
               </a:rPr>
-              <a:t>Security, OTel &amp; FinOps chargeback telemetry</a:t>
+              <a:t>Graph audit &amp; RRF latency spans</a:t>
             </a:r>
             <a:endParaRPr lang="en-US" sz="420" dirty="0"/>
           </a:p>
@@ -6576,8 +6580,8 @@
         </p:nvSpPr>
         <p:spPr>
           <a:xfrm>
-            <a:off x="5295290" y="4659782"/>
-            <a:ext cx="468173" cy="114300"/>
+            <a:off x="5221224" y="4659782"/>
+            <a:ext cx="616306" cy="114300"/>
           </a:xfrm>
           <a:prstGeom prst="roundRect">
             <a:avLst>
@@ -6609,7 +6613,7 @@
                 <a:ea typeface="Arial" pitchFamily="34" charset="-122"/>
                 <a:cs typeface="Arial" pitchFamily="34" charset="-120"/>
               </a:rPr>
-              <a:t>Scoped MCP &amp; RAG</a:t>
+              <a:t>Canonical Entity Match</a:t>
             </a:r>
             <a:endParaRPr lang="en-US" sz="420" dirty="0"/>
           </a:p>
@@ -6656,7 +6660,7 @@
                 <a:ea typeface="Arial" pitchFamily="34" charset="-122"/>
                 <a:cs typeface="Arial" pitchFamily="34" charset="-120"/>
               </a:rPr>
-              <a:t>SET LOCAL current_tenant</a:t>
+              <a:t>Upsert Nodes &amp; GQL Edges</a:t>
             </a:r>
             <a:endParaRPr lang="en-US" sz="420" dirty="0"/>
           </a:p>
@@ -6670,8 +6674,8 @@
         </p:nvSpPr>
         <p:spPr>
           <a:xfrm>
-            <a:off x="7295998" y="4659782"/>
-            <a:ext cx="542239" cy="114300"/>
+            <a:off x="7184441" y="4659782"/>
+            <a:ext cx="764438" cy="114300"/>
           </a:xfrm>
           <a:prstGeom prst="roundRect">
             <a:avLst>
@@ -6703,7 +6707,7 @@
                 <a:ea typeface="Arial" pitchFamily="34" charset="-122"/>
                 <a:cs typeface="Arial" pitchFamily="34" charset="-120"/>
               </a:rPr>
-              <a:t>Air-Gapped Silo RAG</a:t>
+              <a:t>Reciprocal Rank Fusion (RRF)</a:t>
             </a:r>
             <a:endParaRPr lang="en-US" sz="420" dirty="0"/>
           </a:p>
@@ -6717,8 +6721,8 @@
         </p:nvSpPr>
         <p:spPr>
           <a:xfrm>
-            <a:off x="7184441" y="5206594"/>
-            <a:ext cx="764438" cy="114300"/>
+            <a:off x="7197242" y="5206594"/>
+            <a:ext cx="739750" cy="114300"/>
           </a:xfrm>
           <a:prstGeom prst="roundRect">
             <a:avLst>
@@ -6750,7 +6754,7 @@
                 <a:ea typeface="Arial" pitchFamily="34" charset="-122"/>
                 <a:cs typeface="Arial" pitchFamily="34" charset="-120"/>
               </a:rPr>
-              <a:t>CMEK-Encrypted State &amp; Tools</a:t>
+              <a:t>3-Hop Bounded ISO GQL Query</a:t>
             </a:r>
             <a:endParaRPr lang="en-US" sz="420" dirty="0"/>
           </a:p>
@@ -6764,8 +6768,8 @@
         </p:nvSpPr>
         <p:spPr>
           <a:xfrm>
-            <a:off x="4423867" y="5337353"/>
-            <a:ext cx="517550" cy="114300"/>
+            <a:off x="4289450" y="5574182"/>
+            <a:ext cx="786384" cy="114300"/>
           </a:xfrm>
           <a:prstGeom prst="roundRect">
             <a:avLst>
@@ -6797,7 +6801,7 @@
                 <a:ea typeface="Arial" pitchFamily="34" charset="-122"/>
                 <a:cs typeface="Arial" pitchFamily="34" charset="-120"/>
               </a:rPr>
-              <a:t>Generates response</a:t>
+              <a:t>Extract nodes &amp; 768-d vectors</a:t>
             </a:r>
             <a:endParaRPr lang="en-US" sz="420" dirty="0"/>
           </a:p>
@@ -6844,7 +6848,7 @@
                 <a:ea typeface="Arial" pitchFamily="34" charset="-122"/>
                 <a:cs typeface="Arial" pitchFamily="34" charset="-120"/>
               </a:rPr>
-              <a:t>Sanitized response with SDP redaction</a:t>
+              <a:t>Synthesized RRF citation response</a:t>
             </a:r>
             <a:endParaRPr lang="en-US" sz="420" dirty="0"/>
           </a:p>
@@ -6891,7 +6895,7 @@
                 <a:ea typeface="Arial" pitchFamily="34" charset="-122"/>
                 <a:cs typeface="Arial" pitchFamily="34" charset="-120"/>
               </a:rPr>
-              <a:t>Route by tenant tier (Pool, Silo or PSC)</a:t>
+              <a:t>Dispatch to Ingestion or Hybrid RRF Spoke</a:t>
             </a:r>
             <a:endParaRPr lang="en-US" sz="420" dirty="0"/>
           </a:p>
@@ -6905,8 +6909,8 @@
         </p:nvSpPr>
         <p:spPr>
           <a:xfrm>
-            <a:off x="4964278" y="2980944"/>
-            <a:ext cx="640994" cy="114300"/>
+            <a:off x="4915814" y="2980944"/>
+            <a:ext cx="739750" cy="114300"/>
           </a:xfrm>
           <a:prstGeom prst="roundRect">
             <a:avLst>
@@ -6938,7 +6942,7 @@
                 <a:ea typeface="Arial" pitchFamily="34" charset="-122"/>
                 <a:cs typeface="Arial" pitchFamily="34" charset="-120"/>
               </a:rPr>
-              <a:t>OBO + DPoP verification</a:t>
+              <a:t>Verify analyst tenant scope</a:t>
             </a:r>
             <a:endParaRPr lang="en-US" sz="420" dirty="0"/>
           </a:p>
@@ -6952,8 +6956,8 @@
         </p:nvSpPr>
         <p:spPr>
           <a:xfrm>
-            <a:off x="4448556" y="4445813"/>
-            <a:ext cx="468173" cy="114300"/>
+            <a:off x="4497934" y="4445813"/>
+            <a:ext cx="369418" cy="114300"/>
           </a:xfrm>
           <a:prstGeom prst="roundRect">
             <a:avLst>
@@ -6985,7 +6989,7 @@
                 <a:ea typeface="Arial" pitchFamily="34" charset="-122"/>
                 <a:cs typeface="Arial" pitchFamily="34" charset="-120"/>
               </a:rPr>
-              <a:t>Sanitize request</a:t>
+              <a:t>Screen asset</a:t>
             </a:r>
             <a:endParaRPr lang="en-US" sz="420" dirty="0"/>
           </a:p>
@@ -6999,8 +7003,8 @@
         </p:nvSpPr>
         <p:spPr>
           <a:xfrm>
-            <a:off x="4436669" y="4625950"/>
-            <a:ext cx="492862" cy="114300"/>
+            <a:off x="4387291" y="4625950"/>
+            <a:ext cx="591617" cy="114300"/>
           </a:xfrm>
           <a:prstGeom prst="roundRect">
             <a:avLst>
@@ -7032,7 +7036,7 @@
                 <a:ea typeface="Arial" pitchFamily="34" charset="-122"/>
                 <a:cs typeface="Arial" pitchFamily="34" charset="-120"/>
               </a:rPr>
-              <a:t>Sanitize response</a:t>
+              <a:t>Verify entity triples</a:t>
             </a:r>
             <a:endParaRPr lang="en-US" sz="420" dirty="0"/>
           </a:p>
@@ -7079,7 +7083,7 @@
                 <a:ea typeface="Arial" pitchFamily="34" charset="-122"/>
                 <a:cs typeface="Arial" pitchFamily="34" charset="-120"/>
               </a:rPr>
-              <a:t>Header &amp; WAF policies</a:t>
+              <a:t>WAF &amp; upload policies</a:t>
             </a:r>
             <a:endParaRPr lang="en-US" sz="420" dirty="0"/>
           </a:p>
@@ -7707,7 +7711,7 @@
                 <a:ea typeface="Arial" pitchFamily="34" charset="-122"/>
                 <a:cs typeface="Arial" pitchFamily="34" charset="-120"/>
               </a:rPr>
-              <a:t>Shared Control Plane &amp; Multi-Tenant Governance Perimeter
+              <a:t>VPC Service Controls Multimodal GraphRAG Perimeter
 </a:t>
             </a:r>
             <a:pPr indent="0" marL="0">
@@ -7791,7 +7795,7 @@
                 <a:ea typeface="Arial" pitchFamily="34" charset="-122"/>
                 <a:cs typeface="Arial" pitchFamily="34" charset="-120"/>
               </a:rPr>
-              <a:t>• Shared Control Plane &amp; Multi-Tenant Governance Perimeter: </a:t>
+              <a:t>• VPC Service Controls Multimodal GraphRAG Perimeter: </a:t>
             </a:r>
             <a:pPr indent="0" marL="0">
               <a:lnSpc>
@@ -7874,7 +7878,7 @@
                 <a:ea typeface="Arial" pitchFamily="34" charset="-122"/>
                 <a:cs typeface="Arial" pitchFamily="34" charset="-120"/>
               </a:rPr>
-              <a:t>Routing hub
+              <a:t>Coordinator &amp; Multimodal Ingress Hub
 </a:t>
             </a:r>
             <a:pPr indent="0" marL="0">
@@ -7993,7 +7997,7 @@
                 <a:ea typeface="Arial" pitchFamily="34" charset="-122"/>
                 <a:cs typeface="Arial" pitchFamily="34" charset="-120"/>
               </a:rPr>
-              <a:t>• Google Cloud Armor &amp; RFC 8693 OBO + DPoP: </a:t>
+              <a:t>• Google Cloud Armor: </a:t>
             </a:r>
             <a:pPr indent="0" marL="0">
               <a:lnSpc>
@@ -8010,7 +8014,7 @@
                 <a:ea typeface="Arial" pitchFamily="34" charset="-122"/>
                 <a:cs typeface="Arial" pitchFamily="34" charset="-120"/>
               </a:rPr>
-              <a:t>Enforces edge policy rules and screens payloads before reaching the runtime.
+              <a:t>Enforces edge policy rules before reaching the runtime.
 </a:t>
             </a:r>
             <a:pPr indent="0" marL="0">
@@ -8045,7 +8049,7 @@
                 <a:ea typeface="Arial" pitchFamily="34" charset="-122"/>
                 <a:cs typeface="Arial" pitchFamily="34" charset="-120"/>
               </a:rPr>
-              <a:t>Authenticates callers and verifies identity and scope claims before routing.
+              <a:t>Screens incoming prompts and verifies policy constraints at the routing hub.
 </a:t>
             </a:r>
             <a:pPr indent="0" marL="0">
@@ -8063,7 +8067,7 @@
                 <a:ea typeface="Arial" pitchFamily="34" charset="-122"/>
                 <a:cs typeface="Arial" pitchFamily="34" charset="-120"/>
               </a:rPr>
-              <a:t>• Cloud Run: </a:t>
+              <a:t>• IAP &amp; Enterprise OIDC: </a:t>
             </a:r>
             <a:pPr indent="0" marL="0">
               <a:lnSpc>
@@ -8080,7 +8084,7 @@
                 <a:ea typeface="Arial" pitchFamily="34" charset="-122"/>
                 <a:cs typeface="Arial" pitchFamily="34" charset="-120"/>
               </a:rPr>
-              <a:t>Serverless routing service that validates caller tokens and dispatches requests to the target execution spoke.</a:t>
+              <a:t>Authenticates callers and binds cryptographic identity and scope claims before routing.</a:t>
             </a:r>
             <a:endParaRPr lang="en-US" sz="690" dirty="0"/>
           </a:p>
@@ -8146,7 +8150,7 @@
                 <a:ea typeface="Arial" pitchFamily="34" charset="-122"/>
                 <a:cs typeface="Arial" pitchFamily="34" charset="-120"/>
               </a:rPr>
-              <a:t>Central governance and FinOps observability hub
+              <a:t>Central governance and graph lineage hub
 </a:t>
             </a:r>
             <a:pPr indent="0" marL="0">
@@ -8467,7 +8471,7 @@
                 <a:ea typeface="Arial" pitchFamily="34" charset="-122"/>
                 <a:cs typeface="Arial" pitchFamily="34" charset="-120"/>
               </a:rPr>
-              <a:t>• VPC &amp; 5-Hop Cryptographic Context Chain: </a:t>
+              <a:t>• Shared VPC • Sequential Ingestion &amp; Hybrid RRF Query Planes: </a:t>
             </a:r>
             <a:pPr indent="0" marL="0">
               <a:lnSpc>
@@ -8550,7 +8554,7 @@
                 <a:ea typeface="Arial" pitchFamily="34" charset="-122"/>
                 <a:cs typeface="Arial" pitchFamily="34" charset="-120"/>
               </a:rPr>
-              <a:t>Tenant Pool &amp; Dedicated Sovereign Tenant Project
+              <a:t>Multimodal Ingestion Spoke &amp; Hybrid GraphRAG Search Spoke
 </a:t>
             </a:r>
             <a:pPr indent="0" marL="0">
@@ -8565,7 +8569,7 @@
                 <a:ea typeface="Arial" pitchFamily="34" charset="-122"/>
                 <a:cs typeface="Arial" pitchFamily="34" charset="-120"/>
               </a:rPr>
-              <a:t>Isolated Google Cloud execution spokes.</a:t>
+              <a:t>Isolated Google Cloud execution spokes hosting agent runtimes, MCP tools, and datastores.</a:t>
             </a:r>
             <a:endParaRPr lang="en-US" sz="750" dirty="0"/>
           </a:p>
@@ -8634,7 +8638,7 @@
                 <a:ea typeface="Arial" pitchFamily="34" charset="-122"/>
                 <a:cs typeface="Arial" pitchFamily="34" charset="-120"/>
               </a:rPr>
-              <a:t>• Vertex AI Agent Engine: </a:t>
+              <a:t>• Extraction &amp; Upsert Agents / Vertex AI Agent Engine: </a:t>
             </a:r>
             <a:pPr indent="0" marL="0">
               <a:lnSpc>
@@ -8651,7 +8655,7 @@
                 <a:ea typeface="Arial" pitchFamily="34" charset="-122"/>
                 <a:cs typeface="Arial" pitchFamily="34" charset="-120"/>
               </a:rPr>
-              <a:t>Core execution environment orchestrating reasoning, memory, and tool execution.
+              <a:t>Core execution environments orchestrating reasoning, memory, and tool execution across left and right spokes.
 </a:t>
             </a:r>
             <a:pPr indent="0" marL="0">
@@ -8669,7 +8673,7 @@
                 <a:ea typeface="Arial" pitchFamily="34" charset="-122"/>
                 <a:cs typeface="Arial" pitchFamily="34" charset="-120"/>
               </a:rPr>
-              <a:t>• Model Armor: </a:t>
+              <a:t>• Model Armor &amp; DLP / Model Armor: </a:t>
             </a:r>
             <a:pPr indent="0" marL="0">
               <a:lnSpc>
@@ -8686,7 +8690,7 @@
                 <a:ea typeface="Arial" pitchFamily="34" charset="-122"/>
                 <a:cs typeface="Arial" pitchFamily="34" charset="-120"/>
               </a:rPr>
-              <a:t>Screens prompts and model outputs within the execution boundary to enforce safety and DLP policies.
+              <a:t>Screens prompts and model outputs within each spoke boundary to enforce safety and DLP policies.
 </a:t>
             </a:r>
             <a:pPr indent="0" marL="0">
@@ -8704,7 +8708,7 @@
                 <a:ea typeface="Arial" pitchFamily="34" charset="-122"/>
                 <a:cs typeface="Arial" pitchFamily="34" charset="-120"/>
               </a:rPr>
-              <a:t>• MCP servers: </a:t>
+              <a:t>• Entity Resolution MCP / Spanner Graph MCP: </a:t>
             </a:r>
             <a:pPr indent="0" marL="0">
               <a:lnSpc>
@@ -8721,7 +8725,7 @@
                 <a:ea typeface="Arial" pitchFamily="34" charset="-122"/>
                 <a:cs typeface="Arial" pitchFamily="34" charset="-120"/>
               </a:rPr>
-              <a:t>Serverless tool interface providing standardized, scoped access to enterprise systems.
+              <a:t>Serverless tool interfaces providing standardized, scoped access to enterprise systems.
 </a:t>
             </a:r>
             <a:pPr indent="0" marL="0">
@@ -8739,7 +8743,7 @@
                 <a:ea typeface="Arial" pitchFamily="34" charset="-122"/>
                 <a:cs typeface="Arial" pitchFamily="34" charset="-120"/>
               </a:rPr>
-              <a:t>• Shared AlloyDB: </a:t>
+              <a:t>• Cloud Storage &amp; Spanner / Cloud Spanner Graph: </a:t>
             </a:r>
             <a:pPr indent="0" marL="0">
               <a:lnSpc>
@@ -8756,7 +8760,7 @@
                 <a:ea typeface="Arial" pitchFamily="34" charset="-122"/>
                 <a:cs typeface="Arial" pitchFamily="34" charset="-120"/>
               </a:rPr>
-              <a:t>Isolated persistence layer enforcing access boundaries, vector namespaces, and encryption at rest.</a:t>
+              <a:t>Isolated persistence layers enforcing access boundaries, vector namespaces, and encryption at rest.</a:t>
             </a:r>
             <a:endParaRPr lang="en-US" sz="690" dirty="0"/>
           </a:p>
@@ -8879,7 +8883,7 @@
                 <a:ea typeface="Arial" pitchFamily="34" charset="-122"/>
                 <a:cs typeface="Arial" pitchFamily="34" charset="-120"/>
               </a:rPr>
-              <a:t>A caller sends a request to External Application Load Balancer in the Routing hub.
+              <a:t>A caller sends a request to External Application Load Balancer in the Coordinator &amp; Multimodal Ingress Hub.
 </a:t>
             </a:r>
             <a:pPr indent="0" marL="0">
@@ -8914,7 +8918,7 @@
                 <a:ea typeface="Arial" pitchFamily="34" charset="-122"/>
                 <a:cs typeface="Arial" pitchFamily="34" charset="-120"/>
               </a:rPr>
-              <a:t>After passing policy and security checks across Google Cloud Armor, Model Armor, and RFC 8693 OBO + DPoP, the request is forwarded to Cloud Run.
+              <a:t>After passing policy and security checks across Google Cloud Armor, Model Armor, and IAP &amp; Enterprise OIDC, the request is forwarded to Cloud Run Coordinator.
 </a:t>
             </a:r>
             <a:pPr indent="0" marL="0">
@@ -8949,7 +8953,7 @@
                 <a:ea typeface="Arial" pitchFamily="34" charset="-122"/>
                 <a:cs typeface="Arial" pitchFamily="34" charset="-120"/>
               </a:rPr>
-              <a:t>Cloud Run verifies the caller's identity claims, attaches scoped execution metadata, and routes the request to the target execution spoke.
+              <a:t>Cloud Run Coordinator verifies the caller's identity claims, attaches scoped execution metadata, and routes the request to the target execution spoke.
 </a:t>
             </a:r>
             <a:pPr indent="0" marL="0">
@@ -8984,7 +8988,7 @@
                 <a:ea typeface="Arial" pitchFamily="34" charset="-122"/>
                 <a:cs typeface="Arial" pitchFamily="34" charset="-120"/>
               </a:rPr>
-              <a:t>Within Tenant Pool, the runtime orchestrates execution across four deterministic sub-steps.
+              <a:t>Within Multimodal Ingestion Spoke, the runtime orchestrates execution across four deterministic sub-steps.
 </a:t>
             </a:r>
             <a:pPr indent="0" marL="0">
@@ -9054,7 +9058,7 @@
                 <a:ea typeface="Arial" pitchFamily="34" charset="-122"/>
                 <a:cs typeface="Arial" pitchFamily="34" charset="-120"/>
               </a:rPr>
-              <a:t>Grounded context retrieval: Queries the datastore via Scoped MCP &amp; RAG.
+              <a:t>Grounded context retrieval: Queries the datastore via Canonical Entity Match.
 </a:t>
             </a:r>
             <a:pPr indent="0" marL="0">
@@ -9089,7 +9093,7 @@
                 <a:ea typeface="Arial" pitchFamily="34" charset="-122"/>
                 <a:cs typeface="Arial" pitchFamily="34" charset="-120"/>
               </a:rPr>
-              <a:t>Scoped tool invocation: Executes external tool operations via SET LOCAL current_tenant.
+              <a:t>Scoped tool invocation: Executes external tool operations via Upsert Nodes &amp; GQL Edges.
 </a:t>
             </a:r>
             <a:pPr indent="0" marL="0">
@@ -9159,7 +9163,7 @@
                 <a:ea typeface="Arial" pitchFamily="34" charset="-122"/>
                 <a:cs typeface="Arial" pitchFamily="34" charset="-120"/>
               </a:rPr>
-              <a:t>Vertex AI Agent Engine sends the validated, context-enriched prompt to Gemini 2.5 Pro to synthesize a grounded response.
+              <a:t>Extraction &amp; Upsert Agents sends the validated, context-enriched prompt to Gemini 2.5 Pro &amp; Emb to synthesize a grounded response.
 </a:t>
             </a:r>
             <a:pPr indent="0" marL="0">
@@ -9194,7 +9198,7 @@
                 <a:ea typeface="Arial" pitchFamily="34" charset="-122"/>
                 <a:cs typeface="Arial" pitchFamily="34" charset="-120"/>
               </a:rPr>
-              <a:t>Vertex AI Agent Engine passes the generated output through Model Armor for final output sanitization and policy enforcement.
+              <a:t>Extraction &amp; Upsert Agents passes the generated output through Model Armor &amp; DLP for final output sanitization and policy enforcement.
 </a:t>
             </a:r>
             <a:pPr indent="0" marL="0">
@@ -9229,7 +9233,7 @@
                 <a:ea typeface="Arial" pitchFamily="34" charset="-122"/>
                 <a:cs typeface="Arial" pitchFamily="34" charset="-120"/>
               </a:rPr>
-              <a:t>The verified response returns to the caller through the Routing hub, while structured OpenTelemetry audit and FinOps spans stream to the Central governance and FinOps observability hub.
+              <a:t>The verified response returns to the caller through the Coordinator &amp; Multimodal Ingress Hub, while structured OpenTelemetry audit and FinOps spans stream to the Central governance and graph lineage hub.
 </a:t>
             </a:r>
             <a:endParaRPr lang="en-US" sz="730" dirty="0"/>
@@ -9914,7 +9918,7 @@
                 <a:ea typeface="Arial" pitchFamily="34" charset="-122"/>
                 <a:cs typeface="Arial" pitchFamily="34" charset="-120"/>
               </a:rPr>
-              <a:t>Enforces deterministic tenant and domain boundaries via VPC &amp; 5-Hop Cryptographic Context Chain and Shared AlloyDB, preventing cross-spoke state or credential leakage.
+              <a:t>Enforces deterministic tenant and domain boundaries via Shared VPC • Sequential Ingestion &amp; Hybrid RRF Query Planes and Cloud Storage &amp; Spanner, preventing cross-spoke state or credential leakage.
 </a:t>
             </a:r>
             <a:pPr indent="0" marL="0">
@@ -10244,7 +10248,7 @@
                 <a:ea typeface="Arial" pitchFamily="34" charset="-122"/>
                 <a:cs typeface="Arial" pitchFamily="34" charset="-120"/>
               </a:rPr>
-              <a:t>The baseline topology routes traffic through External Application Load Balancer and Cloud Run under Shared Control Plane &amp; Multi-Tenant Governance Perimeter.
+              <a:t>The baseline topology routes traffic through External Application Load Balancer and Cloud Run Coordinator under VPC Service Controls Multimodal GraphRAG Perimeter.
 </a:t>
             </a:r>
             <a:pPr indent="0" marL="0">
@@ -10297,7 +10301,7 @@
                 <a:ea typeface="Arial" pitchFamily="34" charset="-122"/>
                 <a:cs typeface="Arial" pitchFamily="34" charset="-120"/>
               </a:rPr>
-              <a:t>Vertex AI Agent Engine &amp; MCP servers placement — </a:t>
+              <a:t>Extraction &amp; Upsert Agents &amp; Entity Resolution MCP placement — </a:t>
             </a:r>
             <a:pPr indent="0" marL="0">
               <a:lnSpc>
@@ -10314,7 +10318,7 @@
                 <a:ea typeface="Arial" pitchFamily="34" charset="-122"/>
                 <a:cs typeface="Arial" pitchFamily="34" charset="-120"/>
               </a:rPr>
-              <a:t>Each execution spoke pairs Vertex AI Agent Engine with MCP servers and Shared AlloyDB.
+              <a:t>Each execution spoke pairs Extraction &amp; Upsert Agents with Entity Resolution MCP and Cloud Storage &amp; Spanner.
 </a:t>
             </a:r>
             <a:pPr indent="0" marL="0">
@@ -10349,7 +10353,7 @@
                 <a:ea typeface="Arial" pitchFamily="34" charset="-122"/>
                 <a:cs typeface="Arial" pitchFamily="34" charset="-120"/>
               </a:rPr>
-              <a:t>Spoke-local MCP servers: Maximizes blast-radius containment by keeping credentials, service accounts, and data access strictly inside Pattern A: Pooled Shared Runtime.; Shared enterprise tool gateway: Consolidates stateless, non-tenant-specific MCP tools into a central hub project via Private Service Connect.
+              <a:t>Spoke-local Entity Resolution MCP: Maximizes blast-radius containment by keeping credentials, service accounts, and data access strictly inside.; Shared enterprise tool gateway: Consolidates stateless, non-tenant-specific MCP tools into a central hub project via Private Service Connect.
 </a:t>
             </a:r>
             <a:endParaRPr lang="en-US" sz="810" dirty="0"/>
@@ -10790,7 +10794,7 @@
                 <a:ea typeface="Arial" pitchFamily="34" charset="-122"/>
                 <a:cs typeface="Arial" pitchFamily="34" charset="-120"/>
               </a:rPr>
-              <a:t>• Google Cloud Armor &amp; Model Armor</a:t>
+              <a:t>• Google Cloud Armor &amp; Model Armor &amp; DLP</a:t>
             </a:r>
             <a:endParaRPr lang="en-US" sz="710" dirty="0"/>
           </a:p>
@@ -10807,7 +10811,7 @@
                 <a:ea typeface="Arial" pitchFamily="34" charset="-122"/>
                 <a:cs typeface="Arial" pitchFamily="34" charset="-120"/>
               </a:rPr>
-              <a:t>• Shared AlloyDB &amp; Central IAM &amp; PAB</a:t>
+              <a:t>• Cloud Storage &amp; Spanner &amp; Central IAM &amp; PAB</a:t>
             </a:r>
             <a:endParaRPr lang="en-US" sz="710" dirty="0"/>
           </a:p>
@@ -10902,7 +10906,7 @@
                 <a:ea typeface="Arial" pitchFamily="34" charset="-122"/>
                 <a:cs typeface="Arial" pitchFamily="34" charset="-120"/>
               </a:rPr>
-              <a:t>• Google Cloud Armor &amp; Model Armor: </a:t>
+              <a:t>• Google Cloud Armor &amp; Model Armor &amp; DLP: </a:t>
             </a:r>
             <a:pPr indent="0" marL="0">
               <a:buNone/>
@@ -10916,7 +10920,7 @@
                 <a:ea typeface="Arial" pitchFamily="34" charset="-122"/>
                 <a:cs typeface="Arial" pitchFamily="34" charset="-120"/>
               </a:rPr>
-              <a:t>Strip client-supplied privilege headers at the edge, verify caller identity claims, and screen prompts and completions with Model Armor.
+              <a:t>Strip client-supplied privilege headers at the edge, verify caller identity claims, and screen prompts and completions with Model Armor &amp; DLP.
 </a:t>
             </a:r>
             <a:pPr indent="0" marL="0">
@@ -10931,7 +10935,7 @@
                 <a:ea typeface="Arial" pitchFamily="34" charset="-122"/>
                 <a:cs typeface="Arial" pitchFamily="34" charset="-120"/>
               </a:rPr>
-              <a:t>• Shared AlloyDB &amp; Central IAM &amp; PAB: </a:t>
+              <a:t>• Cloud Storage &amp; Spanner &amp; Central IAM &amp; PAB: </a:t>
             </a:r>
             <a:pPr indent="0" marL="0">
               <a:buNone/>
@@ -10945,7 +10949,7 @@
                 <a:ea typeface="Arial" pitchFamily="34" charset="-122"/>
                 <a:cs typeface="Arial" pitchFamily="34" charset="-120"/>
               </a:rPr>
-              <a:t>Encrypt state at rest with Customer-Managed Encryption Keys and enforce least-privilege access scopes on Shared AlloyDB.</a:t>
+              <a:t>Encrypt state at rest with Customer-Managed Encryption Keys and enforce least-privilege access scopes on Cloud Storage &amp; Spanner.</a:t>
             </a:r>
             <a:endParaRPr lang="en-US" sz="700" dirty="0"/>
           </a:p>
@@ -11075,7 +11079,7 @@
                 <a:ea typeface="Arial" pitchFamily="34" charset="-122"/>
                 <a:cs typeface="Arial" pitchFamily="34" charset="-120"/>
               </a:rPr>
-              <a:t>• External Application Load Balancer &amp; Cloud Run</a:t>
+              <a:t>• External Application Load Balancer &amp; Cloud Run Coordinator</a:t>
             </a:r>
             <a:endParaRPr lang="en-US" sz="710" dirty="0"/>
           </a:p>
@@ -11092,7 +11096,7 @@
                 <a:ea typeface="Arial" pitchFamily="34" charset="-122"/>
                 <a:cs typeface="Arial" pitchFamily="34" charset="-120"/>
               </a:rPr>
-              <a:t>• Vertex AI Agent Engine &amp; MCP servers</a:t>
+              <a:t>• Extraction &amp; Upsert Agents &amp; Entity Resolution MCP</a:t>
             </a:r>
             <a:endParaRPr lang="en-US" sz="710" dirty="0"/>
           </a:p>
@@ -11109,7 +11113,7 @@
                 <a:ea typeface="Arial" pitchFamily="34" charset="-122"/>
                 <a:cs typeface="Arial" pitchFamily="34" charset="-120"/>
               </a:rPr>
-              <a:t>• Shared AlloyDB</a:t>
+              <a:t>• Cloud Storage &amp; Spanner</a:t>
             </a:r>
             <a:endParaRPr lang="en-US" sz="710" dirty="0"/>
           </a:p>
@@ -11175,7 +11179,7 @@
                 <a:ea typeface="Arial" pitchFamily="34" charset="-122"/>
                 <a:cs typeface="Arial" pitchFamily="34" charset="-120"/>
               </a:rPr>
-              <a:t>• External Application Load Balancer &amp; Cloud Run: </a:t>
+              <a:t>• External Application Load Balancer &amp; Cloud Run Coordinator: </a:t>
             </a:r>
             <a:pPr indent="0" marL="0">
               <a:buNone/>
@@ -11189,7 +11193,7 @@
                 <a:ea typeface="Arial" pitchFamily="34" charset="-122"/>
                 <a:cs typeface="Arial" pitchFamily="34" charset="-120"/>
               </a:rPr>
-              <a:t>Deploy Cloud Run across multi-region serverless Network Endpoint Groups (NEGs) with minimum warm instances to eliminate cold-start latency spikes.
+              <a:t>Deploy Cloud Run Coordinator across multi-region serverless Network Endpoint Groups (NEGs) with minimum warm instances to eliminate cold-start latency spikes.
 </a:t>
             </a:r>
             <a:pPr indent="0" marL="0">
@@ -11204,7 +11208,7 @@
                 <a:ea typeface="Arial" pitchFamily="34" charset="-122"/>
                 <a:cs typeface="Arial" pitchFamily="34" charset="-120"/>
               </a:rPr>
-              <a:t>• Vertex AI Agent Engine &amp; MCP servers: </a:t>
+              <a:t>• Extraction &amp; Upsert Agents &amp; Entity Resolution MCP: </a:t>
             </a:r>
             <a:pPr indent="0" marL="0">
               <a:buNone/>
@@ -11218,7 +11222,7 @@
                 <a:ea typeface="Arial" pitchFamily="34" charset="-122"/>
                 <a:cs typeface="Arial" pitchFamily="34" charset="-120"/>
               </a:rPr>
-              <a:t>Enforce bounded retry budgets with exponential backoff, per-tool execution timeouts, and stateless horizontal scaling on MCP servers.
+              <a:t>Enforce bounded retry budgets with exponential backoff, per-tool execution timeouts, and stateless horizontal scaling on Entity Resolution MCP.
 </a:t>
             </a:r>
             <a:pPr indent="0" marL="0">
@@ -11233,7 +11237,7 @@
                 <a:ea typeface="Arial" pitchFamily="34" charset="-122"/>
                 <a:cs typeface="Arial" pitchFamily="34" charset="-120"/>
               </a:rPr>
-              <a:t>• Shared AlloyDB: </a:t>
+              <a:t>• Cloud Storage &amp; Spanner: </a:t>
             </a:r>
             <a:pPr indent="0" marL="0">
               <a:buNone/>
@@ -11247,7 +11251,7 @@
                 <a:ea typeface="Arial" pitchFamily="34" charset="-122"/>
                 <a:cs typeface="Arial" pitchFamily="34" charset="-120"/>
               </a:rPr>
-              <a:t>Enable regional high availability and Point-in-Time Recovery on Shared AlloyDB with automated backup verification.</a:t>
+              <a:t>Enable regional high availability and Point-in-Time Recovery on Cloud Storage &amp; Spanner with automated backup verification.</a:t>
             </a:r>
             <a:endParaRPr lang="en-US" sz="700" dirty="0"/>
           </a:p>
@@ -11491,7 +11495,7 @@
                 <a:ea typeface="Arial" pitchFamily="34" charset="-122"/>
                 <a:cs typeface="Arial" pitchFamily="34" charset="-120"/>
               </a:rPr>
-              <a:t>Provision Tenant Pool and Dedicated Sovereign Tenant Project spokes through versioned Terraform modules that atomically bind perimeters, IAM roles, and runtime configurations.
+              <a:t>Provision Multimodal Ingestion Spoke and Hybrid GraphRAG Search Spoke spokes through versioned Terraform modules that atomically bind perimeters, IAM roles, and runtime configurations.
 </a:t>
             </a:r>
             <a:pPr indent="0" marL="0">
@@ -11679,7 +11683,7 @@
                 <a:ea typeface="Arial" pitchFamily="34" charset="-122"/>
                 <a:cs typeface="Arial" pitchFamily="34" charset="-120"/>
               </a:rPr>
-              <a:t>• Gemini 2.5 Pro Context Caching</a:t>
+              <a:t>• Gemini 2.5 Pro &amp; Emb Context Caching</a:t>
             </a:r>
             <a:endParaRPr lang="en-US" sz="710" dirty="0"/>
           </a:p>
@@ -11696,7 +11700,7 @@
                 <a:ea typeface="Arial" pitchFamily="34" charset="-122"/>
                 <a:cs typeface="Arial" pitchFamily="34" charset="-120"/>
               </a:rPr>
-              <a:t>• RFC 8693 OBO + DPoP &amp; MCP servers</a:t>
+              <a:t>• IAP &amp; Enterprise OIDC &amp; Entity Resolution MCP</a:t>
             </a:r>
             <a:endParaRPr lang="en-US" sz="710" dirty="0"/>
           </a:p>
@@ -11779,7 +11783,7 @@
                 <a:ea typeface="Arial" pitchFamily="34" charset="-122"/>
                 <a:cs typeface="Arial" pitchFamily="34" charset="-120"/>
               </a:rPr>
-              <a:t>• Gemini 2.5 Pro Context Caching: </a:t>
+              <a:t>• Gemini 2.5 Pro &amp; Emb Context Caching: </a:t>
             </a:r>
             <a:pPr indent="0" marL="0">
               <a:buNone/>
@@ -11808,7 +11812,7 @@
                 <a:ea typeface="Arial" pitchFamily="34" charset="-122"/>
                 <a:cs typeface="Arial" pitchFamily="34" charset="-120"/>
               </a:rPr>
-              <a:t>• RFC 8693 OBO + DPoP &amp; MCP servers: </a:t>
+              <a:t>• IAP &amp; Enterprise OIDC &amp; Entity Resolution MCP: </a:t>
             </a:r>
             <a:pPr indent="0" marL="0">
               <a:buNone/>

--- a/slides/doc-ref-07-editable-slides.pptx
+++ b/slides/doc-ref-07-editable-slides.pptx
@@ -507,7 +507,21 @@
           <a:p>
             <a:r>
               <a:rPr lang="en-US" dirty="0"/>
-              <a:t/>
+              <a:t>Welcome everyone. In this six-slide executive and technical briefing, we are walking through Multimodal GraphRAG Resource Orchestration with Spanner Graph &amp; Vertex AI.</a:t>
+            </a:r>
+            <a:endParaRPr lang="en-US" dirty="0"/>
+          </a:p>
+          <a:p>
+            <a:r>
+              <a:rPr lang="en-US" dirty="0"/>
+              <a:t>In this briefing, we are looking at how to combine knowledge graphs and vector search inside a single Google Cloud Spanner Graph database—allowing AI agents to reason accurately across complex multi-hop relationships like supply chains, financial networks, and clinical pathways alongside documents, images, and audio.</a:t>
+            </a:r>
+            <a:endParaRPr lang="en-US" dirty="0"/>
+          </a:p>
+          <a:p>
+            <a:r>
+              <a:rPr lang="en-US" dirty="0"/>
+              <a:t>With our business goal and architectural thesis set, let's turn to Slide 2 to examine the complete Figure 1 Google Cloud Hub-and-Spoke blueprint.</a:t>
             </a:r>
             <a:endParaRPr lang="en-US" dirty="0"/>
           </a:p>
@@ -595,7 +609,21 @@
           <a:p>
             <a:r>
               <a:rPr lang="en-US" dirty="0"/>
-              <a:t/>
+              <a:t>Building on the executive overview we just covered on Slide 1, this diagram gives us the complete end-to-end physical map of the system on Google Cloud.</a:t>
+            </a:r>
+            <a:endParaRPr lang="en-US" dirty="0"/>
+          </a:p>
+          <a:p>
+            <a:r>
+              <a:rPr lang="en-US" dirty="0"/>
+              <a:t>Here in Figure 1 is our complete Google Cloud physical blueprint. User queries enter through the blue Routing Hub via Cloud Armor and Identity-Aware Proxy, get orchestrated by our ADK 2.0 Reasoning Agent in the green Governance Hub, and execute combined graph-traversal and vector-similarity queries inside Spanner Graph and Vertex AI across the bottom execution spokes.</a:t>
+            </a:r>
+            <a:endParaRPr lang="en-US" dirty="0"/>
+          </a:p>
+          <a:p>
+            <a:r>
+              <a:rPr lang="en-US" dirty="0"/>
+              <a:t>Now that we see where each component sits in Figure 1, let's move to Slide 3 to walk through how a live request flows across these services step by step.</a:t>
             </a:r>
             <a:endParaRPr lang="en-US" dirty="0"/>
           </a:p>
@@ -683,7 +711,21 @@
           <a:p>
             <a:r>
               <a:rPr lang="en-US" dirty="0"/>
-              <a:t/>
+              <a:t>Taking the physical components from the Figure 1 blueprint on Slide 2, this slide unpacks the exact step-by-step runtime workflow.</a:t>
+            </a:r>
+            <a:endParaRPr lang="en-US" dirty="0"/>
+          </a:p>
+          <a:p>
+            <a:r>
+              <a:rPr lang="en-US" dirty="0"/>
+              <a:t>Walking through the six steps on this slide shows why combining graph and vector retrieval is so powerful in practice. Unstructured files arriving in Cloud Storage are parsed into multimodal embeddings by Vertex AI and linked as typed nodes and edges inside Spanner Graph—so when a user asks a complex question, the agent retrieves both semantic matches and exact multi-hop relationship chains in one transaction.</a:t>
+            </a:r>
+            <a:endParaRPr lang="en-US" dirty="0"/>
+          </a:p>
+          <a:p>
+            <a:r>
+              <a:rPr lang="en-US" dirty="0"/>
+              <a:t>Having seen how the components interact step by step on Slide 3, let's turn to Slide 4 to see how this architecture solves a concrete enterprise customer use case.</a:t>
             </a:r>
             <a:endParaRPr lang="en-US" dirty="0"/>
           </a:p>
@@ -771,7 +813,21 @@
           <a:p>
             <a:r>
               <a:rPr lang="en-US" dirty="0"/>
-              <a:t/>
+              <a:t>Following our step-by-step technical workflow on Slide 3, this slide connects the architecture directly to tangible business value and the managed Google Cloud services that power it.</a:t>
+            </a:r>
+            <a:endParaRPr lang="en-US" dirty="0"/>
+          </a:p>
+          <a:p>
+            <a:r>
+              <a:rPr lang="en-US" dirty="0"/>
+              <a:t>This slide connects that technical workflow to a concrete business outcome. Standard vector-only RAG often fails when an answer depends on connecting three or four indirect entities across different documents; by unifying GQL graph traversal and cosine vector search inside Spanner Graph, enterprise teams eliminate hallucinations while avoiding the operational cost of syncing separate graph and vector databases.</a:t>
+            </a:r>
+            <a:endParaRPr lang="en-US" dirty="0"/>
+          </a:p>
+          <a:p>
+            <a:r>
+              <a:rPr lang="en-US" dirty="0"/>
+              <a:t>Once business and technical leaders see how the use case works on Slide 4, the natural next question is: how does this compare to alternative designs, and what are the trade-offs? Let's look at Slide 5.</a:t>
             </a:r>
             <a:endParaRPr lang="en-US" dirty="0"/>
           </a:p>
@@ -859,7 +915,21 @@
           <a:p>
             <a:r>
               <a:rPr lang="en-US" dirty="0"/>
-              <a:t/>
+              <a:t>Building on the customer use case from Slide 4, this slide evaluates our architectural trade-offs so decision-makers have full confidence in why this design is recommended.</a:t>
+            </a:r>
+            <a:endParaRPr lang="en-US" dirty="0"/>
+          </a:p>
+          <a:p>
+            <a:r>
+              <a:rPr lang="en-US" dirty="0"/>
+              <a:t>Here we compare our unified Spanner Graph architecture against stitching together standalone graph and vector databases across latency, consistency, and operational overhead. The takeaway for decision-makers is simple: running graph and vector search inside one transactional engine removes dual-write drift and cuts multi-hop query latency significantly.</a:t>
+            </a:r>
+            <a:endParaRPr lang="en-US" dirty="0"/>
+          </a:p>
+          <a:p>
+            <a:r>
+              <a:rPr lang="en-US" dirty="0"/>
+              <a:t>With the architectural trade-offs clear here on Slide 5, let's turn to our final slide—Slide 6—to walk through the deployment checklist and next steps.</a:t>
             </a:r>
             <a:endParaRPr lang="en-US" dirty="0"/>
           </a:p>
@@ -947,7 +1017,21 @@
           <a:p>
             <a:r>
               <a:rPr lang="en-US" dirty="0"/>
-              <a:t/>
+              <a:t>Rounding out the design trade-offs from Slide 5, our closing slide transitions from architecture into hands-on production deployment.</a:t>
+            </a:r>
+            <a:endParaRPr lang="en-US" dirty="0"/>
+          </a:p>
+          <a:p>
+            <a:r>
+              <a:rPr lang="en-US" dirty="0"/>
+              <a:t>Finally, here is the practical deployment checklist and runnable schema setup so your engineering team can provision Spanner Graph and Vertex AI embeddings today.</a:t>
+            </a:r>
+            <a:endParaRPr lang="en-US" dirty="0"/>
+          </a:p>
+          <a:p>
+            <a:r>
+              <a:rPr lang="en-US" dirty="0"/>
+              <a:t>That concludes our six-slide briefing—let's open the floor for your questions or launch the interactive codebase workbench to inspect the implementation files directly.</a:t>
             </a:r>
             <a:endParaRPr lang="en-US" dirty="0"/>
           </a:p>

--- a/slides/doc-ref-07-editable-slides.pptx
+++ b/slides/doc-ref-07-editable-slides.pptx
@@ -616,7 +616,7 @@
           <a:p>
             <a:r>
               <a:rPr lang="en-US" dirty="0"/>
-              <a:t>Here in Figure 1 is our complete Google Cloud physical blueprint. User queries enter through the blue Routing Hub via Cloud Armor and Identity-Aware Proxy, get orchestrated by our ADK 2.0 Reasoning Agent in the green Governance Hub, and execute combined graph-traversal and vector-similarity queries inside Spanner Graph and Vertex AI across the bottom execution spokes.</a:t>
+              <a:t>Here in Figure 1 is our complete Google Cloud physical blueprint. User queries enter through the blue Routing Hub via Cloud Armor and Identity-Aware Proxy, get orchestrated by our ADK Reasoning Agent in the green Governance Hub, and execute combined graph-traversal and vector-similarity queries inside Spanner Graph and Vertex AI across the bottom execution spokes.</a:t>
             </a:r>
             <a:endParaRPr lang="en-US" dirty="0"/>
           </a:p>

--- a/slides/doc-ref-07-editable-slides.pptx
+++ b/slides/doc-ref-07-editable-slides.pptx
@@ -2546,7 +2546,7 @@
               <a:buNone/>
             </a:pPr>
             <a:r>
-              <a:rPr lang="en-US" sz="450" dirty="0">
+              <a:rPr lang="en-US" sz="450" b="1" dirty="0">
                 <a:solidFill>
                   <a:srgbClr val="202124"/>
                 </a:solidFill>
@@ -2637,7 +2637,7 @@
               <a:buNone/>
             </a:pPr>
             <a:r>
-              <a:rPr lang="en-US" sz="450" dirty="0">
+              <a:rPr lang="en-US" sz="450" b="1" dirty="0">
                 <a:solidFill>
                   <a:srgbClr val="202124"/>
                 </a:solidFill>
@@ -2728,7 +2728,7 @@
               <a:buNone/>
             </a:pPr>
             <a:r>
-              <a:rPr lang="en-US" sz="410" dirty="0">
+              <a:rPr lang="en-US" sz="410" b="1" dirty="0">
                 <a:solidFill>
                   <a:srgbClr val="202124"/>
                 </a:solidFill>

--- a/slides/doc-ref-07-editable-slides.pptx
+++ b/slides/doc-ref-07-editable-slides.pptx
@@ -9617,7 +9617,7 @@
                 <a:ea typeface="Arial" pitchFamily="34" charset="-122"/>
                 <a:cs typeface="Arial" pitchFamily="34" charset="-120"/>
               </a:rPr>
-              <a:t>Core Google Cloud service used in DOC-REF-07 to enforce production security, scalability, and observability.
+              <a:t>Globally distributed relational and property-graph database uniting GQL multi-hop traversal with vector search.
 </a:t>
             </a:r>
             <a:pPr indent="0" marL="0">
@@ -9652,7 +9652,7 @@
                 <a:ea typeface="Arial" pitchFamily="34" charset="-122"/>
                 <a:cs typeface="Arial" pitchFamily="34" charset="-120"/>
               </a:rPr>
-              <a:t>Core Google Cloud service used in DOC-REF-07 to enforce production security, scalability, and observability.
+              <a:t>Multimodal reasoning and high-dimensional embedding endpoints supporting 90% ContextCacheConfig prefix discounts and Provisioned Throughput.
 </a:t>
             </a:r>
             <a:pPr indent="0" marL="0">
@@ -9757,7 +9757,7 @@
                 <a:ea typeface="Arial" pitchFamily="34" charset="-122"/>
                 <a:cs typeface="Arial" pitchFamily="34" charset="-120"/>
               </a:rPr>
-              <a:t>Core Google Cloud service used in DOC-REF-07 to enforce production security, scalability, and observability.</a:t>
+              <a:t>CMEK-encrypted object storage hosting tenant-scoped multimodal corpora and hot-swappable runtime agent skill bundles.</a:t>
             </a:r>
             <a:endParaRPr lang="en-US" sz="810" dirty="0"/>
           </a:p>
@@ -12329,189 +12329,187 @@
           <a:ln/>
         </p:spPr>
         <p:txBody>
-          <a:bodyPr wrap="square" rtlCol="0" anchor="t">
-            <a:normAutofit/>
-          </a:bodyPr>
-          <a:lstStyle/>
-          <a:p>
-            <a:pPr indent="0" marL="0">
-              <a:lnSpc>
-                <a:spcPct val="106000"/>
-              </a:lnSpc>
-              <a:buNone/>
-            </a:pPr>
-            <a:r>
-              <a:rPr lang="en-US" sz="690" dirty="0">
-                <a:solidFill>
-                  <a:srgbClr val="202124"/>
-                </a:solidFill>
-                <a:latin typeface="Courier New" pitchFamily="34" charset="0"/>
-                <a:ea typeface="Courier New" pitchFamily="34" charset="-122"/>
-                <a:cs typeface="Courier New" pitchFamily="34" charset="-120"/>
+          <a:bodyPr wrap="square" lIns="0" tIns="0" rIns="0" bIns="0" rtlCol="0" anchor="t"/>
+          <a:lstStyle/>
+          <a:p>
+            <a:pPr indent="0" marL="0">
+              <a:lnSpc>
+                <a:spcPct val="108000"/>
+              </a:lnSpc>
+              <a:buNone/>
+            </a:pPr>
+            <a:r>
+              <a:rPr lang="en-US" sz="680" dirty="0">
+                <a:solidFill>
+                  <a:srgbClr val="188038"/>
+                </a:solidFill>
+                <a:latin typeface="Roboto Mono" pitchFamily="34" charset="0"/>
+                <a:ea typeface="Roboto Mono" pitchFamily="34" charset="-122"/>
+                <a:cs typeface="Roboto Mono" pitchFamily="34" charset="-120"/>
               </a:rPr>
               <a:t>GRAPH CorporateKnowledgeGraph</a:t>
             </a:r>
-            <a:endParaRPr lang="en-US" sz="690" dirty="0"/>
-          </a:p>
-          <a:p>
-            <a:pPr indent="0" marL="0">
-              <a:lnSpc>
-                <a:spcPct val="106000"/>
-              </a:lnSpc>
-              <a:buNone/>
-            </a:pPr>
-            <a:r>
-              <a:rPr lang="en-US" sz="690" dirty="0">
-                <a:solidFill>
-                  <a:srgbClr val="202124"/>
-                </a:solidFill>
-                <a:latin typeface="Courier New" pitchFamily="34" charset="0"/>
-                <a:ea typeface="Courier New" pitchFamily="34" charset="-122"/>
-                <a:cs typeface="Courier New" pitchFamily="34" charset="-120"/>
+            <a:endParaRPr lang="en-US" sz="680" dirty="0"/>
+          </a:p>
+          <a:p>
+            <a:pPr indent="0" marL="0">
+              <a:lnSpc>
+                <a:spcPct val="108000"/>
+              </a:lnSpc>
+              <a:buNone/>
+            </a:pPr>
+            <a:r>
+              <a:rPr lang="en-US" sz="680" dirty="0">
+                <a:solidFill>
+                  <a:srgbClr val="188038"/>
+                </a:solidFill>
+                <a:latin typeface="Roboto Mono" pitchFamily="34" charset="0"/>
+                <a:ea typeface="Roboto Mono" pitchFamily="34" charset="-122"/>
+                <a:cs typeface="Roboto Mono" pitchFamily="34" charset="-120"/>
               </a:rPr>
               <a:t>MATCH (a:Company {tenant_id: @tenant_id})-[t1:TRANSFERRED_TO]-&gt;(b:Company)</a:t>
             </a:r>
-            <a:endParaRPr lang="en-US" sz="690" dirty="0"/>
-          </a:p>
-          <a:p>
-            <a:pPr indent="0" marL="0">
-              <a:lnSpc>
-                <a:spcPct val="106000"/>
-              </a:lnSpc>
-              <a:buNone/>
-            </a:pPr>
-            <a:r>
-              <a:rPr lang="en-US" sz="690" dirty="0">
-                <a:solidFill>
-                  <a:srgbClr val="202124"/>
-                </a:solidFill>
-                <a:latin typeface="Courier New" pitchFamily="34" charset="0"/>
-                <a:ea typeface="Courier New" pitchFamily="34" charset="-122"/>
-                <a:cs typeface="Courier New" pitchFamily="34" charset="-120"/>
-              </a:rPr>
-              <a:t>      -[t2:TRANSFERRED_TO]-&gt;(c:Company)-[t3:TRANSFERRED_TO]-&gt;(a)</a:t>
-            </a:r>
-            <a:endParaRPr lang="en-US" sz="690" dirty="0"/>
-          </a:p>
-          <a:p>
-            <a:pPr indent="0" marL="0">
-              <a:lnSpc>
-                <a:spcPct val="106000"/>
-              </a:lnSpc>
-              <a:buNone/>
-            </a:pPr>
-            <a:r>
-              <a:rPr lang="en-US" sz="690" dirty="0">
-                <a:solidFill>
-                  <a:srgbClr val="202124"/>
-                </a:solidFill>
-                <a:latin typeface="Courier New" pitchFamily="34" charset="0"/>
-                <a:ea typeface="Courier New" pitchFamily="34" charset="-122"/>
-                <a:cs typeface="Courier New" pitchFamily="34" charset="-120"/>
+            <a:endParaRPr lang="en-US" sz="680" dirty="0"/>
+          </a:p>
+          <a:p>
+            <a:pPr indent="0" marL="0">
+              <a:lnSpc>
+                <a:spcPct val="108000"/>
+              </a:lnSpc>
+              <a:buNone/>
+            </a:pPr>
+            <a:r>
+              <a:rPr lang="en-US" sz="680" dirty="0">
+                <a:solidFill>
+                  <a:srgbClr val="188038"/>
+                </a:solidFill>
+                <a:latin typeface="Roboto Mono" pitchFamily="34" charset="0"/>
+                <a:ea typeface="Roboto Mono" pitchFamily="34" charset="-122"/>
+                <a:cs typeface="Roboto Mono" pitchFamily="34" charset="-120"/>
+              </a:rPr>
+              <a:t>      -[t2:TRANSFERRED_TO]-&gt;(c:Company)-[t3:TRANSFERRED_TO]-&gt;(a)</a:t>
+            </a:r>
+            <a:endParaRPr lang="en-US" sz="680" dirty="0"/>
+          </a:p>
+          <a:p>
+            <a:pPr indent="0" marL="0">
+              <a:lnSpc>
+                <a:spcPct val="108000"/>
+              </a:lnSpc>
+              <a:buNone/>
+            </a:pPr>
+            <a:r>
+              <a:rPr lang="en-US" sz="680" dirty="0">
+                <a:solidFill>
+                  <a:srgbClr val="188038"/>
+                </a:solidFill>
+                <a:latin typeface="Roboto Mono" pitchFamily="34" charset="0"/>
+                <a:ea typeface="Roboto Mono" pitchFamily="34" charset="-122"/>
+                <a:cs typeface="Roboto Mono" pitchFamily="34" charset="-120"/>
               </a:rPr>
               <a:t>WHERE t1.amount_usd + t2.amount_usd + t3.amount_usd &gt; 1000000</a:t>
             </a:r>
-            <a:endParaRPr lang="en-US" sz="690" dirty="0"/>
-          </a:p>
-          <a:p>
-            <a:pPr indent="0" marL="0">
-              <a:lnSpc>
-                <a:spcPct val="106000"/>
-              </a:lnSpc>
-              <a:buNone/>
-            </a:pPr>
-            <a:r>
-              <a:rPr lang="en-US" sz="690" dirty="0">
-                <a:solidFill>
-                  <a:srgbClr val="202124"/>
-                </a:solidFill>
-                <a:latin typeface="Courier New" pitchFamily="34" charset="0"/>
-                <a:ea typeface="Courier New" pitchFamily="34" charset="-122"/>
-                <a:cs typeface="Courier New" pitchFamily="34" charset="-120"/>
-              </a:rPr>
-              <a:t>  AND TIMESTAMP_DIFF(t3.tx_timestamp, t1.tx_timestamp, HOUR) &lt;= 24</a:t>
-            </a:r>
-            <a:endParaRPr lang="en-US" sz="690" dirty="0"/>
-          </a:p>
-          <a:p>
-            <a:pPr indent="0" marL="0">
-              <a:lnSpc>
-                <a:spcPct val="106000"/>
-              </a:lnSpc>
-              <a:buNone/>
-            </a:pPr>
-            <a:r>
-              <a:rPr lang="en-US" sz="690" dirty="0">
-                <a:solidFill>
-                  <a:srgbClr val="202124"/>
-                </a:solidFill>
-                <a:latin typeface="Courier New" pitchFamily="34" charset="0"/>
-                <a:ea typeface="Courier New" pitchFamily="34" charset="-122"/>
-                <a:cs typeface="Courier New" pitchFamily="34" charset="-120"/>
+            <a:endParaRPr lang="en-US" sz="680" dirty="0"/>
+          </a:p>
+          <a:p>
+            <a:pPr indent="0" marL="0">
+              <a:lnSpc>
+                <a:spcPct val="108000"/>
+              </a:lnSpc>
+              <a:buNone/>
+            </a:pPr>
+            <a:r>
+              <a:rPr lang="en-US" sz="680" dirty="0">
+                <a:solidFill>
+                  <a:srgbClr val="188038"/>
+                </a:solidFill>
+                <a:latin typeface="Roboto Mono" pitchFamily="34" charset="0"/>
+                <a:ea typeface="Roboto Mono" pitchFamily="34" charset="-122"/>
+                <a:cs typeface="Roboto Mono" pitchFamily="34" charset="-120"/>
+              </a:rPr>
+              <a:t>  AND TIMESTAMP_DIFF(t3.tx_timestamp, t1.tx_timestamp, HOUR) &lt;= 24</a:t>
+            </a:r>
+            <a:endParaRPr lang="en-US" sz="680" dirty="0"/>
+          </a:p>
+          <a:p>
+            <a:pPr indent="0" marL="0">
+              <a:lnSpc>
+                <a:spcPct val="108000"/>
+              </a:lnSpc>
+              <a:buNone/>
+            </a:pPr>
+            <a:r>
+              <a:rPr lang="en-US" sz="680" dirty="0">
+                <a:solidFill>
+                  <a:srgbClr val="188038"/>
+                </a:solidFill>
+                <a:latin typeface="Roboto Mono" pitchFamily="34" charset="0"/>
+                <a:ea typeface="Roboto Mono" pitchFamily="34" charset="-122"/>
+                <a:cs typeface="Roboto Mono" pitchFamily="34" charset="-120"/>
               </a:rPr>
               <a:t>RETURN a.company_name AS origin_entity,</a:t>
             </a:r>
-            <a:endParaRPr lang="en-US" sz="690" dirty="0"/>
-          </a:p>
-          <a:p>
-            <a:pPr indent="0" marL="0">
-              <a:lnSpc>
-                <a:spcPct val="106000"/>
-              </a:lnSpc>
-              <a:buNone/>
-            </a:pPr>
-            <a:r>
-              <a:rPr lang="en-US" sz="690" dirty="0">
-                <a:solidFill>
-                  <a:srgbClr val="202124"/>
-                </a:solidFill>
-                <a:latin typeface="Courier New" pitchFamily="34" charset="0"/>
-                <a:ea typeface="Courier New" pitchFamily="34" charset="-122"/>
-                <a:cs typeface="Courier New" pitchFamily="34" charset="-120"/>
-              </a:rPr>
-              <a:t>       b.company_name AS intermediary_1,</a:t>
-            </a:r>
-            <a:endParaRPr lang="en-US" sz="690" dirty="0"/>
-          </a:p>
-          <a:p>
-            <a:pPr indent="0" marL="0">
-              <a:lnSpc>
-                <a:spcPct val="106000"/>
-              </a:lnSpc>
-              <a:buNone/>
-            </a:pPr>
-            <a:r>
-              <a:rPr lang="en-US" sz="690" dirty="0">
-                <a:solidFill>
-                  <a:srgbClr val="202124"/>
-                </a:solidFill>
-                <a:latin typeface="Courier New" pitchFamily="34" charset="0"/>
-                <a:ea typeface="Courier New" pitchFamily="34" charset="-122"/>
-                <a:cs typeface="Courier New" pitchFamily="34" charset="-120"/>
-              </a:rPr>
-              <a:t>       c.company_name AS intermediary_2,</a:t>
-            </a:r>
-            <a:endParaRPr lang="en-US" sz="690" dirty="0"/>
-          </a:p>
-          <a:p>
-            <a:pPr indent="0" marL="0">
-              <a:lnSpc>
-                <a:spcPct val="106000"/>
-              </a:lnSpc>
-              <a:buNone/>
-            </a:pPr>
-            <a:r>
-              <a:rPr lang="en-US" sz="690" dirty="0">
-                <a:solidFill>
-                  <a:srgbClr val="202124"/>
-                </a:solidFill>
-                <a:latin typeface="Courier New" pitchFamily="34" charset="0"/>
-                <a:ea typeface="Courier New" pitchFamily="34" charset="-122"/>
-                <a:cs typeface="Courier New" pitchFamily="34" charset="-120"/>
-              </a:rPr>
-              <a:t>       (t1.amount_usd + t2.amount_usd + t3.amount_usd) AS total_circular_volume_usd;</a:t>
-            </a:r>
-            <a:endParaRPr lang="en-US" sz="690" dirty="0"/>
+            <a:endParaRPr lang="en-US" sz="680" dirty="0"/>
+          </a:p>
+          <a:p>
+            <a:pPr indent="0" marL="0">
+              <a:lnSpc>
+                <a:spcPct val="108000"/>
+              </a:lnSpc>
+              <a:buNone/>
+            </a:pPr>
+            <a:r>
+              <a:rPr lang="en-US" sz="680" dirty="0">
+                <a:solidFill>
+                  <a:srgbClr val="188038"/>
+                </a:solidFill>
+                <a:latin typeface="Roboto Mono" pitchFamily="34" charset="0"/>
+                <a:ea typeface="Roboto Mono" pitchFamily="34" charset="-122"/>
+                <a:cs typeface="Roboto Mono" pitchFamily="34" charset="-120"/>
+              </a:rPr>
+              <a:t>       b.company_name AS intermediary_1,</a:t>
+            </a:r>
+            <a:endParaRPr lang="en-US" sz="680" dirty="0"/>
+          </a:p>
+          <a:p>
+            <a:pPr indent="0" marL="0">
+              <a:lnSpc>
+                <a:spcPct val="108000"/>
+              </a:lnSpc>
+              <a:buNone/>
+            </a:pPr>
+            <a:r>
+              <a:rPr lang="en-US" sz="680" dirty="0">
+                <a:solidFill>
+                  <a:srgbClr val="188038"/>
+                </a:solidFill>
+                <a:latin typeface="Roboto Mono" pitchFamily="34" charset="0"/>
+                <a:ea typeface="Roboto Mono" pitchFamily="34" charset="-122"/>
+                <a:cs typeface="Roboto Mono" pitchFamily="34" charset="-120"/>
+              </a:rPr>
+              <a:t>       c.company_name AS intermediary_2,</a:t>
+            </a:r>
+            <a:endParaRPr lang="en-US" sz="680" dirty="0"/>
+          </a:p>
+          <a:p>
+            <a:pPr indent="0" marL="0">
+              <a:lnSpc>
+                <a:spcPct val="108000"/>
+              </a:lnSpc>
+              <a:buNone/>
+            </a:pPr>
+            <a:r>
+              <a:rPr lang="en-US" sz="680" dirty="0">
+                <a:solidFill>
+                  <a:srgbClr val="188038"/>
+                </a:solidFill>
+                <a:latin typeface="Roboto Mono" pitchFamily="34" charset="0"/>
+                <a:ea typeface="Roboto Mono" pitchFamily="34" charset="-122"/>
+                <a:cs typeface="Roboto Mono" pitchFamily="34" charset="-120"/>
+              </a:rPr>
+              <a:t>       (t1.amount_usd + t2.amount_usd + t3.amount_usd) AS total_circular_volume_usd;</a:t>
+            </a:r>
+            <a:endParaRPr lang="en-US" sz="680" dirty="0"/>
           </a:p>
         </p:txBody>
       </p:sp>
@@ -12595,17 +12593,17 @@
           <a:ln/>
         </p:spPr>
         <p:txBody>
-          <a:bodyPr wrap="square" rtlCol="0" anchor="t"/>
-          <a:lstStyle/>
-          <a:p>
-            <a:pPr indent="0" marL="0">
-              <a:lnSpc>
-                <a:spcPct val="118000"/>
-              </a:lnSpc>
-              <a:buNone/>
-            </a:pPr>
-            <a:r>
-              <a:rPr lang="en-US" sz="800" b="1" dirty="0">
+          <a:bodyPr wrap="square" lIns="0" tIns="0" rIns="0" bIns="0" rtlCol="0" anchor="t"/>
+          <a:lstStyle/>
+          <a:p>
+            <a:pPr indent="0" marL="0">
+              <a:lnSpc>
+                <a:spcPct val="120000"/>
+              </a:lnSpc>
+              <a:buNone/>
+            </a:pPr>
+            <a:r>
+              <a:rPr lang="en-US" sz="790" b="1" dirty="0">
                 <a:solidFill>
                   <a:srgbClr val="1A73E8"/>
                 </a:solidFill>
@@ -12617,12 +12615,12 @@
             </a:r>
             <a:pPr indent="0" marL="0">
               <a:lnSpc>
-                <a:spcPct val="118000"/>
-              </a:lnSpc>
-              <a:buNone/>
-            </a:pPr>
-            <a:r>
-              <a:rPr lang="en-US" sz="780" dirty="0">
+                <a:spcPct val="120000"/>
+              </a:lnSpc>
+              <a:buNone/>
+            </a:pPr>
+            <a:r>
+              <a:rPr lang="en-US" sz="770" dirty="0">
                 <a:solidFill>
                   <a:srgbClr val="3C4043"/>
                 </a:solidFill>
@@ -12630,17 +12628,19 @@
                 <a:ea typeface="Arial" pitchFamily="34" charset="-122"/>
                 <a:cs typeface="Arial" pitchFamily="34" charset="-120"/>
               </a:rPr>
-              <a:t>Read the canonical Google Cloud Architecture Center reference architecture.
-</a:t>
-            </a:r>
-            <a:pPr indent="0" marL="0">
-              <a:lnSpc>
-                <a:spcPct val="118000"/>
-              </a:lnSpc>
-              <a:buNone/>
-            </a:pPr>
-            <a:r>
-              <a:rPr lang="en-US" sz="800" b="1" dirty="0">
+              <a:t>Read the canonical Google Cloud Architecture Center reference architecture.</a:t>
+            </a:r>
+            <a:endParaRPr lang="en-US" sz="790" dirty="0"/>
+          </a:p>
+          <a:p>
+            <a:pPr indent="0" marL="0">
+              <a:lnSpc>
+                <a:spcPct val="120000"/>
+              </a:lnSpc>
+              <a:buNone/>
+            </a:pPr>
+            <a:r>
+              <a:rPr lang="en-US" sz="790" b="1" dirty="0">
                 <a:solidFill>
                   <a:srgbClr val="1A73E8"/>
                 </a:solidFill>
@@ -12652,12 +12652,12 @@
             </a:r>
             <a:pPr indent="0" marL="0">
               <a:lnSpc>
-                <a:spcPct val="118000"/>
-              </a:lnSpc>
-              <a:buNone/>
-            </a:pPr>
-            <a:r>
-              <a:rPr lang="en-US" sz="780" dirty="0">
+                <a:spcPct val="120000"/>
+              </a:lnSpc>
+              <a:buNone/>
+            </a:pPr>
+            <a:r>
+              <a:rPr lang="en-US" sz="770" dirty="0">
                 <a:solidFill>
                   <a:srgbClr val="3C4043"/>
                 </a:solidFill>
@@ -12665,17 +12665,19 @@
                 <a:ea typeface="Arial" pitchFamily="34" charset="-122"/>
                 <a:cs typeface="Arial" pitchFamily="34" charset="-120"/>
               </a:rPr>
-              <a:t>Build hierarchical multi-agent systems, deterministic callbacks, and MCP toolsets.
-</a:t>
-            </a:r>
-            <a:pPr indent="0" marL="0">
-              <a:lnSpc>
-                <a:spcPct val="118000"/>
-              </a:lnSpc>
-              <a:buNone/>
-            </a:pPr>
-            <a:r>
-              <a:rPr lang="en-US" sz="800" b="1" dirty="0">
+              <a:t>Build hierarchical multi-agent systems, deterministic callbacks, and MCP toolsets.</a:t>
+            </a:r>
+            <a:endParaRPr lang="en-US" sz="790" dirty="0"/>
+          </a:p>
+          <a:p>
+            <a:pPr indent="0" marL="0">
+              <a:lnSpc>
+                <a:spcPct val="120000"/>
+              </a:lnSpc>
+              <a:buNone/>
+            </a:pPr>
+            <a:r>
+              <a:rPr lang="en-US" sz="790" b="1" dirty="0">
                 <a:solidFill>
                   <a:srgbClr val="1A73E8"/>
                 </a:solidFill>
@@ -12687,12 +12689,12 @@
             </a:r>
             <a:pPr indent="0" marL="0">
               <a:lnSpc>
-                <a:spcPct val="118000"/>
-              </a:lnSpc>
-              <a:buNone/>
-            </a:pPr>
-            <a:r>
-              <a:rPr lang="en-US" sz="780" dirty="0">
+                <a:spcPct val="120000"/>
+              </a:lnSpc>
+              <a:buNone/>
+            </a:pPr>
+            <a:r>
+              <a:rPr lang="en-US" sz="770" dirty="0">
                 <a:solidFill>
                   <a:srgbClr val="3C4043"/>
                 </a:solidFill>
@@ -12700,17 +12702,19 @@
                 <a:ea typeface="Arial" pitchFamily="34" charset="-122"/>
                 <a:cs typeface="Arial" pitchFamily="34" charset="-120"/>
               </a:rPr>
-              <a:t>Explore managed runtime deployment, Sessions, Memory Bank, and Context Caching.
-</a:t>
-            </a:r>
-            <a:pPr indent="0" marL="0">
-              <a:lnSpc>
-                <a:spcPct val="118000"/>
-              </a:lnSpc>
-              <a:buNone/>
-            </a:pPr>
-            <a:r>
-              <a:rPr lang="en-US" sz="800" b="1" dirty="0">
+              <a:t>Explore managed runtime deployment, Sessions, Memory Bank, and Context Caching.</a:t>
+            </a:r>
+            <a:endParaRPr lang="en-US" sz="790" dirty="0"/>
+          </a:p>
+          <a:p>
+            <a:pPr indent="0" marL="0">
+              <a:lnSpc>
+                <a:spcPct val="120000"/>
+              </a:lnSpc>
+              <a:buNone/>
+            </a:pPr>
+            <a:r>
+              <a:rPr lang="en-US" sz="790" b="1" dirty="0">
                 <a:solidFill>
                   <a:srgbClr val="1A73E8"/>
                 </a:solidFill>
@@ -12722,12 +12726,12 @@
             </a:r>
             <a:pPr indent="0" marL="0">
               <a:lnSpc>
-                <a:spcPct val="118000"/>
-              </a:lnSpc>
-              <a:buNone/>
-            </a:pPr>
-            <a:r>
-              <a:rPr lang="en-US" sz="780" dirty="0">
+                <a:spcPct val="120000"/>
+              </a:lnSpc>
+              <a:buNone/>
+            </a:pPr>
+            <a:r>
+              <a:rPr lang="en-US" sz="770" dirty="0">
                 <a:solidFill>
                   <a:srgbClr val="3C4043"/>
                 </a:solidFill>
@@ -12737,7 +12741,7 @@
               </a:rPr>
               <a:t>Review best practices for security, reliability, operational efficiency, and cost optimization.</a:t>
             </a:r>
-            <a:endParaRPr lang="en-US" sz="800" dirty="0"/>
+            <a:endParaRPr lang="en-US" sz="790" dirty="0"/>
           </a:p>
         </p:txBody>
       </p:sp>
@@ -12821,12 +12825,12 @@
           <a:ln/>
         </p:spPr>
         <p:txBody>
-          <a:bodyPr wrap="square" rtlCol="0" anchor="t"/>
-          <a:lstStyle/>
-          <a:p>
-            <a:pPr indent="0" marL="0">
-              <a:lnSpc>
-                <a:spcPct val="122000"/>
+          <a:bodyPr wrap="square" lIns="0" tIns="0" rIns="0" bIns="0" rtlCol="0" anchor="t"/>
+          <a:lstStyle/>
+          <a:p>
+            <a:pPr indent="0" marL="0">
+              <a:lnSpc>
+                <a:spcPct val="124000"/>
               </a:lnSpc>
               <a:buNone/>
             </a:pPr>
@@ -12839,17 +12843,19 @@
                 <a:ea typeface="Arial" pitchFamily="34" charset="-122"/>
                 <a:cs typeface="Arial" pitchFamily="34" charset="-120"/>
               </a:rPr>
-              <a:t>Except as otherwise noted, the content of this page is licensed under the Creative Commons Attribution 4.0 License, and code samples are licensed under the Apache 2.0 License.
-</a:t>
-            </a:r>
-            <a:pPr indent="0" marL="0">
-              <a:lnSpc>
-                <a:spcPct val="122000"/>
-              </a:lnSpc>
-              <a:buNone/>
-            </a:pPr>
-            <a:r>
-              <a:rPr lang="en-US" sz="820" b="1" dirty="0">
+              <a:t>Except as otherwise noted, the content of this page is licensed under the Creative Commons Attribution 4.0 License, and code samples are licensed under the Apache 2.0 License.</a:t>
+            </a:r>
+            <a:endParaRPr lang="en-US" sz="780" dirty="0"/>
+          </a:p>
+          <a:p>
+            <a:pPr indent="0" marL="0">
+              <a:lnSpc>
+                <a:spcPct val="124000"/>
+              </a:lnSpc>
+              <a:buNone/>
+            </a:pPr>
+            <a:r>
+              <a:rPr lang="en-US" sz="810" b="1" dirty="0">
                 <a:solidFill>
                   <a:srgbClr val="202124"/>
                 </a:solidFill>
@@ -12861,12 +12867,12 @@
             </a:r>
             <a:pPr indent="0" marL="0">
               <a:lnSpc>
-                <a:spcPct val="122000"/>
-              </a:lnSpc>
-              <a:buNone/>
-            </a:pPr>
-            <a:r>
-              <a:rPr lang="en-US" sz="820" dirty="0">
+                <a:spcPct val="124000"/>
+              </a:lnSpc>
+              <a:buNone/>
+            </a:pPr>
+            <a:r>
+              <a:rPr lang="en-US" sz="810" dirty="0">
                 <a:solidFill>
                   <a:srgbClr val="3C4043"/>
                 </a:solidFill>
@@ -12874,17 +12880,19 @@
                 <a:ea typeface="Arial" pitchFamily="34" charset="-122"/>
                 <a:cs typeface="Arial" pitchFamily="34" charset="-120"/>
               </a:rPr>
-              <a:t>Google Cloud Architecture Center • Enterprise AI Field Engineering
-</a:t>
-            </a:r>
-            <a:pPr indent="0" marL="0">
-              <a:lnSpc>
-                <a:spcPct val="122000"/>
-              </a:lnSpc>
-              <a:buNone/>
-            </a:pPr>
-            <a:r>
-              <a:rPr lang="en-US" sz="820" b="1" dirty="0">
+              <a:t>Google Cloud Architecture Center • Enterprise AI Field Engineering</a:t>
+            </a:r>
+            <a:endParaRPr lang="en-US" sz="780" dirty="0"/>
+          </a:p>
+          <a:p>
+            <a:pPr indent="0" marL="0">
+              <a:lnSpc>
+                <a:spcPct val="124000"/>
+              </a:lnSpc>
+              <a:buNone/>
+            </a:pPr>
+            <a:r>
+              <a:rPr lang="en-US" sz="810" b="1" dirty="0">
                 <a:solidFill>
                   <a:srgbClr val="202124"/>
                 </a:solidFill>
@@ -12896,12 +12904,12 @@
             </a:r>
             <a:pPr indent="0" marL="0">
               <a:lnSpc>
-                <a:spcPct val="122000"/>
-              </a:lnSpc>
-              <a:buNone/>
-            </a:pPr>
-            <a:r>
-              <a:rPr lang="en-US" sz="820" dirty="0">
+                <a:spcPct val="124000"/>
+              </a:lnSpc>
+              <a:buNone/>
+            </a:pPr>
+            <a:r>
+              <a:rPr lang="en-US" sz="810" dirty="0">
                 <a:solidFill>
                   <a:srgbClr val="3C4043"/>
                 </a:solidFill>
@@ -12909,12 +12917,14 @@
                 <a:ea typeface="Arial" pitchFamily="34" charset="-122"/>
                 <a:cs typeface="Arial" pitchFamily="34" charset="-120"/>
               </a:rPr>
-              <a:t>Principal AI Architect &amp; Field Deployment Engineering • Google Cloud Architecture Center Engineering Team
-</a:t>
-            </a:r>
-            <a:pPr indent="0" marL="0">
-              <a:lnSpc>
-                <a:spcPct val="122000"/>
+              <a:t>Principal AI Architect &amp; Field Deployment Engineering • Google Cloud Architecture Center Engineering Team</a:t>
+            </a:r>
+            <a:endParaRPr lang="en-US" sz="780" dirty="0"/>
+          </a:p>
+          <a:p>
+            <a:pPr indent="0" marL="0">
+              <a:lnSpc>
+                <a:spcPct val="124000"/>
               </a:lnSpc>
               <a:buNone/>
             </a:pPr>
